--- a/tradicional/INFORME_TRADICIONAL_SKELETON.pptx
+++ b/tradicional/INFORME_TRADICIONAL_SKELETON.pptx
@@ -1429,17 +1429,17 @@
         </p:nvSpPr>
         <p:spPr>
           <a:xfrm>
-            <a:off x="2361894" y="2302245"/>
-            <a:ext cx="2118762" cy="228600"/>
-          </a:xfrm>
-          <a:prstGeom prst="rect">
-            <a:avLst/>
-          </a:prstGeom>
-          <a:noFill/>
-          <a:ln/>
-        </p:spPr>
-        <p:txBody>
-          <a:bodyPr wrap="square" lIns="47625" tIns="114300" rIns="114300" bIns="47625" rtlCol="0" anchor="ctr"/>
+            <a:off x="2361894" y="2364135"/>
+            <a:ext cx="2118762" cy="133350"/>
+          </a:xfrm>
+          <a:prstGeom prst="rect">
+            <a:avLst/>
+          </a:prstGeom>
+          <a:noFill/>
+          <a:ln/>
+        </p:spPr>
+        <p:txBody>
+          <a:bodyPr wrap="square" lIns="0" tIns="114300" rIns="114300" bIns="0" rtlCol="0" anchor="ctr"/>
           <a:lstStyle/>
           <a:p>
             <a:pPr algn="r" indent="0" marL="0">
@@ -1507,17 +1507,17 @@
         </p:nvSpPr>
         <p:spPr>
           <a:xfrm>
-            <a:off x="4438773" y="2302245"/>
-            <a:ext cx="1438005" cy="228600"/>
-          </a:xfrm>
-          <a:prstGeom prst="rect">
-            <a:avLst/>
-          </a:prstGeom>
-          <a:noFill/>
-          <a:ln/>
-        </p:spPr>
-        <p:txBody>
-          <a:bodyPr wrap="square" lIns="47625" tIns="114300" rIns="114300" bIns="47625" rtlCol="0" anchor="ctr"/>
+            <a:off x="4438773" y="2364135"/>
+            <a:ext cx="1438005" cy="133350"/>
+          </a:xfrm>
+          <a:prstGeom prst="rect">
+            <a:avLst/>
+          </a:prstGeom>
+          <a:noFill/>
+          <a:ln/>
+        </p:spPr>
+        <p:txBody>
+          <a:bodyPr wrap="square" lIns="0" tIns="114300" rIns="114300" bIns="0" rtlCol="0" anchor="ctr"/>
           <a:lstStyle/>
           <a:p>
             <a:pPr algn="r" indent="0" marL="0">
@@ -1546,17 +1546,17 @@
         </p:nvSpPr>
         <p:spPr>
           <a:xfrm>
-            <a:off x="723882" y="3840533"/>
-            <a:ext cx="891683" cy="214313"/>
-          </a:xfrm>
-          <a:prstGeom prst="rect">
-            <a:avLst/>
-          </a:prstGeom>
-          <a:noFill/>
-          <a:ln/>
-        </p:spPr>
-        <p:txBody>
-          <a:bodyPr wrap="square" lIns="38100" tIns="114300" rIns="114300" bIns="38100" rtlCol="0" anchor="ctr"/>
+            <a:off x="723882" y="3897660"/>
+            <a:ext cx="891683" cy="133350"/>
+          </a:xfrm>
+          <a:prstGeom prst="rect">
+            <a:avLst/>
+          </a:prstGeom>
+          <a:noFill/>
+          <a:ln/>
+        </p:spPr>
+        <p:txBody>
+          <a:bodyPr wrap="square" lIns="0" tIns="114300" rIns="114300" bIns="0" rtlCol="0" anchor="ctr"/>
           <a:lstStyle/>
           <a:p>
             <a:pPr algn="l" indent="0" marL="0">
@@ -1585,17 +1585,17 @@
         </p:nvSpPr>
         <p:spPr>
           <a:xfrm>
-            <a:off x="1564573" y="2302245"/>
-            <a:ext cx="859032" cy="228600"/>
-          </a:xfrm>
-          <a:prstGeom prst="rect">
-            <a:avLst/>
-          </a:prstGeom>
-          <a:noFill/>
-          <a:ln/>
-        </p:spPr>
-        <p:txBody>
-          <a:bodyPr wrap="square" lIns="47625" tIns="114300" rIns="114300" bIns="47625" rtlCol="0" anchor="ctr"/>
+            <a:off x="1564573" y="2364135"/>
+            <a:ext cx="859032" cy="133350"/>
+          </a:xfrm>
+          <a:prstGeom prst="rect">
+            <a:avLst/>
+          </a:prstGeom>
+          <a:noFill/>
+          <a:ln/>
+        </p:spPr>
+        <p:txBody>
+          <a:bodyPr wrap="square" lIns="0" tIns="114300" rIns="114300" bIns="0" rtlCol="0" anchor="ctr"/>
           <a:lstStyle/>
           <a:p>
             <a:pPr algn="r" indent="0" marL="0">
@@ -1663,17 +1663,17 @@
         </p:nvSpPr>
         <p:spPr>
           <a:xfrm>
-            <a:off x="723882" y="2302245"/>
-            <a:ext cx="891683" cy="228600"/>
-          </a:xfrm>
-          <a:prstGeom prst="rect">
-            <a:avLst/>
-          </a:prstGeom>
-          <a:noFill/>
-          <a:ln/>
-        </p:spPr>
-        <p:txBody>
-          <a:bodyPr wrap="square" lIns="47625" tIns="114300" rIns="114300" bIns="47625" rtlCol="0" anchor="ctr"/>
+            <a:off x="723882" y="2364135"/>
+            <a:ext cx="891683" cy="133350"/>
+          </a:xfrm>
+          <a:prstGeom prst="rect">
+            <a:avLst/>
+          </a:prstGeom>
+          <a:noFill/>
+          <a:ln/>
+        </p:spPr>
+        <p:txBody>
+          <a:bodyPr wrap="square" lIns="0" tIns="114300" rIns="114300" bIns="0" rtlCol="0" anchor="ctr"/>
           <a:lstStyle/>
           <a:p>
             <a:pPr algn="l" indent="0" marL="0">
@@ -1702,17 +1702,17 @@
         </p:nvSpPr>
         <p:spPr>
           <a:xfrm>
-            <a:off x="723882" y="2530845"/>
-            <a:ext cx="891683" cy="214313"/>
-          </a:xfrm>
-          <a:prstGeom prst="rect">
-            <a:avLst/>
-          </a:prstGeom>
-          <a:noFill/>
-          <a:ln/>
-        </p:spPr>
-        <p:txBody>
-          <a:bodyPr wrap="square" lIns="38100" tIns="114300" rIns="114300" bIns="38100" rtlCol="0" anchor="ctr"/>
+            <a:off x="723882" y="2583210"/>
+            <a:ext cx="891683" cy="133350"/>
+          </a:xfrm>
+          <a:prstGeom prst="rect">
+            <a:avLst/>
+          </a:prstGeom>
+          <a:noFill/>
+          <a:ln/>
+        </p:spPr>
+        <p:txBody>
+          <a:bodyPr wrap="square" lIns="0" tIns="114300" rIns="114300" bIns="0" rtlCol="0" anchor="ctr"/>
           <a:lstStyle/>
           <a:p>
             <a:pPr algn="l" indent="0" marL="0">
@@ -1741,17 +1741,17 @@
         </p:nvSpPr>
         <p:spPr>
           <a:xfrm>
-            <a:off x="723882" y="2745158"/>
-            <a:ext cx="891683" cy="219075"/>
-          </a:xfrm>
-          <a:prstGeom prst="rect">
-            <a:avLst/>
-          </a:prstGeom>
-          <a:noFill/>
-          <a:ln/>
-        </p:spPr>
-        <p:txBody>
-          <a:bodyPr wrap="square" lIns="38100" tIns="114300" rIns="114300" bIns="38100" rtlCol="0" anchor="ctr"/>
+            <a:off x="723882" y="2802285"/>
+            <a:ext cx="891683" cy="133350"/>
+          </a:xfrm>
+          <a:prstGeom prst="rect">
+            <a:avLst/>
+          </a:prstGeom>
+          <a:noFill/>
+          <a:ln/>
+        </p:spPr>
+        <p:txBody>
+          <a:bodyPr wrap="square" lIns="0" tIns="114300" rIns="114300" bIns="0" rtlCol="0" anchor="ctr"/>
           <a:lstStyle/>
           <a:p>
             <a:pPr algn="l" indent="0" marL="0">
@@ -1780,17 +1780,17 @@
         </p:nvSpPr>
         <p:spPr>
           <a:xfrm>
-            <a:off x="723882" y="2964233"/>
-            <a:ext cx="891683" cy="219075"/>
-          </a:xfrm>
-          <a:prstGeom prst="rect">
-            <a:avLst/>
-          </a:prstGeom>
-          <a:noFill/>
-          <a:ln/>
-        </p:spPr>
-        <p:txBody>
-          <a:bodyPr wrap="square" lIns="38100" tIns="114300" rIns="114300" bIns="38100" rtlCol="0" anchor="ctr"/>
+            <a:off x="723882" y="3021360"/>
+            <a:ext cx="891683" cy="133350"/>
+          </a:xfrm>
+          <a:prstGeom prst="rect">
+            <a:avLst/>
+          </a:prstGeom>
+          <a:noFill/>
+          <a:ln/>
+        </p:spPr>
+        <p:txBody>
+          <a:bodyPr wrap="square" lIns="0" tIns="114300" rIns="114300" bIns="0" rtlCol="0" anchor="ctr"/>
           <a:lstStyle/>
           <a:p>
             <a:pPr algn="l" indent="0" marL="0">
@@ -1819,17 +1819,17 @@
         </p:nvSpPr>
         <p:spPr>
           <a:xfrm>
-            <a:off x="1564573" y="2964233"/>
-            <a:ext cx="859032" cy="219075"/>
-          </a:xfrm>
-          <a:prstGeom prst="rect">
-            <a:avLst/>
-          </a:prstGeom>
-          <a:noFill/>
-          <a:ln/>
-        </p:spPr>
-        <p:txBody>
-          <a:bodyPr wrap="square" lIns="38100" tIns="114300" rIns="114300" bIns="38100" rtlCol="0" anchor="ctr"/>
+            <a:off x="1564573" y="3021360"/>
+            <a:ext cx="859032" cy="133350"/>
+          </a:xfrm>
+          <a:prstGeom prst="rect">
+            <a:avLst/>
+          </a:prstGeom>
+          <a:noFill/>
+          <a:ln/>
+        </p:spPr>
+        <p:txBody>
+          <a:bodyPr wrap="square" lIns="0" tIns="114300" rIns="114300" bIns="0" rtlCol="0" anchor="ctr"/>
           <a:lstStyle/>
           <a:p>
             <a:pPr algn="r" indent="0" marL="0">
@@ -1858,17 +1858,17 @@
         </p:nvSpPr>
         <p:spPr>
           <a:xfrm>
-            <a:off x="723882" y="3183308"/>
-            <a:ext cx="891683" cy="219075"/>
-          </a:xfrm>
-          <a:prstGeom prst="rect">
-            <a:avLst/>
-          </a:prstGeom>
-          <a:noFill/>
-          <a:ln/>
-        </p:spPr>
-        <p:txBody>
-          <a:bodyPr wrap="square" lIns="38100" tIns="114300" rIns="114300" bIns="38100" rtlCol="0" anchor="ctr"/>
+            <a:off x="723882" y="3240435"/>
+            <a:ext cx="891683" cy="133350"/>
+          </a:xfrm>
+          <a:prstGeom prst="rect">
+            <a:avLst/>
+          </a:prstGeom>
+          <a:noFill/>
+          <a:ln/>
+        </p:spPr>
+        <p:txBody>
+          <a:bodyPr wrap="square" lIns="0" tIns="114300" rIns="114300" bIns="0" rtlCol="0" anchor="ctr"/>
           <a:lstStyle/>
           <a:p>
             <a:pPr algn="l" indent="0" marL="0">
@@ -1897,17 +1897,17 @@
         </p:nvSpPr>
         <p:spPr>
           <a:xfrm>
-            <a:off x="723882" y="3402383"/>
-            <a:ext cx="891683" cy="219075"/>
-          </a:xfrm>
-          <a:prstGeom prst="rect">
-            <a:avLst/>
-          </a:prstGeom>
-          <a:noFill/>
-          <a:ln/>
-        </p:spPr>
-        <p:txBody>
-          <a:bodyPr wrap="square" lIns="38100" tIns="114300" rIns="114300" bIns="38100" rtlCol="0" anchor="ctr"/>
+            <a:off x="723882" y="3459510"/>
+            <a:ext cx="891683" cy="133350"/>
+          </a:xfrm>
+          <a:prstGeom prst="rect">
+            <a:avLst/>
+          </a:prstGeom>
+          <a:noFill/>
+          <a:ln/>
+        </p:spPr>
+        <p:txBody>
+          <a:bodyPr wrap="square" lIns="0" tIns="114300" rIns="114300" bIns="0" rtlCol="0" anchor="ctr"/>
           <a:lstStyle/>
           <a:p>
             <a:pPr algn="l" indent="0" marL="0">
@@ -1936,17 +1936,17 @@
         </p:nvSpPr>
         <p:spPr>
           <a:xfrm>
-            <a:off x="723882" y="3621458"/>
-            <a:ext cx="891683" cy="219075"/>
-          </a:xfrm>
-          <a:prstGeom prst="rect">
-            <a:avLst/>
-          </a:prstGeom>
-          <a:noFill/>
-          <a:ln/>
-        </p:spPr>
-        <p:txBody>
-          <a:bodyPr wrap="square" lIns="38100" tIns="114300" rIns="114300" bIns="38100" rtlCol="0" anchor="ctr"/>
+            <a:off x="723882" y="3678585"/>
+            <a:ext cx="891683" cy="133350"/>
+          </a:xfrm>
+          <a:prstGeom prst="rect">
+            <a:avLst/>
+          </a:prstGeom>
+          <a:noFill/>
+          <a:ln/>
+        </p:spPr>
+        <p:txBody>
+          <a:bodyPr wrap="square" lIns="0" tIns="114300" rIns="114300" bIns="0" rtlCol="0" anchor="ctr"/>
           <a:lstStyle/>
           <a:p>
             <a:pPr algn="l" indent="0" marL="0">
@@ -1975,17 +1975,17 @@
         </p:nvSpPr>
         <p:spPr>
           <a:xfrm>
-            <a:off x="1564573" y="3840533"/>
-            <a:ext cx="859032" cy="214313"/>
-          </a:xfrm>
-          <a:prstGeom prst="rect">
-            <a:avLst/>
-          </a:prstGeom>
-          <a:noFill/>
-          <a:ln/>
-        </p:spPr>
-        <p:txBody>
-          <a:bodyPr wrap="square" lIns="38100" tIns="114300" rIns="114300" bIns="38100" rtlCol="0" anchor="ctr"/>
+            <a:off x="1564573" y="3897660"/>
+            <a:ext cx="859032" cy="133350"/>
+          </a:xfrm>
+          <a:prstGeom prst="rect">
+            <a:avLst/>
+          </a:prstGeom>
+          <a:noFill/>
+          <a:ln/>
+        </p:spPr>
+        <p:txBody>
+          <a:bodyPr wrap="square" lIns="0" tIns="114300" rIns="114300" bIns="0" rtlCol="0" anchor="ctr"/>
           <a:lstStyle/>
           <a:p>
             <a:pPr algn="r" indent="0" marL="0">
@@ -2014,17 +2014,17 @@
         </p:nvSpPr>
         <p:spPr>
           <a:xfrm>
-            <a:off x="2361894" y="3840533"/>
-            <a:ext cx="2118762" cy="214313"/>
-          </a:xfrm>
-          <a:prstGeom prst="rect">
-            <a:avLst/>
-          </a:prstGeom>
-          <a:noFill/>
-          <a:ln/>
-        </p:spPr>
-        <p:txBody>
-          <a:bodyPr wrap="square" lIns="38100" tIns="114300" rIns="114300" bIns="38100" rtlCol="0" anchor="ctr"/>
+            <a:off x="2361894" y="3897660"/>
+            <a:ext cx="2118762" cy="133350"/>
+          </a:xfrm>
+          <a:prstGeom prst="rect">
+            <a:avLst/>
+          </a:prstGeom>
+          <a:noFill/>
+          <a:ln/>
+        </p:spPr>
+        <p:txBody>
+          <a:bodyPr wrap="square" lIns="0" tIns="114300" rIns="114300" bIns="0" rtlCol="0" anchor="ctr"/>
           <a:lstStyle/>
           <a:p>
             <a:pPr algn="r" indent="0" marL="0">
@@ -2053,17 +2053,17 @@
         </p:nvSpPr>
         <p:spPr>
           <a:xfrm>
-            <a:off x="4438773" y="3840533"/>
-            <a:ext cx="1438005" cy="214313"/>
-          </a:xfrm>
-          <a:prstGeom prst="rect">
-            <a:avLst/>
-          </a:prstGeom>
-          <a:noFill/>
-          <a:ln/>
-        </p:spPr>
-        <p:txBody>
-          <a:bodyPr wrap="square" lIns="38100" tIns="114300" rIns="114300" bIns="38100" rtlCol="0" anchor="ctr"/>
+            <a:off x="4438773" y="3897660"/>
+            <a:ext cx="1438005" cy="133350"/>
+          </a:xfrm>
+          <a:prstGeom prst="rect">
+            <a:avLst/>
+          </a:prstGeom>
+          <a:noFill/>
+          <a:ln/>
+        </p:spPr>
+        <p:txBody>
+          <a:bodyPr wrap="square" lIns="0" tIns="114300" rIns="114300" bIns="0" rtlCol="0" anchor="ctr"/>
           <a:lstStyle/>
           <a:p>
             <a:pPr algn="r" indent="0" marL="0">
@@ -2404,17 +2404,17 @@
         </p:nvSpPr>
         <p:spPr>
           <a:xfrm>
-            <a:off x="1564573" y="2530845"/>
-            <a:ext cx="859032" cy="214313"/>
-          </a:xfrm>
-          <a:prstGeom prst="rect">
-            <a:avLst/>
-          </a:prstGeom>
-          <a:noFill/>
-          <a:ln/>
-        </p:spPr>
-        <p:txBody>
-          <a:bodyPr wrap="square" lIns="38100" tIns="114300" rIns="114300" bIns="38100" rtlCol="0" anchor="ctr"/>
+            <a:off x="1564573" y="2583210"/>
+            <a:ext cx="859032" cy="133350"/>
+          </a:xfrm>
+          <a:prstGeom prst="rect">
+            <a:avLst/>
+          </a:prstGeom>
+          <a:noFill/>
+          <a:ln/>
+        </p:spPr>
+        <p:txBody>
+          <a:bodyPr wrap="square" lIns="0" tIns="114300" rIns="114300" bIns="0" rtlCol="0" anchor="ctr"/>
           <a:lstStyle/>
           <a:p>
             <a:pPr algn="r" indent="0" marL="0">
@@ -2443,17 +2443,17 @@
         </p:nvSpPr>
         <p:spPr>
           <a:xfrm>
-            <a:off x="2361894" y="2530845"/>
-            <a:ext cx="2118762" cy="214313"/>
-          </a:xfrm>
-          <a:prstGeom prst="rect">
-            <a:avLst/>
-          </a:prstGeom>
-          <a:noFill/>
-          <a:ln/>
-        </p:spPr>
-        <p:txBody>
-          <a:bodyPr wrap="square" lIns="38100" tIns="114300" rIns="114300" bIns="38100" rtlCol="0" anchor="ctr"/>
+            <a:off x="2361894" y="2583210"/>
+            <a:ext cx="2118762" cy="133350"/>
+          </a:xfrm>
+          <a:prstGeom prst="rect">
+            <a:avLst/>
+          </a:prstGeom>
+          <a:noFill/>
+          <a:ln/>
+        </p:spPr>
+        <p:txBody>
+          <a:bodyPr wrap="square" lIns="0" tIns="114300" rIns="114300" bIns="0" rtlCol="0" anchor="ctr"/>
           <a:lstStyle/>
           <a:p>
             <a:pPr algn="r" indent="0" marL="0">
@@ -2482,17 +2482,17 @@
         </p:nvSpPr>
         <p:spPr>
           <a:xfrm>
-            <a:off x="4438773" y="2530845"/>
-            <a:ext cx="1438005" cy="214313"/>
-          </a:xfrm>
-          <a:prstGeom prst="rect">
-            <a:avLst/>
-          </a:prstGeom>
-          <a:noFill/>
-          <a:ln/>
-        </p:spPr>
-        <p:txBody>
-          <a:bodyPr wrap="square" lIns="38100" tIns="114300" rIns="114300" bIns="38100" rtlCol="0" anchor="ctr"/>
+            <a:off x="4438773" y="2583210"/>
+            <a:ext cx="1438005" cy="133350"/>
+          </a:xfrm>
+          <a:prstGeom prst="rect">
+            <a:avLst/>
+          </a:prstGeom>
+          <a:noFill/>
+          <a:ln/>
+        </p:spPr>
+        <p:txBody>
+          <a:bodyPr wrap="square" lIns="0" tIns="114300" rIns="114300" bIns="0" rtlCol="0" anchor="ctr"/>
           <a:lstStyle/>
           <a:p>
             <a:pPr algn="r" indent="0" marL="0">
@@ -2521,17 +2521,17 @@
         </p:nvSpPr>
         <p:spPr>
           <a:xfrm>
-            <a:off x="1564573" y="2745158"/>
-            <a:ext cx="859032" cy="219075"/>
-          </a:xfrm>
-          <a:prstGeom prst="rect">
-            <a:avLst/>
-          </a:prstGeom>
-          <a:noFill/>
-          <a:ln/>
-        </p:spPr>
-        <p:txBody>
-          <a:bodyPr wrap="square" lIns="38100" tIns="114300" rIns="114300" bIns="38100" rtlCol="0" anchor="ctr"/>
+            <a:off x="1564573" y="2802285"/>
+            <a:ext cx="859032" cy="133350"/>
+          </a:xfrm>
+          <a:prstGeom prst="rect">
+            <a:avLst/>
+          </a:prstGeom>
+          <a:noFill/>
+          <a:ln/>
+        </p:spPr>
+        <p:txBody>
+          <a:bodyPr wrap="square" lIns="0" tIns="114300" rIns="114300" bIns="0" rtlCol="0" anchor="ctr"/>
           <a:lstStyle/>
           <a:p>
             <a:pPr algn="r" indent="0" marL="0">
@@ -2560,17 +2560,17 @@
         </p:nvSpPr>
         <p:spPr>
           <a:xfrm>
-            <a:off x="2361894" y="2745158"/>
-            <a:ext cx="2118762" cy="219075"/>
-          </a:xfrm>
-          <a:prstGeom prst="rect">
-            <a:avLst/>
-          </a:prstGeom>
-          <a:noFill/>
-          <a:ln/>
-        </p:spPr>
-        <p:txBody>
-          <a:bodyPr wrap="square" lIns="38100" tIns="114300" rIns="114300" bIns="38100" rtlCol="0" anchor="ctr"/>
+            <a:off x="2361894" y="2802285"/>
+            <a:ext cx="2118762" cy="133350"/>
+          </a:xfrm>
+          <a:prstGeom prst="rect">
+            <a:avLst/>
+          </a:prstGeom>
+          <a:noFill/>
+          <a:ln/>
+        </p:spPr>
+        <p:txBody>
+          <a:bodyPr wrap="square" lIns="0" tIns="114300" rIns="114300" bIns="0" rtlCol="0" anchor="ctr"/>
           <a:lstStyle/>
           <a:p>
             <a:pPr algn="r" indent="0" marL="0">
@@ -2599,17 +2599,17 @@
         </p:nvSpPr>
         <p:spPr>
           <a:xfrm>
-            <a:off x="4438773" y="2745158"/>
-            <a:ext cx="1438005" cy="219075"/>
-          </a:xfrm>
-          <a:prstGeom prst="rect">
-            <a:avLst/>
-          </a:prstGeom>
-          <a:noFill/>
-          <a:ln/>
-        </p:spPr>
-        <p:txBody>
-          <a:bodyPr wrap="square" lIns="38100" tIns="114300" rIns="114300" bIns="38100" rtlCol="0" anchor="ctr"/>
+            <a:off x="4438773" y="2802285"/>
+            <a:ext cx="1438005" cy="133350"/>
+          </a:xfrm>
+          <a:prstGeom prst="rect">
+            <a:avLst/>
+          </a:prstGeom>
+          <a:noFill/>
+          <a:ln/>
+        </p:spPr>
+        <p:txBody>
+          <a:bodyPr wrap="square" lIns="0" tIns="114300" rIns="114300" bIns="0" rtlCol="0" anchor="ctr"/>
           <a:lstStyle/>
           <a:p>
             <a:pPr algn="r" indent="0" marL="0">
@@ -2638,17 +2638,17 @@
         </p:nvSpPr>
         <p:spPr>
           <a:xfrm>
-            <a:off x="2361894" y="2964233"/>
-            <a:ext cx="2118762" cy="219075"/>
-          </a:xfrm>
-          <a:prstGeom prst="rect">
-            <a:avLst/>
-          </a:prstGeom>
-          <a:noFill/>
-          <a:ln/>
-        </p:spPr>
-        <p:txBody>
-          <a:bodyPr wrap="square" lIns="38100" tIns="114300" rIns="114300" bIns="38100" rtlCol="0" anchor="ctr"/>
+            <a:off x="2361894" y="3021360"/>
+            <a:ext cx="2118762" cy="133350"/>
+          </a:xfrm>
+          <a:prstGeom prst="rect">
+            <a:avLst/>
+          </a:prstGeom>
+          <a:noFill/>
+          <a:ln/>
+        </p:spPr>
+        <p:txBody>
+          <a:bodyPr wrap="square" lIns="0" tIns="114300" rIns="114300" bIns="0" rtlCol="0" anchor="ctr"/>
           <a:lstStyle/>
           <a:p>
             <a:pPr algn="r" indent="0" marL="0">
@@ -2677,17 +2677,17 @@
         </p:nvSpPr>
         <p:spPr>
           <a:xfrm>
-            <a:off x="4438773" y="2964233"/>
-            <a:ext cx="1438005" cy="219075"/>
-          </a:xfrm>
-          <a:prstGeom prst="rect">
-            <a:avLst/>
-          </a:prstGeom>
-          <a:noFill/>
-          <a:ln/>
-        </p:spPr>
-        <p:txBody>
-          <a:bodyPr wrap="square" lIns="38100" tIns="114300" rIns="114300" bIns="38100" rtlCol="0" anchor="ctr"/>
+            <a:off x="4438773" y="3021360"/>
+            <a:ext cx="1438005" cy="133350"/>
+          </a:xfrm>
+          <a:prstGeom prst="rect">
+            <a:avLst/>
+          </a:prstGeom>
+          <a:noFill/>
+          <a:ln/>
+        </p:spPr>
+        <p:txBody>
+          <a:bodyPr wrap="square" lIns="0" tIns="114300" rIns="114300" bIns="0" rtlCol="0" anchor="ctr"/>
           <a:lstStyle/>
           <a:p>
             <a:pPr algn="r" indent="0" marL="0">
@@ -2716,17 +2716,17 @@
         </p:nvSpPr>
         <p:spPr>
           <a:xfrm>
-            <a:off x="1564573" y="3183308"/>
-            <a:ext cx="859032" cy="219075"/>
-          </a:xfrm>
-          <a:prstGeom prst="rect">
-            <a:avLst/>
-          </a:prstGeom>
-          <a:noFill/>
-          <a:ln/>
-        </p:spPr>
-        <p:txBody>
-          <a:bodyPr wrap="square" lIns="38100" tIns="114300" rIns="114300" bIns="38100" rtlCol="0" anchor="ctr"/>
+            <a:off x="1564573" y="3240435"/>
+            <a:ext cx="859032" cy="133350"/>
+          </a:xfrm>
+          <a:prstGeom prst="rect">
+            <a:avLst/>
+          </a:prstGeom>
+          <a:noFill/>
+          <a:ln/>
+        </p:spPr>
+        <p:txBody>
+          <a:bodyPr wrap="square" lIns="0" tIns="114300" rIns="114300" bIns="0" rtlCol="0" anchor="ctr"/>
           <a:lstStyle/>
           <a:p>
             <a:pPr algn="r" indent="0" marL="0">
@@ -2755,17 +2755,17 @@
         </p:nvSpPr>
         <p:spPr>
           <a:xfrm>
-            <a:off x="2361894" y="3183308"/>
-            <a:ext cx="2118762" cy="219075"/>
-          </a:xfrm>
-          <a:prstGeom prst="rect">
-            <a:avLst/>
-          </a:prstGeom>
-          <a:noFill/>
-          <a:ln/>
-        </p:spPr>
-        <p:txBody>
-          <a:bodyPr wrap="square" lIns="38100" tIns="114300" rIns="114300" bIns="38100" rtlCol="0" anchor="ctr"/>
+            <a:off x="2361894" y="3240435"/>
+            <a:ext cx="2118762" cy="133350"/>
+          </a:xfrm>
+          <a:prstGeom prst="rect">
+            <a:avLst/>
+          </a:prstGeom>
+          <a:noFill/>
+          <a:ln/>
+        </p:spPr>
+        <p:txBody>
+          <a:bodyPr wrap="square" lIns="0" tIns="114300" rIns="114300" bIns="0" rtlCol="0" anchor="ctr"/>
           <a:lstStyle/>
           <a:p>
             <a:pPr algn="r" indent="0" marL="0">
@@ -2794,17 +2794,17 @@
         </p:nvSpPr>
         <p:spPr>
           <a:xfrm>
-            <a:off x="4438773" y="3183308"/>
-            <a:ext cx="1438005" cy="219075"/>
-          </a:xfrm>
-          <a:prstGeom prst="rect">
-            <a:avLst/>
-          </a:prstGeom>
-          <a:noFill/>
-          <a:ln/>
-        </p:spPr>
-        <p:txBody>
-          <a:bodyPr wrap="square" lIns="38100" tIns="114300" rIns="114300" bIns="38100" rtlCol="0" anchor="ctr"/>
+            <a:off x="4438773" y="3240435"/>
+            <a:ext cx="1438005" cy="133350"/>
+          </a:xfrm>
+          <a:prstGeom prst="rect">
+            <a:avLst/>
+          </a:prstGeom>
+          <a:noFill/>
+          <a:ln/>
+        </p:spPr>
+        <p:txBody>
+          <a:bodyPr wrap="square" lIns="0" tIns="114300" rIns="114300" bIns="0" rtlCol="0" anchor="ctr"/>
           <a:lstStyle/>
           <a:p>
             <a:pPr algn="r" indent="0" marL="0">
@@ -2833,17 +2833,17 @@
         </p:nvSpPr>
         <p:spPr>
           <a:xfrm>
-            <a:off x="1564573" y="3402383"/>
-            <a:ext cx="859032" cy="219075"/>
-          </a:xfrm>
-          <a:prstGeom prst="rect">
-            <a:avLst/>
-          </a:prstGeom>
-          <a:noFill/>
-          <a:ln/>
-        </p:spPr>
-        <p:txBody>
-          <a:bodyPr wrap="square" lIns="38100" tIns="114300" rIns="114300" bIns="38100" rtlCol="0" anchor="ctr"/>
+            <a:off x="1564573" y="3459510"/>
+            <a:ext cx="859032" cy="133350"/>
+          </a:xfrm>
+          <a:prstGeom prst="rect">
+            <a:avLst/>
+          </a:prstGeom>
+          <a:noFill/>
+          <a:ln/>
+        </p:spPr>
+        <p:txBody>
+          <a:bodyPr wrap="square" lIns="0" tIns="114300" rIns="114300" bIns="0" rtlCol="0" anchor="ctr"/>
           <a:lstStyle/>
           <a:p>
             <a:pPr algn="r" indent="0" marL="0">
@@ -2872,17 +2872,17 @@
         </p:nvSpPr>
         <p:spPr>
           <a:xfrm>
-            <a:off x="2361894" y="3402383"/>
-            <a:ext cx="2118762" cy="219075"/>
-          </a:xfrm>
-          <a:prstGeom prst="rect">
-            <a:avLst/>
-          </a:prstGeom>
-          <a:noFill/>
-          <a:ln/>
-        </p:spPr>
-        <p:txBody>
-          <a:bodyPr wrap="square" lIns="38100" tIns="114300" rIns="114300" bIns="38100" rtlCol="0" anchor="ctr"/>
+            <a:off x="2361894" y="3459510"/>
+            <a:ext cx="2118762" cy="133350"/>
+          </a:xfrm>
+          <a:prstGeom prst="rect">
+            <a:avLst/>
+          </a:prstGeom>
+          <a:noFill/>
+          <a:ln/>
+        </p:spPr>
+        <p:txBody>
+          <a:bodyPr wrap="square" lIns="0" tIns="114300" rIns="114300" bIns="0" rtlCol="0" anchor="ctr"/>
           <a:lstStyle/>
           <a:p>
             <a:pPr algn="r" indent="0" marL="0">
@@ -2911,17 +2911,17 @@
         </p:nvSpPr>
         <p:spPr>
           <a:xfrm>
-            <a:off x="4438773" y="3402383"/>
-            <a:ext cx="1438005" cy="219075"/>
-          </a:xfrm>
-          <a:prstGeom prst="rect">
-            <a:avLst/>
-          </a:prstGeom>
-          <a:noFill/>
-          <a:ln/>
-        </p:spPr>
-        <p:txBody>
-          <a:bodyPr wrap="square" lIns="38100" tIns="114300" rIns="114300" bIns="38100" rtlCol="0" anchor="ctr"/>
+            <a:off x="4438773" y="3459510"/>
+            <a:ext cx="1438005" cy="133350"/>
+          </a:xfrm>
+          <a:prstGeom prst="rect">
+            <a:avLst/>
+          </a:prstGeom>
+          <a:noFill/>
+          <a:ln/>
+        </p:spPr>
+        <p:txBody>
+          <a:bodyPr wrap="square" lIns="0" tIns="114300" rIns="114300" bIns="0" rtlCol="0" anchor="ctr"/>
           <a:lstStyle/>
           <a:p>
             <a:pPr algn="r" indent="0" marL="0">
@@ -2950,17 +2950,17 @@
         </p:nvSpPr>
         <p:spPr>
           <a:xfrm>
-            <a:off x="1564573" y="3621458"/>
-            <a:ext cx="859032" cy="219075"/>
-          </a:xfrm>
-          <a:prstGeom prst="rect">
-            <a:avLst/>
-          </a:prstGeom>
-          <a:noFill/>
-          <a:ln/>
-        </p:spPr>
-        <p:txBody>
-          <a:bodyPr wrap="square" lIns="38100" tIns="114300" rIns="114300" bIns="38100" rtlCol="0" anchor="ctr"/>
+            <a:off x="1564573" y="3678585"/>
+            <a:ext cx="859032" cy="133350"/>
+          </a:xfrm>
+          <a:prstGeom prst="rect">
+            <a:avLst/>
+          </a:prstGeom>
+          <a:noFill/>
+          <a:ln/>
+        </p:spPr>
+        <p:txBody>
+          <a:bodyPr wrap="square" lIns="0" tIns="114300" rIns="114300" bIns="0" rtlCol="0" anchor="ctr"/>
           <a:lstStyle/>
           <a:p>
             <a:pPr algn="r" indent="0" marL="0">
@@ -2989,17 +2989,17 @@
         </p:nvSpPr>
         <p:spPr>
           <a:xfrm>
-            <a:off x="2361894" y="3621458"/>
-            <a:ext cx="2118762" cy="219075"/>
-          </a:xfrm>
-          <a:prstGeom prst="rect">
-            <a:avLst/>
-          </a:prstGeom>
-          <a:noFill/>
-          <a:ln/>
-        </p:spPr>
-        <p:txBody>
-          <a:bodyPr wrap="square" lIns="38100" tIns="114300" rIns="114300" bIns="38100" rtlCol="0" anchor="ctr"/>
+            <a:off x="2361894" y="3678585"/>
+            <a:ext cx="2118762" cy="133350"/>
+          </a:xfrm>
+          <a:prstGeom prst="rect">
+            <a:avLst/>
+          </a:prstGeom>
+          <a:noFill/>
+          <a:ln/>
+        </p:spPr>
+        <p:txBody>
+          <a:bodyPr wrap="square" lIns="0" tIns="114300" rIns="114300" bIns="0" rtlCol="0" anchor="ctr"/>
           <a:lstStyle/>
           <a:p>
             <a:pPr algn="r" indent="0" marL="0">
@@ -3028,17 +3028,17 @@
         </p:nvSpPr>
         <p:spPr>
           <a:xfrm>
-            <a:off x="4438773" y="3621458"/>
-            <a:ext cx="1438005" cy="219075"/>
-          </a:xfrm>
-          <a:prstGeom prst="rect">
-            <a:avLst/>
-          </a:prstGeom>
-          <a:noFill/>
-          <a:ln/>
-        </p:spPr>
-        <p:txBody>
-          <a:bodyPr wrap="square" lIns="38100" tIns="114300" rIns="114300" bIns="38100" rtlCol="0" anchor="ctr"/>
+            <a:off x="4438773" y="3678585"/>
+            <a:ext cx="1438005" cy="133350"/>
+          </a:xfrm>
+          <a:prstGeom prst="rect">
+            <a:avLst/>
+          </a:prstGeom>
+          <a:noFill/>
+          <a:ln/>
+        </p:spPr>
+        <p:txBody>
+          <a:bodyPr wrap="square" lIns="0" tIns="114300" rIns="114300" bIns="0" rtlCol="0" anchor="ctr"/>
           <a:lstStyle/>
           <a:p>
             <a:pPr algn="r" indent="0" marL="0">
@@ -3506,17 +3506,17 @@
         </p:nvSpPr>
         <p:spPr>
           <a:xfrm>
-            <a:off x="4006204" y="3384970"/>
-            <a:ext cx="1556804" cy="247650"/>
-          </a:xfrm>
-          <a:prstGeom prst="rect">
-            <a:avLst/>
-          </a:prstGeom>
-          <a:noFill/>
-          <a:ln/>
-        </p:spPr>
-        <p:txBody>
-          <a:bodyPr wrap="square" lIns="38100" tIns="114300" rIns="114300" bIns="38100" rtlCol="0" anchor="ctr"/>
+            <a:off x="4006204" y="3470672"/>
+            <a:ext cx="1556804" cy="104775"/>
+          </a:xfrm>
+          <a:prstGeom prst="rect">
+            <a:avLst/>
+          </a:prstGeom>
+          <a:noFill/>
+          <a:ln/>
+        </p:spPr>
+        <p:txBody>
+          <a:bodyPr wrap="square" lIns="0" tIns="114300" rIns="114300" bIns="0" rtlCol="0" anchor="ctr"/>
           <a:lstStyle/>
           <a:p>
             <a:pPr algn="l" indent="0" marL="0">
@@ -3545,17 +3545,17 @@
         </p:nvSpPr>
         <p:spPr>
           <a:xfrm>
-            <a:off x="4006204" y="4127920"/>
-            <a:ext cx="1556804" cy="242888"/>
-          </a:xfrm>
-          <a:prstGeom prst="rect">
-            <a:avLst/>
-          </a:prstGeom>
-          <a:noFill/>
-          <a:ln/>
-        </p:spPr>
-        <p:txBody>
-          <a:bodyPr wrap="square" lIns="38100" tIns="114300" rIns="114300" bIns="38100" rtlCol="0" anchor="ctr"/>
+            <a:off x="4006204" y="4213622"/>
+            <a:ext cx="1556804" cy="104775"/>
+          </a:xfrm>
+          <a:prstGeom prst="rect">
+            <a:avLst/>
+          </a:prstGeom>
+          <a:noFill/>
+          <a:ln/>
+        </p:spPr>
+        <p:txBody>
+          <a:bodyPr wrap="square" lIns="0" tIns="114300" rIns="114300" bIns="0" rtlCol="0" anchor="ctr"/>
           <a:lstStyle/>
           <a:p>
             <a:pPr algn="l" indent="0" marL="0">
@@ -3584,17 +3584,17 @@
         </p:nvSpPr>
         <p:spPr>
           <a:xfrm>
-            <a:off x="7555220" y="3886223"/>
-            <a:ext cx="1466977" cy="180975"/>
-          </a:xfrm>
-          <a:prstGeom prst="rect">
-            <a:avLst/>
-          </a:prstGeom>
-          <a:noFill/>
-          <a:ln/>
-        </p:spPr>
-        <p:txBody>
-          <a:bodyPr wrap="square" lIns="38100" tIns="114300" rIns="114300" bIns="38100" rtlCol="0" anchor="ctr"/>
+            <a:off x="7555220" y="3943350"/>
+            <a:ext cx="1466977" cy="95250"/>
+          </a:xfrm>
+          <a:prstGeom prst="rect">
+            <a:avLst/>
+          </a:prstGeom>
+          <a:noFill/>
+          <a:ln/>
+        </p:spPr>
+        <p:txBody>
+          <a:bodyPr wrap="square" lIns="0" tIns="114300" rIns="114300" bIns="0" rtlCol="0" anchor="ctr"/>
           <a:lstStyle/>
           <a:p>
             <a:pPr algn="l" indent="0" marL="0">
@@ -3623,17 +3623,17 @@
         </p:nvSpPr>
         <p:spPr>
           <a:xfrm>
-            <a:off x="704832" y="2642020"/>
-            <a:ext cx="1556804" cy="247650"/>
-          </a:xfrm>
-          <a:prstGeom prst="rect">
-            <a:avLst/>
-          </a:prstGeom>
-          <a:noFill/>
-          <a:ln/>
-        </p:spPr>
-        <p:txBody>
-          <a:bodyPr wrap="square" lIns="38100" tIns="114300" rIns="114300" bIns="38100" rtlCol="0" anchor="ctr"/>
+            <a:off x="704832" y="2727722"/>
+            <a:ext cx="1556804" cy="104775"/>
+          </a:xfrm>
+          <a:prstGeom prst="rect">
+            <a:avLst/>
+          </a:prstGeom>
+          <a:noFill/>
+          <a:ln/>
+        </p:spPr>
+        <p:txBody>
+          <a:bodyPr wrap="square" lIns="0" tIns="114300" rIns="114300" bIns="0" rtlCol="0" anchor="ctr"/>
           <a:lstStyle/>
           <a:p>
             <a:pPr algn="l" indent="0" marL="0">
@@ -3662,17 +3662,17 @@
         </p:nvSpPr>
         <p:spPr>
           <a:xfrm>
-            <a:off x="704832" y="3384970"/>
-            <a:ext cx="1556804" cy="247650"/>
-          </a:xfrm>
-          <a:prstGeom prst="rect">
-            <a:avLst/>
-          </a:prstGeom>
-          <a:noFill/>
-          <a:ln/>
-        </p:spPr>
-        <p:txBody>
-          <a:bodyPr wrap="square" lIns="38100" tIns="114300" rIns="114300" bIns="38100" rtlCol="0" anchor="ctr"/>
+            <a:off x="704832" y="3470672"/>
+            <a:ext cx="1556804" cy="104775"/>
+          </a:xfrm>
+          <a:prstGeom prst="rect">
+            <a:avLst/>
+          </a:prstGeom>
+          <a:noFill/>
+          <a:ln/>
+        </p:spPr>
+        <p:txBody>
+          <a:bodyPr wrap="square" lIns="0" tIns="114300" rIns="114300" bIns="0" rtlCol="0" anchor="ctr"/>
           <a:lstStyle/>
           <a:p>
             <a:pPr algn="l" indent="0" marL="0">
@@ -3701,17 +3701,17 @@
         </p:nvSpPr>
         <p:spPr>
           <a:xfrm>
-            <a:off x="704832" y="4127920"/>
-            <a:ext cx="1556804" cy="242888"/>
-          </a:xfrm>
-          <a:prstGeom prst="rect">
-            <a:avLst/>
-          </a:prstGeom>
-          <a:noFill/>
-          <a:ln/>
-        </p:spPr>
-        <p:txBody>
-          <a:bodyPr wrap="square" lIns="38100" tIns="114300" rIns="114300" bIns="38100" rtlCol="0" anchor="ctr"/>
+            <a:off x="704832" y="4213622"/>
+            <a:ext cx="1556804" cy="104775"/>
+          </a:xfrm>
+          <a:prstGeom prst="rect">
+            <a:avLst/>
+          </a:prstGeom>
+          <a:noFill/>
+          <a:ln/>
+        </p:spPr>
+        <p:txBody>
+          <a:bodyPr wrap="square" lIns="0" tIns="114300" rIns="114300" bIns="0" rtlCol="0" anchor="ctr"/>
           <a:lstStyle/>
           <a:p>
             <a:pPr algn="l" indent="0" marL="0">
@@ -3740,17 +3740,17 @@
         </p:nvSpPr>
         <p:spPr>
           <a:xfrm>
-            <a:off x="4006204" y="1899070"/>
-            <a:ext cx="1556804" cy="247650"/>
-          </a:xfrm>
-          <a:prstGeom prst="rect">
-            <a:avLst/>
-          </a:prstGeom>
-          <a:noFill/>
-          <a:ln/>
-        </p:spPr>
-        <p:txBody>
-          <a:bodyPr wrap="square" lIns="38100" tIns="114300" rIns="114300" bIns="38100" rtlCol="0" anchor="ctr"/>
+            <a:off x="4006204" y="1984772"/>
+            <a:ext cx="1556804" cy="104775"/>
+          </a:xfrm>
+          <a:prstGeom prst="rect">
+            <a:avLst/>
+          </a:prstGeom>
+          <a:noFill/>
+          <a:ln/>
+        </p:spPr>
+        <p:txBody>
+          <a:bodyPr wrap="square" lIns="0" tIns="114300" rIns="114300" bIns="0" rtlCol="0" anchor="ctr"/>
           <a:lstStyle/>
           <a:p>
             <a:pPr algn="l" indent="0" marL="0">
@@ -3779,17 +3779,17 @@
         </p:nvSpPr>
         <p:spPr>
           <a:xfrm>
-            <a:off x="7555220" y="3710010"/>
-            <a:ext cx="1466977" cy="176212"/>
-          </a:xfrm>
-          <a:prstGeom prst="rect">
-            <a:avLst/>
-          </a:prstGeom>
-          <a:noFill/>
-          <a:ln/>
-        </p:spPr>
-        <p:txBody>
-          <a:bodyPr wrap="square" lIns="38100" tIns="114300" rIns="114300" bIns="38100" rtlCol="0" anchor="ctr"/>
+            <a:off x="7555220" y="3762375"/>
+            <a:ext cx="1466977" cy="95250"/>
+          </a:xfrm>
+          <a:prstGeom prst="rect">
+            <a:avLst/>
+          </a:prstGeom>
+          <a:noFill/>
+          <a:ln/>
+        </p:spPr>
+        <p:txBody>
+          <a:bodyPr wrap="square" lIns="0" tIns="114300" rIns="114300" bIns="0" rtlCol="0" anchor="ctr"/>
           <a:lstStyle/>
           <a:p>
             <a:pPr algn="l" indent="0" marL="0">
@@ -3818,17 +3818,17 @@
         </p:nvSpPr>
         <p:spPr>
           <a:xfrm>
-            <a:off x="704832" y="1656182"/>
-            <a:ext cx="1556804" cy="242888"/>
-          </a:xfrm>
-          <a:prstGeom prst="rect">
-            <a:avLst/>
-          </a:prstGeom>
-          <a:noFill/>
-          <a:ln/>
-        </p:spPr>
-        <p:txBody>
-          <a:bodyPr wrap="square" lIns="38100" tIns="114300" rIns="114300" bIns="38100" rtlCol="0" anchor="ctr"/>
+            <a:off x="704832" y="1737122"/>
+            <a:ext cx="1556804" cy="104775"/>
+          </a:xfrm>
+          <a:prstGeom prst="rect">
+            <a:avLst/>
+          </a:prstGeom>
+          <a:noFill/>
+          <a:ln/>
+        </p:spPr>
+        <p:txBody>
+          <a:bodyPr wrap="square" lIns="0" tIns="114300" rIns="114300" bIns="0" rtlCol="0" anchor="ctr"/>
           <a:lstStyle/>
           <a:p>
             <a:pPr algn="l" indent="0" marL="0">
@@ -3857,17 +3857,17 @@
         </p:nvSpPr>
         <p:spPr>
           <a:xfrm>
-            <a:off x="704832" y="2394370"/>
-            <a:ext cx="1556804" cy="247650"/>
-          </a:xfrm>
-          <a:prstGeom prst="rect">
-            <a:avLst/>
-          </a:prstGeom>
-          <a:noFill/>
-          <a:ln/>
-        </p:spPr>
-        <p:txBody>
-          <a:bodyPr wrap="square" lIns="38100" tIns="114300" rIns="114300" bIns="38100" rtlCol="0" anchor="ctr"/>
+            <a:off x="704832" y="2480072"/>
+            <a:ext cx="1556804" cy="104775"/>
+          </a:xfrm>
+          <a:prstGeom prst="rect">
+            <a:avLst/>
+          </a:prstGeom>
+          <a:noFill/>
+          <a:ln/>
+        </p:spPr>
+        <p:txBody>
+          <a:bodyPr wrap="square" lIns="0" tIns="114300" rIns="114300" bIns="0" rtlCol="0" anchor="ctr"/>
           <a:lstStyle/>
           <a:p>
             <a:pPr algn="l" indent="0" marL="0">
@@ -3896,17 +3896,17 @@
         </p:nvSpPr>
         <p:spPr>
           <a:xfrm>
-            <a:off x="704832" y="3137320"/>
-            <a:ext cx="1556804" cy="247650"/>
-          </a:xfrm>
-          <a:prstGeom prst="rect">
-            <a:avLst/>
-          </a:prstGeom>
-          <a:noFill/>
-          <a:ln/>
-        </p:spPr>
-        <p:txBody>
-          <a:bodyPr wrap="square" lIns="38100" tIns="114300" rIns="114300" bIns="38100" rtlCol="0" anchor="ctr"/>
+            <a:off x="704832" y="3223022"/>
+            <a:ext cx="1556804" cy="104775"/>
+          </a:xfrm>
+          <a:prstGeom prst="rect">
+            <a:avLst/>
+          </a:prstGeom>
+          <a:noFill/>
+          <a:ln/>
+        </p:spPr>
+        <p:txBody>
+          <a:bodyPr wrap="square" lIns="0" tIns="114300" rIns="114300" bIns="0" rtlCol="0" anchor="ctr"/>
           <a:lstStyle/>
           <a:p>
             <a:pPr algn="l" indent="0" marL="0">
@@ -3935,17 +3935,17 @@
         </p:nvSpPr>
         <p:spPr>
           <a:xfrm>
-            <a:off x="4006204" y="3632620"/>
-            <a:ext cx="1556804" cy="247650"/>
-          </a:xfrm>
-          <a:prstGeom prst="rect">
-            <a:avLst/>
-          </a:prstGeom>
-          <a:noFill/>
-          <a:ln/>
-        </p:spPr>
-        <p:txBody>
-          <a:bodyPr wrap="square" lIns="38100" tIns="114300" rIns="114300" bIns="38100" rtlCol="0" anchor="ctr"/>
+            <a:off x="4006204" y="3718322"/>
+            <a:ext cx="1556804" cy="104775"/>
+          </a:xfrm>
+          <a:prstGeom prst="rect">
+            <a:avLst/>
+          </a:prstGeom>
+          <a:noFill/>
+          <a:ln/>
+        </p:spPr>
+        <p:txBody>
+          <a:bodyPr wrap="square" lIns="0" tIns="114300" rIns="114300" bIns="0" rtlCol="0" anchor="ctr"/>
           <a:lstStyle/>
           <a:p>
             <a:pPr algn="l" indent="0" marL="0">
@@ -3974,17 +3974,17 @@
         </p:nvSpPr>
         <p:spPr>
           <a:xfrm>
-            <a:off x="704832" y="2146720"/>
-            <a:ext cx="1556804" cy="247650"/>
-          </a:xfrm>
-          <a:prstGeom prst="rect">
-            <a:avLst/>
-          </a:prstGeom>
-          <a:noFill/>
-          <a:ln/>
-        </p:spPr>
-        <p:txBody>
-          <a:bodyPr wrap="square" lIns="38100" tIns="114300" rIns="114300" bIns="38100" rtlCol="0" anchor="ctr"/>
+            <a:off x="704832" y="2232422"/>
+            <a:ext cx="1556804" cy="104775"/>
+          </a:xfrm>
+          <a:prstGeom prst="rect">
+            <a:avLst/>
+          </a:prstGeom>
+          <a:noFill/>
+          <a:ln/>
+        </p:spPr>
+        <p:txBody>
+          <a:bodyPr wrap="square" lIns="0" tIns="114300" rIns="114300" bIns="0" rtlCol="0" anchor="ctr"/>
           <a:lstStyle/>
           <a:p>
             <a:pPr algn="l" indent="0" marL="0">
@@ -4013,17 +4013,17 @@
         </p:nvSpPr>
         <p:spPr>
           <a:xfrm>
-            <a:off x="4006204" y="2394370"/>
-            <a:ext cx="1556804" cy="247650"/>
-          </a:xfrm>
-          <a:prstGeom prst="rect">
-            <a:avLst/>
-          </a:prstGeom>
-          <a:noFill/>
-          <a:ln/>
-        </p:spPr>
-        <p:txBody>
-          <a:bodyPr wrap="square" lIns="38100" tIns="114300" rIns="114300" bIns="38100" rtlCol="0" anchor="ctr"/>
+            <a:off x="4006204" y="2480072"/>
+            <a:ext cx="1556804" cy="104775"/>
+          </a:xfrm>
+          <a:prstGeom prst="rect">
+            <a:avLst/>
+          </a:prstGeom>
+          <a:noFill/>
+          <a:ln/>
+        </p:spPr>
+        <p:txBody>
+          <a:bodyPr wrap="square" lIns="0" tIns="114300" rIns="114300" bIns="0" rtlCol="0" anchor="ctr"/>
           <a:lstStyle/>
           <a:p>
             <a:pPr algn="l" indent="0" marL="0">
@@ -4052,17 +4052,17 @@
         </p:nvSpPr>
         <p:spPr>
           <a:xfrm>
-            <a:off x="4006204" y="2889670"/>
-            <a:ext cx="1556804" cy="247650"/>
-          </a:xfrm>
-          <a:prstGeom prst="rect">
-            <a:avLst/>
-          </a:prstGeom>
-          <a:noFill/>
-          <a:ln/>
-        </p:spPr>
-        <p:txBody>
-          <a:bodyPr wrap="square" lIns="38100" tIns="114300" rIns="114300" bIns="38100" rtlCol="0" anchor="ctr"/>
+            <a:off x="4006204" y="2975372"/>
+            <a:ext cx="1556804" cy="104775"/>
+          </a:xfrm>
+          <a:prstGeom prst="rect">
+            <a:avLst/>
+          </a:prstGeom>
+          <a:noFill/>
+          <a:ln/>
+        </p:spPr>
+        <p:txBody>
+          <a:bodyPr wrap="square" lIns="0" tIns="114300" rIns="114300" bIns="0" rtlCol="0" anchor="ctr"/>
           <a:lstStyle/>
           <a:p>
             <a:pPr algn="l" indent="0" marL="0">
@@ -4091,17 +4091,17 @@
         </p:nvSpPr>
         <p:spPr>
           <a:xfrm>
-            <a:off x="9587715" y="4248173"/>
-            <a:ext cx="1466977" cy="180975"/>
-          </a:xfrm>
-          <a:prstGeom prst="rect">
-            <a:avLst/>
-          </a:prstGeom>
-          <a:noFill/>
-          <a:ln/>
-        </p:spPr>
-        <p:txBody>
-          <a:bodyPr wrap="square" lIns="38100" tIns="114300" rIns="114300" bIns="38100" rtlCol="0" anchor="ctr"/>
+            <a:off x="9587715" y="4305300"/>
+            <a:ext cx="1466977" cy="95250"/>
+          </a:xfrm>
+          <a:prstGeom prst="rect">
+            <a:avLst/>
+          </a:prstGeom>
+          <a:noFill/>
+          <a:ln/>
+        </p:spPr>
+        <p:txBody>
+          <a:bodyPr wrap="square" lIns="0" tIns="114300" rIns="114300" bIns="0" rtlCol="0" anchor="ctr"/>
           <a:lstStyle/>
           <a:p>
             <a:pPr algn="l" indent="0" marL="0">
@@ -4130,17 +4130,17 @@
         </p:nvSpPr>
         <p:spPr>
           <a:xfrm>
-            <a:off x="704832" y="3632620"/>
-            <a:ext cx="1556804" cy="247650"/>
-          </a:xfrm>
-          <a:prstGeom prst="rect">
-            <a:avLst/>
-          </a:prstGeom>
-          <a:noFill/>
-          <a:ln/>
-        </p:spPr>
-        <p:txBody>
-          <a:bodyPr wrap="square" lIns="38100" tIns="114300" rIns="114300" bIns="38100" rtlCol="0" anchor="ctr"/>
+            <a:off x="704832" y="3718322"/>
+            <a:ext cx="1556804" cy="104775"/>
+          </a:xfrm>
+          <a:prstGeom prst="rect">
+            <a:avLst/>
+          </a:prstGeom>
+          <a:noFill/>
+          <a:ln/>
+        </p:spPr>
+        <p:txBody>
+          <a:bodyPr wrap="square" lIns="0" tIns="114300" rIns="114300" bIns="0" rtlCol="0" anchor="ctr"/>
           <a:lstStyle/>
           <a:p>
             <a:pPr algn="l" indent="0" marL="0">
@@ -4169,17 +4169,17 @@
         </p:nvSpPr>
         <p:spPr>
           <a:xfrm>
-            <a:off x="4006204" y="2146720"/>
-            <a:ext cx="1556804" cy="247650"/>
-          </a:xfrm>
-          <a:prstGeom prst="rect">
-            <a:avLst/>
-          </a:prstGeom>
-          <a:noFill/>
-          <a:ln/>
-        </p:spPr>
-        <p:txBody>
-          <a:bodyPr wrap="square" lIns="38100" tIns="114300" rIns="114300" bIns="38100" rtlCol="0" anchor="ctr"/>
+            <a:off x="4006204" y="2232422"/>
+            <a:ext cx="1556804" cy="104775"/>
+          </a:xfrm>
+          <a:prstGeom prst="rect">
+            <a:avLst/>
+          </a:prstGeom>
+          <a:noFill/>
+          <a:ln/>
+        </p:spPr>
+        <p:txBody>
+          <a:bodyPr wrap="square" lIns="0" tIns="114300" rIns="114300" bIns="0" rtlCol="0" anchor="ctr"/>
           <a:lstStyle/>
           <a:p>
             <a:pPr algn="l" indent="0" marL="0">
@@ -4208,17 +4208,17 @@
         </p:nvSpPr>
         <p:spPr>
           <a:xfrm>
-            <a:off x="4006204" y="2642020"/>
-            <a:ext cx="1556804" cy="247650"/>
-          </a:xfrm>
-          <a:prstGeom prst="rect">
-            <a:avLst/>
-          </a:prstGeom>
-          <a:noFill/>
-          <a:ln/>
-        </p:spPr>
-        <p:txBody>
-          <a:bodyPr wrap="square" lIns="38100" tIns="114300" rIns="114300" bIns="38100" rtlCol="0" anchor="ctr"/>
+            <a:off x="4006204" y="2727722"/>
+            <a:ext cx="1556804" cy="104775"/>
+          </a:xfrm>
+          <a:prstGeom prst="rect">
+            <a:avLst/>
+          </a:prstGeom>
+          <a:noFill/>
+          <a:ln/>
+        </p:spPr>
+        <p:txBody>
+          <a:bodyPr wrap="square" lIns="0" tIns="114300" rIns="114300" bIns="0" rtlCol="0" anchor="ctr"/>
           <a:lstStyle/>
           <a:p>
             <a:pPr algn="l" indent="0" marL="0">
@@ -4247,17 +4247,17 @@
         </p:nvSpPr>
         <p:spPr>
           <a:xfrm>
-            <a:off x="7555220" y="4067198"/>
-            <a:ext cx="1466977" cy="180975"/>
-          </a:xfrm>
-          <a:prstGeom prst="rect">
-            <a:avLst/>
-          </a:prstGeom>
-          <a:noFill/>
-          <a:ln/>
-        </p:spPr>
-        <p:txBody>
-          <a:bodyPr wrap="square" lIns="38100" tIns="114300" rIns="114300" bIns="38100" rtlCol="0" anchor="ctr"/>
+            <a:off x="7555220" y="4124325"/>
+            <a:ext cx="1466977" cy="95250"/>
+          </a:xfrm>
+          <a:prstGeom prst="rect">
+            <a:avLst/>
+          </a:prstGeom>
+          <a:noFill/>
+          <a:ln/>
+        </p:spPr>
+        <p:txBody>
+          <a:bodyPr wrap="square" lIns="0" tIns="114300" rIns="114300" bIns="0" rtlCol="0" anchor="ctr"/>
           <a:lstStyle/>
           <a:p>
             <a:pPr algn="l" indent="0" marL="0">
@@ -4286,17 +4286,17 @@
         </p:nvSpPr>
         <p:spPr>
           <a:xfrm>
-            <a:off x="9587715" y="4067198"/>
-            <a:ext cx="1466977" cy="180975"/>
-          </a:xfrm>
-          <a:prstGeom prst="rect">
-            <a:avLst/>
-          </a:prstGeom>
-          <a:noFill/>
-          <a:ln/>
-        </p:spPr>
-        <p:txBody>
-          <a:bodyPr wrap="square" lIns="38100" tIns="114300" rIns="114300" bIns="38100" rtlCol="0" anchor="ctr"/>
+            <a:off x="9587715" y="4124325"/>
+            <a:ext cx="1466977" cy="95250"/>
+          </a:xfrm>
+          <a:prstGeom prst="rect">
+            <a:avLst/>
+          </a:prstGeom>
+          <a:noFill/>
+          <a:ln/>
+        </p:spPr>
+        <p:txBody>
+          <a:bodyPr wrap="square" lIns="0" tIns="114300" rIns="114300" bIns="0" rtlCol="0" anchor="ctr"/>
           <a:lstStyle/>
           <a:p>
             <a:pPr algn="l" indent="0" marL="0">
@@ -4325,17 +4325,17 @@
         </p:nvSpPr>
         <p:spPr>
           <a:xfrm>
-            <a:off x="4006204" y="3137320"/>
-            <a:ext cx="1556804" cy="247650"/>
-          </a:xfrm>
-          <a:prstGeom prst="rect">
-            <a:avLst/>
-          </a:prstGeom>
-          <a:noFill/>
-          <a:ln/>
-        </p:spPr>
-        <p:txBody>
-          <a:bodyPr wrap="square" lIns="38100" tIns="114300" rIns="114300" bIns="38100" rtlCol="0" anchor="ctr"/>
+            <a:off x="4006204" y="3223022"/>
+            <a:ext cx="1556804" cy="104775"/>
+          </a:xfrm>
+          <a:prstGeom prst="rect">
+            <a:avLst/>
+          </a:prstGeom>
+          <a:noFill/>
+          <a:ln/>
+        </p:spPr>
+        <p:txBody>
+          <a:bodyPr wrap="square" lIns="0" tIns="114300" rIns="114300" bIns="0" rtlCol="0" anchor="ctr"/>
           <a:lstStyle/>
           <a:p>
             <a:pPr algn="l" indent="0" marL="0">
@@ -4364,17 +4364,17 @@
         </p:nvSpPr>
         <p:spPr>
           <a:xfrm>
-            <a:off x="9587715" y="4429148"/>
-            <a:ext cx="1466977" cy="180975"/>
-          </a:xfrm>
-          <a:prstGeom prst="rect">
-            <a:avLst/>
-          </a:prstGeom>
-          <a:noFill/>
-          <a:ln/>
-        </p:spPr>
-        <p:txBody>
-          <a:bodyPr wrap="square" lIns="38100" tIns="114300" rIns="114300" bIns="38100" rtlCol="0" anchor="ctr"/>
+            <a:off x="9587715" y="4486275"/>
+            <a:ext cx="1466977" cy="95250"/>
+          </a:xfrm>
+          <a:prstGeom prst="rect">
+            <a:avLst/>
+          </a:prstGeom>
+          <a:noFill/>
+          <a:ln/>
+        </p:spPr>
+        <p:txBody>
+          <a:bodyPr wrap="square" lIns="0" tIns="114300" rIns="114300" bIns="0" rtlCol="0" anchor="ctr"/>
           <a:lstStyle/>
           <a:p>
             <a:pPr algn="l" indent="0" marL="0">
@@ -4403,17 +4403,17 @@
         </p:nvSpPr>
         <p:spPr>
           <a:xfrm>
-            <a:off x="704832" y="2889670"/>
-            <a:ext cx="1556804" cy="247650"/>
-          </a:xfrm>
-          <a:prstGeom prst="rect">
-            <a:avLst/>
-          </a:prstGeom>
-          <a:noFill/>
-          <a:ln/>
-        </p:spPr>
-        <p:txBody>
-          <a:bodyPr wrap="square" lIns="38100" tIns="114300" rIns="114300" bIns="38100" rtlCol="0" anchor="ctr"/>
+            <a:off x="704832" y="2975372"/>
+            <a:ext cx="1556804" cy="104775"/>
+          </a:xfrm>
+          <a:prstGeom prst="rect">
+            <a:avLst/>
+          </a:prstGeom>
+          <a:noFill/>
+          <a:ln/>
+        </p:spPr>
+        <p:txBody>
+          <a:bodyPr wrap="square" lIns="0" tIns="114300" rIns="114300" bIns="0" rtlCol="0" anchor="ctr"/>
           <a:lstStyle/>
           <a:p>
             <a:pPr algn="l" indent="0" marL="0">
@@ -4442,17 +4442,17 @@
         </p:nvSpPr>
         <p:spPr>
           <a:xfrm>
-            <a:off x="704832" y="3880270"/>
-            <a:ext cx="1556804" cy="247650"/>
-          </a:xfrm>
-          <a:prstGeom prst="rect">
-            <a:avLst/>
-          </a:prstGeom>
-          <a:noFill/>
-          <a:ln/>
-        </p:spPr>
-        <p:txBody>
-          <a:bodyPr wrap="square" lIns="38100" tIns="114300" rIns="114300" bIns="38100" rtlCol="0" anchor="ctr"/>
+            <a:off x="704832" y="3965972"/>
+            <a:ext cx="1556804" cy="104775"/>
+          </a:xfrm>
+          <a:prstGeom prst="rect">
+            <a:avLst/>
+          </a:prstGeom>
+          <a:noFill/>
+          <a:ln/>
+        </p:spPr>
+        <p:txBody>
+          <a:bodyPr wrap="square" lIns="0" tIns="114300" rIns="114300" bIns="0" rtlCol="0" anchor="ctr"/>
           <a:lstStyle/>
           <a:p>
             <a:pPr algn="l" indent="0" marL="0">
@@ -4481,17 +4481,17 @@
         </p:nvSpPr>
         <p:spPr>
           <a:xfrm>
-            <a:off x="4006204" y="3880270"/>
-            <a:ext cx="1556804" cy="247650"/>
-          </a:xfrm>
-          <a:prstGeom prst="rect">
-            <a:avLst/>
-          </a:prstGeom>
-          <a:noFill/>
-          <a:ln/>
-        </p:spPr>
-        <p:txBody>
-          <a:bodyPr wrap="square" lIns="38100" tIns="114300" rIns="114300" bIns="38100" rtlCol="0" anchor="ctr"/>
+            <a:off x="4006204" y="3965972"/>
+            <a:ext cx="1556804" cy="104775"/>
+          </a:xfrm>
+          <a:prstGeom prst="rect">
+            <a:avLst/>
+          </a:prstGeom>
+          <a:noFill/>
+          <a:ln/>
+        </p:spPr>
+        <p:txBody>
+          <a:bodyPr wrap="square" lIns="0" tIns="114300" rIns="114300" bIns="0" rtlCol="0" anchor="ctr"/>
           <a:lstStyle/>
           <a:p>
             <a:pPr algn="l" indent="0" marL="0">
@@ -4520,17 +4520,17 @@
         </p:nvSpPr>
         <p:spPr>
           <a:xfrm>
-            <a:off x="7555220" y="2924198"/>
-            <a:ext cx="774570" cy="242888"/>
-          </a:xfrm>
-          <a:prstGeom prst="rect">
-            <a:avLst/>
-          </a:prstGeom>
-          <a:noFill/>
-          <a:ln/>
-        </p:spPr>
-        <p:txBody>
-          <a:bodyPr wrap="square" lIns="38100" tIns="114300" rIns="114300" bIns="38100" rtlCol="0" anchor="ctr"/>
+            <a:off x="7555220" y="3009900"/>
+            <a:ext cx="774570" cy="104775"/>
+          </a:xfrm>
+          <a:prstGeom prst="rect">
+            <a:avLst/>
+          </a:prstGeom>
+          <a:noFill/>
+          <a:ln/>
+        </p:spPr>
+        <p:txBody>
+          <a:bodyPr wrap="square" lIns="0" tIns="114300" rIns="114300" bIns="0" rtlCol="0" anchor="ctr"/>
           <a:lstStyle/>
           <a:p>
             <a:pPr algn="l" indent="0" marL="0">
@@ -4559,17 +4559,17 @@
         </p:nvSpPr>
         <p:spPr>
           <a:xfrm>
-            <a:off x="9587715" y="3710010"/>
-            <a:ext cx="1466977" cy="176212"/>
-          </a:xfrm>
-          <a:prstGeom prst="rect">
-            <a:avLst/>
-          </a:prstGeom>
-          <a:noFill/>
-          <a:ln/>
-        </p:spPr>
-        <p:txBody>
-          <a:bodyPr wrap="square" lIns="38100" tIns="114300" rIns="114300" bIns="38100" rtlCol="0" anchor="ctr"/>
+            <a:off x="9587715" y="3762375"/>
+            <a:ext cx="1466977" cy="95250"/>
+          </a:xfrm>
+          <a:prstGeom prst="rect">
+            <a:avLst/>
+          </a:prstGeom>
+          <a:noFill/>
+          <a:ln/>
+        </p:spPr>
+        <p:txBody>
+          <a:bodyPr wrap="square" lIns="0" tIns="114300" rIns="114300" bIns="0" rtlCol="0" anchor="ctr"/>
           <a:lstStyle/>
           <a:p>
             <a:pPr algn="l" indent="0" marL="0">
@@ -4598,17 +4598,17 @@
         </p:nvSpPr>
         <p:spPr>
           <a:xfrm>
-            <a:off x="9587715" y="3886223"/>
-            <a:ext cx="1466977" cy="180975"/>
-          </a:xfrm>
-          <a:prstGeom prst="rect">
-            <a:avLst/>
-          </a:prstGeom>
-          <a:noFill/>
-          <a:ln/>
-        </p:spPr>
-        <p:txBody>
-          <a:bodyPr wrap="square" lIns="38100" tIns="114300" rIns="114300" bIns="38100" rtlCol="0" anchor="ctr"/>
+            <a:off x="9587715" y="3943350"/>
+            <a:ext cx="1466977" cy="95250"/>
+          </a:xfrm>
+          <a:prstGeom prst="rect">
+            <a:avLst/>
+          </a:prstGeom>
+          <a:noFill/>
+          <a:ln/>
+        </p:spPr>
+        <p:txBody>
+          <a:bodyPr wrap="square" lIns="0" tIns="114300" rIns="114300" bIns="0" rtlCol="0" anchor="ctr"/>
           <a:lstStyle/>
           <a:p>
             <a:pPr algn="l" indent="0" marL="0">
@@ -4637,17 +4637,17 @@
         </p:nvSpPr>
         <p:spPr>
           <a:xfrm>
-            <a:off x="704832" y="1899070"/>
-            <a:ext cx="1556804" cy="247650"/>
-          </a:xfrm>
-          <a:prstGeom prst="rect">
-            <a:avLst/>
-          </a:prstGeom>
-          <a:noFill/>
-          <a:ln/>
-        </p:spPr>
-        <p:txBody>
-          <a:bodyPr wrap="square" lIns="38100" tIns="114300" rIns="114300" bIns="38100" rtlCol="0" anchor="ctr"/>
+            <a:off x="704832" y="1984772"/>
+            <a:ext cx="1556804" cy="104775"/>
+          </a:xfrm>
+          <a:prstGeom prst="rect">
+            <a:avLst/>
+          </a:prstGeom>
+          <a:noFill/>
+          <a:ln/>
+        </p:spPr>
+        <p:txBody>
+          <a:bodyPr wrap="square" lIns="0" tIns="114300" rIns="114300" bIns="0" rtlCol="0" anchor="ctr"/>
           <a:lstStyle/>
           <a:p>
             <a:pPr algn="l" indent="0" marL="0">
@@ -4676,17 +4676,17 @@
         </p:nvSpPr>
         <p:spPr>
           <a:xfrm>
-            <a:off x="8283129" y="1214460"/>
-            <a:ext cx="827455" cy="228600"/>
-          </a:xfrm>
-          <a:prstGeom prst="rect">
-            <a:avLst/>
-          </a:prstGeom>
-          <a:noFill/>
-          <a:ln/>
-        </p:spPr>
-        <p:txBody>
-          <a:bodyPr wrap="square" lIns="47625" tIns="114300" rIns="114300" bIns="47625" rtlCol="0" anchor="ctr"/>
+            <a:off x="8283129" y="1276350"/>
+            <a:ext cx="827455" cy="133350"/>
+          </a:xfrm>
+          <a:prstGeom prst="rect">
+            <a:avLst/>
+          </a:prstGeom>
+          <a:noFill/>
+          <a:ln/>
+        </p:spPr>
+        <p:txBody>
+          <a:bodyPr wrap="square" lIns="0" tIns="114300" rIns="114300" bIns="0" rtlCol="0" anchor="ctr"/>
           <a:lstStyle/>
           <a:p>
             <a:pPr algn="r" indent="0" marL="0">
@@ -4715,17 +4715,17 @@
         </p:nvSpPr>
         <p:spPr>
           <a:xfrm>
-            <a:off x="704832" y="1427582"/>
-            <a:ext cx="1556804" cy="228600"/>
-          </a:xfrm>
-          <a:prstGeom prst="rect">
-            <a:avLst/>
-          </a:prstGeom>
-          <a:noFill/>
-          <a:ln/>
-        </p:spPr>
-        <p:txBody>
-          <a:bodyPr wrap="square" lIns="47625" tIns="114300" rIns="114300" bIns="47625" rtlCol="0" anchor="ctr"/>
+            <a:off x="704832" y="1489472"/>
+            <a:ext cx="1556804" cy="133350"/>
+          </a:xfrm>
+          <a:prstGeom prst="rect">
+            <a:avLst/>
+          </a:prstGeom>
+          <a:noFill/>
+          <a:ln/>
+        </p:spPr>
+        <p:txBody>
+          <a:bodyPr wrap="square" lIns="0" tIns="114300" rIns="114300" bIns="0" rtlCol="0" anchor="ctr"/>
           <a:lstStyle/>
           <a:p>
             <a:pPr algn="l" indent="0" marL="0">
@@ -4754,17 +4754,17 @@
         </p:nvSpPr>
         <p:spPr>
           <a:xfrm>
-            <a:off x="4006204" y="1427582"/>
-            <a:ext cx="1556804" cy="228600"/>
-          </a:xfrm>
-          <a:prstGeom prst="rect">
-            <a:avLst/>
-          </a:prstGeom>
-          <a:noFill/>
-          <a:ln/>
-        </p:spPr>
-        <p:txBody>
-          <a:bodyPr wrap="square" lIns="47625" tIns="114300" rIns="114300" bIns="47625" rtlCol="0" anchor="ctr"/>
+            <a:off x="4006204" y="1489472"/>
+            <a:ext cx="1556804" cy="133350"/>
+          </a:xfrm>
+          <a:prstGeom prst="rect">
+            <a:avLst/>
+          </a:prstGeom>
+          <a:noFill/>
+          <a:ln/>
+        </p:spPr>
+        <p:txBody>
+          <a:bodyPr wrap="square" lIns="0" tIns="114300" rIns="114300" bIns="0" rtlCol="0" anchor="ctr"/>
           <a:lstStyle/>
           <a:p>
             <a:pPr algn="l" indent="0" marL="0">
@@ -4793,17 +4793,17 @@
         </p:nvSpPr>
         <p:spPr>
           <a:xfrm>
-            <a:off x="9087287" y="1214460"/>
-            <a:ext cx="799863" cy="228600"/>
-          </a:xfrm>
-          <a:prstGeom prst="rect">
-            <a:avLst/>
-          </a:prstGeom>
-          <a:noFill/>
-          <a:ln/>
-        </p:spPr>
-        <p:txBody>
-          <a:bodyPr wrap="square" lIns="47625" tIns="114300" rIns="114300" bIns="47625" rtlCol="0" anchor="ctr"/>
+            <a:off x="9087287" y="1276350"/>
+            <a:ext cx="799863" cy="133350"/>
+          </a:xfrm>
+          <a:prstGeom prst="rect">
+            <a:avLst/>
+          </a:prstGeom>
+          <a:noFill/>
+          <a:ln/>
+        </p:spPr>
+        <p:txBody>
+          <a:bodyPr wrap="square" lIns="0" tIns="114300" rIns="114300" bIns="0" rtlCol="0" anchor="ctr"/>
           <a:lstStyle/>
           <a:p>
             <a:pPr algn="r" indent="0" marL="0">
@@ -4832,17 +4832,17 @@
         </p:nvSpPr>
         <p:spPr>
           <a:xfrm>
-            <a:off x="10643313" y="1214460"/>
-            <a:ext cx="843550" cy="228600"/>
-          </a:xfrm>
-          <a:prstGeom prst="rect">
-            <a:avLst/>
-          </a:prstGeom>
-          <a:noFill/>
-          <a:ln/>
-        </p:spPr>
-        <p:txBody>
-          <a:bodyPr wrap="square" lIns="47625" tIns="114300" rIns="114300" bIns="47625" rtlCol="0" anchor="ctr"/>
+            <a:off x="10643313" y="1276350"/>
+            <a:ext cx="843550" cy="133350"/>
+          </a:xfrm>
+          <a:prstGeom prst="rect">
+            <a:avLst/>
+          </a:prstGeom>
+          <a:noFill/>
+          <a:ln/>
+        </p:spPr>
+        <p:txBody>
+          <a:bodyPr wrap="square" lIns="0" tIns="114300" rIns="114300" bIns="0" rtlCol="0" anchor="ctr"/>
           <a:lstStyle/>
           <a:p>
             <a:pPr algn="r" indent="0" marL="0">
@@ -4871,17 +4871,17 @@
         </p:nvSpPr>
         <p:spPr>
           <a:xfrm>
-            <a:off x="7555220" y="4429148"/>
-            <a:ext cx="1466977" cy="180975"/>
-          </a:xfrm>
-          <a:prstGeom prst="rect">
-            <a:avLst/>
-          </a:prstGeom>
-          <a:noFill/>
-          <a:ln/>
-        </p:spPr>
-        <p:txBody>
-          <a:bodyPr wrap="square" lIns="38100" tIns="114300" rIns="114300" bIns="38100" rtlCol="0" anchor="ctr"/>
+            <a:off x="7555220" y="4486275"/>
+            <a:ext cx="1466977" cy="95250"/>
+          </a:xfrm>
+          <a:prstGeom prst="rect">
+            <a:avLst/>
+          </a:prstGeom>
+          <a:noFill/>
+          <a:ln/>
+        </p:spPr>
+        <p:txBody>
+          <a:bodyPr wrap="square" lIns="0" tIns="114300" rIns="114300" bIns="0" rtlCol="0" anchor="ctr"/>
           <a:lstStyle/>
           <a:p>
             <a:pPr algn="l" indent="0" marL="0">
@@ -4910,17 +4910,17 @@
         </p:nvSpPr>
         <p:spPr>
           <a:xfrm>
-            <a:off x="9587715" y="4610123"/>
-            <a:ext cx="1466977" cy="176212"/>
-          </a:xfrm>
-          <a:prstGeom prst="rect">
-            <a:avLst/>
-          </a:prstGeom>
-          <a:noFill/>
-          <a:ln/>
-        </p:spPr>
-        <p:txBody>
-          <a:bodyPr wrap="square" lIns="38100" tIns="114300" rIns="114300" bIns="38100" rtlCol="0" anchor="ctr"/>
+            <a:off x="9587715" y="4667250"/>
+            <a:ext cx="1466977" cy="95250"/>
+          </a:xfrm>
+          <a:prstGeom prst="rect">
+            <a:avLst/>
+          </a:prstGeom>
+          <a:noFill/>
+          <a:ln/>
+        </p:spPr>
+        <p:txBody>
+          <a:bodyPr wrap="square" lIns="0" tIns="114300" rIns="114300" bIns="0" rtlCol="0" anchor="ctr"/>
           <a:lstStyle/>
           <a:p>
             <a:pPr algn="l" indent="0" marL="0">
@@ -4949,17 +4949,17 @@
         </p:nvSpPr>
         <p:spPr>
           <a:xfrm>
-            <a:off x="4006204" y="1656182"/>
-            <a:ext cx="1556804" cy="242888"/>
-          </a:xfrm>
-          <a:prstGeom prst="rect">
-            <a:avLst/>
-          </a:prstGeom>
-          <a:noFill/>
-          <a:ln/>
-        </p:spPr>
-        <p:txBody>
-          <a:bodyPr wrap="square" lIns="38100" tIns="114300" rIns="114300" bIns="38100" rtlCol="0" anchor="ctr"/>
+            <a:off x="4006204" y="1737122"/>
+            <a:ext cx="1556804" cy="104775"/>
+          </a:xfrm>
+          <a:prstGeom prst="rect">
+            <a:avLst/>
+          </a:prstGeom>
+          <a:noFill/>
+          <a:ln/>
+        </p:spPr>
+        <p:txBody>
+          <a:bodyPr wrap="square" lIns="0" tIns="114300" rIns="114300" bIns="0" rtlCol="0" anchor="ctr"/>
           <a:lstStyle/>
           <a:p>
             <a:pPr algn="l" indent="0" marL="0">
@@ -4988,17 +4988,17 @@
         </p:nvSpPr>
         <p:spPr>
           <a:xfrm>
-            <a:off x="9863727" y="1214460"/>
-            <a:ext cx="804155" cy="228600"/>
-          </a:xfrm>
-          <a:prstGeom prst="rect">
-            <a:avLst/>
-          </a:prstGeom>
-          <a:noFill/>
-          <a:ln/>
-        </p:spPr>
-        <p:txBody>
-          <a:bodyPr wrap="square" lIns="47625" tIns="114300" rIns="114300" bIns="47625" rtlCol="0" anchor="ctr"/>
+            <a:off x="9863727" y="1276350"/>
+            <a:ext cx="804155" cy="133350"/>
+          </a:xfrm>
+          <a:prstGeom prst="rect">
+            <a:avLst/>
+          </a:prstGeom>
+          <a:noFill/>
+          <a:ln/>
+        </p:spPr>
+        <p:txBody>
+          <a:bodyPr wrap="square" lIns="0" tIns="114300" rIns="114300" bIns="0" rtlCol="0" anchor="ctr"/>
           <a:lstStyle/>
           <a:p>
             <a:pPr algn="r" indent="0" marL="0">
@@ -5027,17 +5027,17 @@
         </p:nvSpPr>
         <p:spPr>
           <a:xfrm>
-            <a:off x="10643313" y="1443060"/>
-            <a:ext cx="843550" cy="242888"/>
-          </a:xfrm>
-          <a:prstGeom prst="rect">
-            <a:avLst/>
-          </a:prstGeom>
-          <a:noFill/>
-          <a:ln/>
-        </p:spPr>
-        <p:txBody>
-          <a:bodyPr wrap="square" lIns="38100" tIns="114300" rIns="114300" bIns="38100" rtlCol="0" anchor="ctr"/>
+            <a:off x="10643313" y="1514475"/>
+            <a:ext cx="843550" cy="123825"/>
+          </a:xfrm>
+          <a:prstGeom prst="rect">
+            <a:avLst/>
+          </a:prstGeom>
+          <a:noFill/>
+          <a:ln/>
+        </p:spPr>
+        <p:txBody>
+          <a:bodyPr wrap="square" lIns="0" tIns="114300" rIns="114300" bIns="0" rtlCol="0" anchor="ctr"/>
           <a:lstStyle/>
           <a:p>
             <a:pPr algn="r" indent="0" marL="0">
@@ -5066,17 +5066,17 @@
         </p:nvSpPr>
         <p:spPr>
           <a:xfrm>
-            <a:off x="10643313" y="1933598"/>
-            <a:ext cx="843550" cy="247650"/>
-          </a:xfrm>
-          <a:prstGeom prst="rect">
-            <a:avLst/>
-          </a:prstGeom>
-          <a:noFill/>
-          <a:ln/>
-        </p:spPr>
-        <p:txBody>
-          <a:bodyPr wrap="square" lIns="38100" tIns="114300" rIns="114300" bIns="38100" rtlCol="0" anchor="ctr"/>
+            <a:off x="10643313" y="2009775"/>
+            <a:ext cx="843550" cy="123825"/>
+          </a:xfrm>
+          <a:prstGeom prst="rect">
+            <a:avLst/>
+          </a:prstGeom>
+          <a:noFill/>
+          <a:ln/>
+        </p:spPr>
+        <p:txBody>
+          <a:bodyPr wrap="square" lIns="0" tIns="114300" rIns="114300" bIns="0" rtlCol="0" anchor="ctr"/>
           <a:lstStyle/>
           <a:p>
             <a:pPr algn="r" indent="0" marL="0">
@@ -5105,17 +5105,17 @@
         </p:nvSpPr>
         <p:spPr>
           <a:xfrm>
-            <a:off x="10643313" y="2676548"/>
-            <a:ext cx="843550" cy="247650"/>
-          </a:xfrm>
-          <a:prstGeom prst="rect">
-            <a:avLst/>
-          </a:prstGeom>
-          <a:noFill/>
-          <a:ln/>
-        </p:spPr>
-        <p:txBody>
-          <a:bodyPr wrap="square" lIns="38100" tIns="114300" rIns="114300" bIns="38100" rtlCol="0" anchor="ctr"/>
+            <a:off x="10643313" y="2752725"/>
+            <a:ext cx="843550" cy="123825"/>
+          </a:xfrm>
+          <a:prstGeom prst="rect">
+            <a:avLst/>
+          </a:prstGeom>
+          <a:noFill/>
+          <a:ln/>
+        </p:spPr>
+        <p:txBody>
+          <a:bodyPr wrap="square" lIns="0" tIns="114300" rIns="114300" bIns="0" rtlCol="0" anchor="ctr"/>
           <a:lstStyle/>
           <a:p>
             <a:pPr algn="r" indent="0" marL="0">
@@ -5144,17 +5144,17 @@
         </p:nvSpPr>
         <p:spPr>
           <a:xfrm>
-            <a:off x="10643313" y="2924198"/>
-            <a:ext cx="843550" cy="242888"/>
-          </a:xfrm>
-          <a:prstGeom prst="rect">
-            <a:avLst/>
-          </a:prstGeom>
-          <a:noFill/>
-          <a:ln/>
-        </p:spPr>
-        <p:txBody>
-          <a:bodyPr wrap="square" lIns="38100" tIns="114300" rIns="114300" bIns="38100" rtlCol="0" anchor="ctr"/>
+            <a:off x="10643313" y="3000375"/>
+            <a:ext cx="843550" cy="123825"/>
+          </a:xfrm>
+          <a:prstGeom prst="rect">
+            <a:avLst/>
+          </a:prstGeom>
+          <a:noFill/>
+          <a:ln/>
+        </p:spPr>
+        <p:txBody>
+          <a:bodyPr wrap="square" lIns="0" tIns="114300" rIns="114300" bIns="0" rtlCol="0" anchor="ctr"/>
           <a:lstStyle/>
           <a:p>
             <a:pPr algn="r" indent="0" marL="0">
@@ -5183,17 +5183,17 @@
         </p:nvSpPr>
         <p:spPr>
           <a:xfrm>
-            <a:off x="7555220" y="4248173"/>
-            <a:ext cx="1466977" cy="180975"/>
-          </a:xfrm>
-          <a:prstGeom prst="rect">
-            <a:avLst/>
-          </a:prstGeom>
-          <a:noFill/>
-          <a:ln/>
-        </p:spPr>
-        <p:txBody>
-          <a:bodyPr wrap="square" lIns="38100" tIns="114300" rIns="114300" bIns="38100" rtlCol="0" anchor="ctr"/>
+            <a:off x="7555220" y="4305300"/>
+            <a:ext cx="1466977" cy="95250"/>
+          </a:xfrm>
+          <a:prstGeom prst="rect">
+            <a:avLst/>
+          </a:prstGeom>
+          <a:noFill/>
+          <a:ln/>
+        </p:spPr>
+        <p:txBody>
+          <a:bodyPr wrap="square" lIns="0" tIns="114300" rIns="114300" bIns="0" rtlCol="0" anchor="ctr"/>
           <a:lstStyle/>
           <a:p>
             <a:pPr algn="l" indent="0" marL="0">
@@ -5222,17 +5222,17 @@
         </p:nvSpPr>
         <p:spPr>
           <a:xfrm>
-            <a:off x="2203068" y="1427582"/>
-            <a:ext cx="454042" cy="228600"/>
-          </a:xfrm>
-          <a:prstGeom prst="rect">
-            <a:avLst/>
-          </a:prstGeom>
-          <a:noFill/>
-          <a:ln/>
-        </p:spPr>
-        <p:txBody>
-          <a:bodyPr wrap="square" lIns="47625" tIns="114300" rIns="114300" bIns="47625" rtlCol="0" anchor="ctr"/>
+            <a:off x="2203068" y="1489472"/>
+            <a:ext cx="454042" cy="133350"/>
+          </a:xfrm>
+          <a:prstGeom prst="rect">
+            <a:avLst/>
+          </a:prstGeom>
+          <a:noFill/>
+          <a:ln/>
+        </p:spPr>
+        <p:txBody>
+          <a:bodyPr wrap="square" lIns="0" tIns="114300" rIns="114300" bIns="0" rtlCol="0" anchor="ctr"/>
           <a:lstStyle/>
           <a:p>
             <a:pPr algn="r" indent="0" marL="0">
@@ -5261,17 +5261,17 @@
         </p:nvSpPr>
         <p:spPr>
           <a:xfrm>
-            <a:off x="2643886" y="1427582"/>
-            <a:ext cx="454042" cy="228600"/>
-          </a:xfrm>
-          <a:prstGeom prst="rect">
-            <a:avLst/>
-          </a:prstGeom>
-          <a:noFill/>
-          <a:ln/>
-        </p:spPr>
-        <p:txBody>
-          <a:bodyPr wrap="square" lIns="47625" tIns="114300" rIns="114300" bIns="47625" rtlCol="0" anchor="ctr"/>
+            <a:off x="2643886" y="1489472"/>
+            <a:ext cx="454042" cy="133350"/>
+          </a:xfrm>
+          <a:prstGeom prst="rect">
+            <a:avLst/>
+          </a:prstGeom>
+          <a:noFill/>
+          <a:ln/>
+        </p:spPr>
+        <p:txBody>
+          <a:bodyPr wrap="square" lIns="0" tIns="114300" rIns="114300" bIns="0" rtlCol="0" anchor="ctr"/>
           <a:lstStyle/>
           <a:p>
             <a:pPr algn="r" indent="0" marL="0">
@@ -5300,17 +5300,17 @@
         </p:nvSpPr>
         <p:spPr>
           <a:xfrm>
-            <a:off x="3075252" y="1427582"/>
-            <a:ext cx="778556" cy="228600"/>
-          </a:xfrm>
-          <a:prstGeom prst="rect">
-            <a:avLst/>
-          </a:prstGeom>
-          <a:noFill/>
-          <a:ln/>
-        </p:spPr>
-        <p:txBody>
-          <a:bodyPr wrap="square" lIns="47625" tIns="114300" rIns="114300" bIns="47625" rtlCol="0" anchor="ctr"/>
+            <a:off x="3075252" y="1489472"/>
+            <a:ext cx="778556" cy="133350"/>
+          </a:xfrm>
+          <a:prstGeom prst="rect">
+            <a:avLst/>
+          </a:prstGeom>
+          <a:noFill/>
+          <a:ln/>
+        </p:spPr>
+        <p:txBody>
+          <a:bodyPr wrap="square" lIns="0" tIns="114300" rIns="114300" bIns="0" rtlCol="0" anchor="ctr"/>
           <a:lstStyle/>
           <a:p>
             <a:pPr algn="r" indent="0" marL="0">
@@ -5339,17 +5339,17 @@
         </p:nvSpPr>
         <p:spPr>
           <a:xfrm>
-            <a:off x="5504440" y="1427582"/>
-            <a:ext cx="454042" cy="228600"/>
-          </a:xfrm>
-          <a:prstGeom prst="rect">
-            <a:avLst/>
-          </a:prstGeom>
-          <a:noFill/>
-          <a:ln/>
-        </p:spPr>
-        <p:txBody>
-          <a:bodyPr wrap="square" lIns="47625" tIns="114300" rIns="114300" bIns="47625" rtlCol="0" anchor="ctr"/>
+            <a:off x="5504440" y="1489472"/>
+            <a:ext cx="454042" cy="133350"/>
+          </a:xfrm>
+          <a:prstGeom prst="rect">
+            <a:avLst/>
+          </a:prstGeom>
+          <a:noFill/>
+          <a:ln/>
+        </p:spPr>
+        <p:txBody>
+          <a:bodyPr wrap="square" lIns="0" tIns="114300" rIns="114300" bIns="0" rtlCol="0" anchor="ctr"/>
           <a:lstStyle/>
           <a:p>
             <a:pPr algn="r" indent="0" marL="0">
@@ -5378,17 +5378,17 @@
         </p:nvSpPr>
         <p:spPr>
           <a:xfrm>
-            <a:off x="5945258" y="1427582"/>
-            <a:ext cx="454042" cy="228600"/>
-          </a:xfrm>
-          <a:prstGeom prst="rect">
-            <a:avLst/>
-          </a:prstGeom>
-          <a:noFill/>
-          <a:ln/>
-        </p:spPr>
-        <p:txBody>
-          <a:bodyPr wrap="square" lIns="47625" tIns="114300" rIns="114300" bIns="47625" rtlCol="0" anchor="ctr"/>
+            <a:off x="5945258" y="1489472"/>
+            <a:ext cx="454042" cy="133350"/>
+          </a:xfrm>
+          <a:prstGeom prst="rect">
+            <a:avLst/>
+          </a:prstGeom>
+          <a:noFill/>
+          <a:ln/>
+        </p:spPr>
+        <p:txBody>
+          <a:bodyPr wrap="square" lIns="0" tIns="114300" rIns="114300" bIns="0" rtlCol="0" anchor="ctr"/>
           <a:lstStyle/>
           <a:p>
             <a:pPr algn="r" indent="0" marL="0">
@@ -5417,17 +5417,17 @@
         </p:nvSpPr>
         <p:spPr>
           <a:xfrm>
-            <a:off x="6376624" y="1427582"/>
-            <a:ext cx="778556" cy="228600"/>
-          </a:xfrm>
-          <a:prstGeom prst="rect">
-            <a:avLst/>
-          </a:prstGeom>
-          <a:noFill/>
-          <a:ln/>
-        </p:spPr>
-        <p:txBody>
-          <a:bodyPr wrap="square" lIns="47625" tIns="114300" rIns="114300" bIns="47625" rtlCol="0" anchor="ctr"/>
+            <a:off x="6376624" y="1489472"/>
+            <a:ext cx="778556" cy="133350"/>
+          </a:xfrm>
+          <a:prstGeom prst="rect">
+            <a:avLst/>
+          </a:prstGeom>
+          <a:noFill/>
+          <a:ln/>
+        </p:spPr>
+        <p:txBody>
+          <a:bodyPr wrap="square" lIns="0" tIns="114300" rIns="114300" bIns="0" rtlCol="0" anchor="ctr"/>
           <a:lstStyle/>
           <a:p>
             <a:pPr algn="r" indent="0" marL="0">
@@ -5456,17 +5456,17 @@
         </p:nvSpPr>
         <p:spPr>
           <a:xfrm>
-            <a:off x="6376624" y="2394370"/>
-            <a:ext cx="778556" cy="247650"/>
-          </a:xfrm>
-          <a:prstGeom prst="rect">
-            <a:avLst/>
-          </a:prstGeom>
-          <a:noFill/>
-          <a:ln/>
-        </p:spPr>
-        <p:txBody>
-          <a:bodyPr wrap="square" lIns="38100" tIns="114300" rIns="114300" bIns="38100" rtlCol="0" anchor="ctr"/>
+            <a:off x="6376624" y="2470547"/>
+            <a:ext cx="778556" cy="123825"/>
+          </a:xfrm>
+          <a:prstGeom prst="rect">
+            <a:avLst/>
+          </a:prstGeom>
+          <a:noFill/>
+          <a:ln/>
+        </p:spPr>
+        <p:txBody>
+          <a:bodyPr wrap="square" lIns="0" tIns="114300" rIns="114300" bIns="0" rtlCol="0" anchor="ctr"/>
           <a:lstStyle/>
           <a:p>
             <a:pPr algn="r" indent="0" marL="0">
@@ -5495,17 +5495,17 @@
         </p:nvSpPr>
         <p:spPr>
           <a:xfrm>
-            <a:off x="10643313" y="1685948"/>
-            <a:ext cx="843550" cy="247650"/>
-          </a:xfrm>
-          <a:prstGeom prst="rect">
-            <a:avLst/>
-          </a:prstGeom>
-          <a:noFill/>
-          <a:ln/>
-        </p:spPr>
-        <p:txBody>
-          <a:bodyPr wrap="square" lIns="38100" tIns="114300" rIns="114300" bIns="38100" rtlCol="0" anchor="ctr"/>
+            <a:off x="10643313" y="1762125"/>
+            <a:ext cx="843550" cy="123825"/>
+          </a:xfrm>
+          <a:prstGeom prst="rect">
+            <a:avLst/>
+          </a:prstGeom>
+          <a:noFill/>
+          <a:ln/>
+        </p:spPr>
+        <p:txBody>
+          <a:bodyPr wrap="square" lIns="0" tIns="114300" rIns="114300" bIns="0" rtlCol="0" anchor="ctr"/>
           <a:lstStyle/>
           <a:p>
             <a:pPr algn="r" indent="0" marL="0">
@@ -5534,17 +5534,17 @@
         </p:nvSpPr>
         <p:spPr>
           <a:xfrm>
-            <a:off x="10643313" y="2181248"/>
-            <a:ext cx="843550" cy="247650"/>
-          </a:xfrm>
-          <a:prstGeom prst="rect">
-            <a:avLst/>
-          </a:prstGeom>
-          <a:noFill/>
-          <a:ln/>
-        </p:spPr>
-        <p:txBody>
-          <a:bodyPr wrap="square" lIns="38100" tIns="114300" rIns="114300" bIns="38100" rtlCol="0" anchor="ctr"/>
+            <a:off x="10643313" y="2257425"/>
+            <a:ext cx="843550" cy="123825"/>
+          </a:xfrm>
+          <a:prstGeom prst="rect">
+            <a:avLst/>
+          </a:prstGeom>
+          <a:noFill/>
+          <a:ln/>
+        </p:spPr>
+        <p:txBody>
+          <a:bodyPr wrap="square" lIns="0" tIns="114300" rIns="114300" bIns="0" rtlCol="0" anchor="ctr"/>
           <a:lstStyle/>
           <a:p>
             <a:pPr algn="r" indent="0" marL="0">
@@ -5573,17 +5573,17 @@
         </p:nvSpPr>
         <p:spPr>
           <a:xfrm>
-            <a:off x="10643313" y="2428898"/>
-            <a:ext cx="843550" cy="247650"/>
-          </a:xfrm>
-          <a:prstGeom prst="rect">
-            <a:avLst/>
-          </a:prstGeom>
-          <a:noFill/>
-          <a:ln/>
-        </p:spPr>
-        <p:txBody>
-          <a:bodyPr wrap="square" lIns="38100" tIns="114300" rIns="114300" bIns="38100" rtlCol="0" anchor="ctr"/>
+            <a:off x="10643313" y="2505075"/>
+            <a:ext cx="843550" cy="123825"/>
+          </a:xfrm>
+          <a:prstGeom prst="rect">
+            <a:avLst/>
+          </a:prstGeom>
+          <a:noFill/>
+          <a:ln/>
+        </p:spPr>
+        <p:txBody>
+          <a:bodyPr wrap="square" lIns="0" tIns="114300" rIns="114300" bIns="0" rtlCol="0" anchor="ctr"/>
           <a:lstStyle/>
           <a:p>
             <a:pPr algn="r" indent="0" marL="0">
@@ -5612,17 +5612,17 @@
         </p:nvSpPr>
         <p:spPr>
           <a:xfrm>
-            <a:off x="7555220" y="4610123"/>
-            <a:ext cx="1466977" cy="176212"/>
-          </a:xfrm>
-          <a:prstGeom prst="rect">
-            <a:avLst/>
-          </a:prstGeom>
-          <a:noFill/>
-          <a:ln/>
-        </p:spPr>
-        <p:txBody>
-          <a:bodyPr wrap="square" lIns="38100" tIns="114300" rIns="114300" bIns="38100" rtlCol="0" anchor="ctr"/>
+            <a:off x="7555220" y="4667250"/>
+            <a:ext cx="1466977" cy="95250"/>
+          </a:xfrm>
+          <a:prstGeom prst="rect">
+            <a:avLst/>
+          </a:prstGeom>
+          <a:noFill/>
+          <a:ln/>
+        </p:spPr>
+        <p:txBody>
+          <a:bodyPr wrap="square" lIns="0" tIns="114300" rIns="114300" bIns="0" rtlCol="0" anchor="ctr"/>
           <a:lstStyle/>
           <a:p>
             <a:pPr algn="l" indent="0" marL="0">
@@ -5651,17 +5651,17 @@
         </p:nvSpPr>
         <p:spPr>
           <a:xfrm>
-            <a:off x="3075252" y="1899070"/>
-            <a:ext cx="778556" cy="247650"/>
-          </a:xfrm>
-          <a:prstGeom prst="rect">
-            <a:avLst/>
-          </a:prstGeom>
-          <a:noFill/>
-          <a:ln/>
-        </p:spPr>
-        <p:txBody>
-          <a:bodyPr wrap="square" lIns="38100" tIns="114300" rIns="114300" bIns="38100" rtlCol="0" anchor="ctr"/>
+            <a:off x="3075252" y="1975247"/>
+            <a:ext cx="778556" cy="123825"/>
+          </a:xfrm>
+          <a:prstGeom prst="rect">
+            <a:avLst/>
+          </a:prstGeom>
+          <a:noFill/>
+          <a:ln/>
+        </p:spPr>
+        <p:txBody>
+          <a:bodyPr wrap="square" lIns="0" tIns="114300" rIns="114300" bIns="0" rtlCol="0" anchor="ctr"/>
           <a:lstStyle/>
           <a:p>
             <a:pPr algn="r" indent="0" marL="0">
@@ -5690,17 +5690,17 @@
         </p:nvSpPr>
         <p:spPr>
           <a:xfrm>
-            <a:off x="3075252" y="2146720"/>
-            <a:ext cx="778556" cy="247650"/>
-          </a:xfrm>
-          <a:prstGeom prst="rect">
-            <a:avLst/>
-          </a:prstGeom>
-          <a:noFill/>
-          <a:ln/>
-        </p:spPr>
-        <p:txBody>
-          <a:bodyPr wrap="square" lIns="38100" tIns="114300" rIns="114300" bIns="38100" rtlCol="0" anchor="ctr"/>
+            <a:off x="3075252" y="2222897"/>
+            <a:ext cx="778556" cy="123825"/>
+          </a:xfrm>
+          <a:prstGeom prst="rect">
+            <a:avLst/>
+          </a:prstGeom>
+          <a:noFill/>
+          <a:ln/>
+        </p:spPr>
+        <p:txBody>
+          <a:bodyPr wrap="square" lIns="0" tIns="114300" rIns="114300" bIns="0" rtlCol="0" anchor="ctr"/>
           <a:lstStyle/>
           <a:p>
             <a:pPr algn="r" indent="0" marL="0">
@@ -5729,17 +5729,17 @@
         </p:nvSpPr>
         <p:spPr>
           <a:xfrm>
-            <a:off x="3075252" y="2394370"/>
-            <a:ext cx="778556" cy="247650"/>
-          </a:xfrm>
-          <a:prstGeom prst="rect">
-            <a:avLst/>
-          </a:prstGeom>
-          <a:noFill/>
-          <a:ln/>
-        </p:spPr>
-        <p:txBody>
-          <a:bodyPr wrap="square" lIns="38100" tIns="114300" rIns="114300" bIns="38100" rtlCol="0" anchor="ctr"/>
+            <a:off x="3075252" y="2470547"/>
+            <a:ext cx="778556" cy="123825"/>
+          </a:xfrm>
+          <a:prstGeom prst="rect">
+            <a:avLst/>
+          </a:prstGeom>
+          <a:noFill/>
+          <a:ln/>
+        </p:spPr>
+        <p:txBody>
+          <a:bodyPr wrap="square" lIns="0" tIns="114300" rIns="114300" bIns="0" rtlCol="0" anchor="ctr"/>
           <a:lstStyle/>
           <a:p>
             <a:pPr algn="r" indent="0" marL="0">
@@ -5768,17 +5768,17 @@
         </p:nvSpPr>
         <p:spPr>
           <a:xfrm>
-            <a:off x="3075252" y="2642020"/>
-            <a:ext cx="778556" cy="247650"/>
-          </a:xfrm>
-          <a:prstGeom prst="rect">
-            <a:avLst/>
-          </a:prstGeom>
-          <a:noFill/>
-          <a:ln/>
-        </p:spPr>
-        <p:txBody>
-          <a:bodyPr wrap="square" lIns="38100" tIns="114300" rIns="114300" bIns="38100" rtlCol="0" anchor="ctr"/>
+            <a:off x="3075252" y="2718197"/>
+            <a:ext cx="778556" cy="123825"/>
+          </a:xfrm>
+          <a:prstGeom prst="rect">
+            <a:avLst/>
+          </a:prstGeom>
+          <a:noFill/>
+          <a:ln/>
+        </p:spPr>
+        <p:txBody>
+          <a:bodyPr wrap="square" lIns="0" tIns="114300" rIns="114300" bIns="0" rtlCol="0" anchor="ctr"/>
           <a:lstStyle/>
           <a:p>
             <a:pPr algn="r" indent="0" marL="0">
@@ -5807,17 +5807,17 @@
         </p:nvSpPr>
         <p:spPr>
           <a:xfrm>
-            <a:off x="3075252" y="3137320"/>
-            <a:ext cx="778556" cy="247650"/>
-          </a:xfrm>
-          <a:prstGeom prst="rect">
-            <a:avLst/>
-          </a:prstGeom>
-          <a:noFill/>
-          <a:ln/>
-        </p:spPr>
-        <p:txBody>
-          <a:bodyPr wrap="square" lIns="38100" tIns="114300" rIns="114300" bIns="38100" rtlCol="0" anchor="ctr"/>
+            <a:off x="3075252" y="3213497"/>
+            <a:ext cx="778556" cy="123825"/>
+          </a:xfrm>
+          <a:prstGeom prst="rect">
+            <a:avLst/>
+          </a:prstGeom>
+          <a:noFill/>
+          <a:ln/>
+        </p:spPr>
+        <p:txBody>
+          <a:bodyPr wrap="square" lIns="0" tIns="114300" rIns="114300" bIns="0" rtlCol="0" anchor="ctr"/>
           <a:lstStyle/>
           <a:p>
             <a:pPr algn="r" indent="0" marL="0">
@@ -5846,17 +5846,17 @@
         </p:nvSpPr>
         <p:spPr>
           <a:xfrm>
-            <a:off x="3075252" y="3384970"/>
-            <a:ext cx="778556" cy="247650"/>
-          </a:xfrm>
-          <a:prstGeom prst="rect">
-            <a:avLst/>
-          </a:prstGeom>
-          <a:noFill/>
-          <a:ln/>
-        </p:spPr>
-        <p:txBody>
-          <a:bodyPr wrap="square" lIns="38100" tIns="114300" rIns="114300" bIns="38100" rtlCol="0" anchor="ctr"/>
+            <a:off x="3075252" y="3461147"/>
+            <a:ext cx="778556" cy="123825"/>
+          </a:xfrm>
+          <a:prstGeom prst="rect">
+            <a:avLst/>
+          </a:prstGeom>
+          <a:noFill/>
+          <a:ln/>
+        </p:spPr>
+        <p:txBody>
+          <a:bodyPr wrap="square" lIns="0" tIns="114300" rIns="114300" bIns="0" rtlCol="0" anchor="ctr"/>
           <a:lstStyle/>
           <a:p>
             <a:pPr algn="r" indent="0" marL="0">
@@ -5885,17 +5885,17 @@
         </p:nvSpPr>
         <p:spPr>
           <a:xfrm>
-            <a:off x="3075252" y="3880270"/>
-            <a:ext cx="778556" cy="247650"/>
-          </a:xfrm>
-          <a:prstGeom prst="rect">
-            <a:avLst/>
-          </a:prstGeom>
-          <a:noFill/>
-          <a:ln/>
-        </p:spPr>
-        <p:txBody>
-          <a:bodyPr wrap="square" lIns="38100" tIns="114300" rIns="114300" bIns="38100" rtlCol="0" anchor="ctr"/>
+            <a:off x="3075252" y="3956447"/>
+            <a:ext cx="778556" cy="123825"/>
+          </a:xfrm>
+          <a:prstGeom prst="rect">
+            <a:avLst/>
+          </a:prstGeom>
+          <a:noFill/>
+          <a:ln/>
+        </p:spPr>
+        <p:txBody>
+          <a:bodyPr wrap="square" lIns="0" tIns="114300" rIns="114300" bIns="0" rtlCol="0" anchor="ctr"/>
           <a:lstStyle/>
           <a:p>
             <a:pPr algn="r" indent="0" marL="0">
@@ -5924,17 +5924,17 @@
         </p:nvSpPr>
         <p:spPr>
           <a:xfrm>
-            <a:off x="3075252" y="4127920"/>
-            <a:ext cx="778556" cy="242888"/>
-          </a:xfrm>
-          <a:prstGeom prst="rect">
-            <a:avLst/>
-          </a:prstGeom>
-          <a:noFill/>
-          <a:ln/>
-        </p:spPr>
-        <p:txBody>
-          <a:bodyPr wrap="square" lIns="38100" tIns="114300" rIns="114300" bIns="38100" rtlCol="0" anchor="ctr"/>
+            <a:off x="3075252" y="4204097"/>
+            <a:ext cx="778556" cy="123825"/>
+          </a:xfrm>
+          <a:prstGeom prst="rect">
+            <a:avLst/>
+          </a:prstGeom>
+          <a:noFill/>
+          <a:ln/>
+        </p:spPr>
+        <p:txBody>
+          <a:bodyPr wrap="square" lIns="0" tIns="114300" rIns="114300" bIns="0" rtlCol="0" anchor="ctr"/>
           <a:lstStyle/>
           <a:p>
             <a:pPr algn="r" indent="0" marL="0">
@@ -5963,17 +5963,17 @@
         </p:nvSpPr>
         <p:spPr>
           <a:xfrm>
-            <a:off x="6376624" y="1899070"/>
-            <a:ext cx="778556" cy="247650"/>
-          </a:xfrm>
-          <a:prstGeom prst="rect">
-            <a:avLst/>
-          </a:prstGeom>
-          <a:noFill/>
-          <a:ln/>
-        </p:spPr>
-        <p:txBody>
-          <a:bodyPr wrap="square" lIns="38100" tIns="114300" rIns="114300" bIns="38100" rtlCol="0" anchor="ctr"/>
+            <a:off x="6376624" y="1975247"/>
+            <a:ext cx="778556" cy="123825"/>
+          </a:xfrm>
+          <a:prstGeom prst="rect">
+            <a:avLst/>
+          </a:prstGeom>
+          <a:noFill/>
+          <a:ln/>
+        </p:spPr>
+        <p:txBody>
+          <a:bodyPr wrap="square" lIns="0" tIns="114300" rIns="114300" bIns="0" rtlCol="0" anchor="ctr"/>
           <a:lstStyle/>
           <a:p>
             <a:pPr algn="r" indent="0" marL="0">
@@ -6002,17 +6002,17 @@
         </p:nvSpPr>
         <p:spPr>
           <a:xfrm>
-            <a:off x="6376624" y="2146720"/>
-            <a:ext cx="778556" cy="247650"/>
-          </a:xfrm>
-          <a:prstGeom prst="rect">
-            <a:avLst/>
-          </a:prstGeom>
-          <a:noFill/>
-          <a:ln/>
-        </p:spPr>
-        <p:txBody>
-          <a:bodyPr wrap="square" lIns="38100" tIns="114300" rIns="114300" bIns="38100" rtlCol="0" anchor="ctr"/>
+            <a:off x="6376624" y="2222897"/>
+            <a:ext cx="778556" cy="123825"/>
+          </a:xfrm>
+          <a:prstGeom prst="rect">
+            <a:avLst/>
+          </a:prstGeom>
+          <a:noFill/>
+          <a:ln/>
+        </p:spPr>
+        <p:txBody>
+          <a:bodyPr wrap="square" lIns="0" tIns="114300" rIns="114300" bIns="0" rtlCol="0" anchor="ctr"/>
           <a:lstStyle/>
           <a:p>
             <a:pPr algn="r" indent="0" marL="0">
@@ -6041,17 +6041,17 @@
         </p:nvSpPr>
         <p:spPr>
           <a:xfrm>
-            <a:off x="6376624" y="3880270"/>
-            <a:ext cx="778556" cy="247650"/>
-          </a:xfrm>
-          <a:prstGeom prst="rect">
-            <a:avLst/>
-          </a:prstGeom>
-          <a:noFill/>
-          <a:ln/>
-        </p:spPr>
-        <p:txBody>
-          <a:bodyPr wrap="square" lIns="38100" tIns="114300" rIns="114300" bIns="38100" rtlCol="0" anchor="ctr"/>
+            <a:off x="6376624" y="3956447"/>
+            <a:ext cx="778556" cy="123825"/>
+          </a:xfrm>
+          <a:prstGeom prst="rect">
+            <a:avLst/>
+          </a:prstGeom>
+          <a:noFill/>
+          <a:ln/>
+        </p:spPr>
+        <p:txBody>
+          <a:bodyPr wrap="square" lIns="0" tIns="114300" rIns="114300" bIns="0" rtlCol="0" anchor="ctr"/>
           <a:lstStyle/>
           <a:p>
             <a:pPr algn="r" indent="0" marL="0">
@@ -6080,17 +6080,17 @@
         </p:nvSpPr>
         <p:spPr>
           <a:xfrm>
-            <a:off x="6376624" y="4127920"/>
-            <a:ext cx="778556" cy="242888"/>
-          </a:xfrm>
-          <a:prstGeom prst="rect">
-            <a:avLst/>
-          </a:prstGeom>
-          <a:noFill/>
-          <a:ln/>
-        </p:spPr>
-        <p:txBody>
-          <a:bodyPr wrap="square" lIns="38100" tIns="114300" rIns="114300" bIns="38100" rtlCol="0" anchor="ctr"/>
+            <a:off x="6376624" y="4204097"/>
+            <a:ext cx="778556" cy="123825"/>
+          </a:xfrm>
+          <a:prstGeom prst="rect">
+            <a:avLst/>
+          </a:prstGeom>
+          <a:noFill/>
+          <a:ln/>
+        </p:spPr>
+        <p:txBody>
+          <a:bodyPr wrap="square" lIns="0" tIns="114300" rIns="114300" bIns="0" rtlCol="0" anchor="ctr"/>
           <a:lstStyle/>
           <a:p>
             <a:pPr algn="r" indent="0" marL="0">
@@ -6119,17 +6119,17 @@
         </p:nvSpPr>
         <p:spPr>
           <a:xfrm>
-            <a:off x="7555220" y="1214460"/>
-            <a:ext cx="774570" cy="228600"/>
-          </a:xfrm>
-          <a:prstGeom prst="rect">
-            <a:avLst/>
-          </a:prstGeom>
-          <a:noFill/>
-          <a:ln/>
-        </p:spPr>
-        <p:txBody>
-          <a:bodyPr wrap="square" lIns="47625" tIns="114300" rIns="114300" bIns="47625" rtlCol="0" anchor="ctr"/>
+            <a:off x="7555220" y="1276350"/>
+            <a:ext cx="774570" cy="133350"/>
+          </a:xfrm>
+          <a:prstGeom prst="rect">
+            <a:avLst/>
+          </a:prstGeom>
+          <a:noFill/>
+          <a:ln/>
+        </p:spPr>
+        <p:txBody>
+          <a:bodyPr wrap="square" lIns="0" tIns="114300" rIns="114300" bIns="0" rtlCol="0" anchor="ctr"/>
           <a:lstStyle/>
           <a:p>
             <a:pPr algn="l" indent="0" marL="0">
@@ -6158,17 +6158,17 @@
         </p:nvSpPr>
         <p:spPr>
           <a:xfrm>
-            <a:off x="7555220" y="1443060"/>
-            <a:ext cx="774570" cy="242888"/>
-          </a:xfrm>
-          <a:prstGeom prst="rect">
-            <a:avLst/>
-          </a:prstGeom>
-          <a:noFill/>
-          <a:ln/>
-        </p:spPr>
-        <p:txBody>
-          <a:bodyPr wrap="square" lIns="38100" tIns="114300" rIns="114300" bIns="38100" rtlCol="0" anchor="ctr"/>
+            <a:off x="7555220" y="1524000"/>
+            <a:ext cx="774570" cy="104775"/>
+          </a:xfrm>
+          <a:prstGeom prst="rect">
+            <a:avLst/>
+          </a:prstGeom>
+          <a:noFill/>
+          <a:ln/>
+        </p:spPr>
+        <p:txBody>
+          <a:bodyPr wrap="square" lIns="0" tIns="114300" rIns="114300" bIns="0" rtlCol="0" anchor="ctr"/>
           <a:lstStyle/>
           <a:p>
             <a:pPr algn="l" indent="0" marL="0">
@@ -6197,17 +6197,17 @@
         </p:nvSpPr>
         <p:spPr>
           <a:xfrm>
-            <a:off x="7555220" y="1685948"/>
-            <a:ext cx="774570" cy="247650"/>
-          </a:xfrm>
-          <a:prstGeom prst="rect">
-            <a:avLst/>
-          </a:prstGeom>
-          <a:noFill/>
-          <a:ln/>
-        </p:spPr>
-        <p:txBody>
-          <a:bodyPr wrap="square" lIns="38100" tIns="114300" rIns="114300" bIns="38100" rtlCol="0" anchor="ctr"/>
+            <a:off x="7555220" y="1771650"/>
+            <a:ext cx="774570" cy="104775"/>
+          </a:xfrm>
+          <a:prstGeom prst="rect">
+            <a:avLst/>
+          </a:prstGeom>
+          <a:noFill/>
+          <a:ln/>
+        </p:spPr>
+        <p:txBody>
+          <a:bodyPr wrap="square" lIns="0" tIns="114300" rIns="114300" bIns="0" rtlCol="0" anchor="ctr"/>
           <a:lstStyle/>
           <a:p>
             <a:pPr algn="l" indent="0" marL="0">
@@ -6236,17 +6236,17 @@
         </p:nvSpPr>
         <p:spPr>
           <a:xfrm>
-            <a:off x="7555220" y="1933598"/>
-            <a:ext cx="774570" cy="247650"/>
-          </a:xfrm>
-          <a:prstGeom prst="rect">
-            <a:avLst/>
-          </a:prstGeom>
-          <a:noFill/>
-          <a:ln/>
-        </p:spPr>
-        <p:txBody>
-          <a:bodyPr wrap="square" lIns="38100" tIns="114300" rIns="114300" bIns="38100" rtlCol="0" anchor="ctr"/>
+            <a:off x="7555220" y="2019300"/>
+            <a:ext cx="774570" cy="104775"/>
+          </a:xfrm>
+          <a:prstGeom prst="rect">
+            <a:avLst/>
+          </a:prstGeom>
+          <a:noFill/>
+          <a:ln/>
+        </p:spPr>
+        <p:txBody>
+          <a:bodyPr wrap="square" lIns="0" tIns="114300" rIns="114300" bIns="0" rtlCol="0" anchor="ctr"/>
           <a:lstStyle/>
           <a:p>
             <a:pPr algn="l" indent="0" marL="0">
@@ -6275,17 +6275,17 @@
         </p:nvSpPr>
         <p:spPr>
           <a:xfrm>
-            <a:off x="7555220" y="2181248"/>
-            <a:ext cx="774570" cy="247650"/>
-          </a:xfrm>
-          <a:prstGeom prst="rect">
-            <a:avLst/>
-          </a:prstGeom>
-          <a:noFill/>
-          <a:ln/>
-        </p:spPr>
-        <p:txBody>
-          <a:bodyPr wrap="square" lIns="38100" tIns="114300" rIns="114300" bIns="38100" rtlCol="0" anchor="ctr"/>
+            <a:off x="7555220" y="2266950"/>
+            <a:ext cx="774570" cy="104775"/>
+          </a:xfrm>
+          <a:prstGeom prst="rect">
+            <a:avLst/>
+          </a:prstGeom>
+          <a:noFill/>
+          <a:ln/>
+        </p:spPr>
+        <p:txBody>
+          <a:bodyPr wrap="square" lIns="0" tIns="114300" rIns="114300" bIns="0" rtlCol="0" anchor="ctr"/>
           <a:lstStyle/>
           <a:p>
             <a:pPr algn="l" indent="0" marL="0">
@@ -6314,17 +6314,17 @@
         </p:nvSpPr>
         <p:spPr>
           <a:xfrm>
-            <a:off x="7555220" y="2428898"/>
-            <a:ext cx="774570" cy="247650"/>
-          </a:xfrm>
-          <a:prstGeom prst="rect">
-            <a:avLst/>
-          </a:prstGeom>
-          <a:noFill/>
-          <a:ln/>
-        </p:spPr>
-        <p:txBody>
-          <a:bodyPr wrap="square" lIns="38100" tIns="114300" rIns="114300" bIns="38100" rtlCol="0" anchor="ctr"/>
+            <a:off x="7555220" y="2514600"/>
+            <a:ext cx="774570" cy="104775"/>
+          </a:xfrm>
+          <a:prstGeom prst="rect">
+            <a:avLst/>
+          </a:prstGeom>
+          <a:noFill/>
+          <a:ln/>
+        </p:spPr>
+        <p:txBody>
+          <a:bodyPr wrap="square" lIns="0" tIns="114300" rIns="114300" bIns="0" rtlCol="0" anchor="ctr"/>
           <a:lstStyle/>
           <a:p>
             <a:pPr algn="l" indent="0" marL="0">
@@ -6353,17 +6353,17 @@
         </p:nvSpPr>
         <p:spPr>
           <a:xfrm>
-            <a:off x="7555220" y="2676548"/>
-            <a:ext cx="774570" cy="247650"/>
-          </a:xfrm>
-          <a:prstGeom prst="rect">
-            <a:avLst/>
-          </a:prstGeom>
-          <a:noFill/>
-          <a:ln/>
-        </p:spPr>
-        <p:txBody>
-          <a:bodyPr wrap="square" lIns="38100" tIns="114300" rIns="114300" bIns="38100" rtlCol="0" anchor="ctr"/>
+            <a:off x="7555220" y="2762250"/>
+            <a:ext cx="774570" cy="104775"/>
+          </a:xfrm>
+          <a:prstGeom prst="rect">
+            <a:avLst/>
+          </a:prstGeom>
+          <a:noFill/>
+          <a:ln/>
+        </p:spPr>
+        <p:txBody>
+          <a:bodyPr wrap="square" lIns="0" tIns="114300" rIns="114300" bIns="0" rtlCol="0" anchor="ctr"/>
           <a:lstStyle/>
           <a:p>
             <a:pPr algn="l" indent="0" marL="0">
@@ -6392,17 +6392,17 @@
         </p:nvSpPr>
         <p:spPr>
           <a:xfrm>
-            <a:off x="8965222" y="3710010"/>
-            <a:ext cx="489146" cy="176212"/>
-          </a:xfrm>
-          <a:prstGeom prst="rect">
-            <a:avLst/>
-          </a:prstGeom>
-          <a:noFill/>
-          <a:ln/>
-        </p:spPr>
-        <p:txBody>
-          <a:bodyPr wrap="square" lIns="38100" tIns="114300" rIns="114300" bIns="38100" rtlCol="0" anchor="ctr"/>
+            <a:off x="8965222" y="3762375"/>
+            <a:ext cx="489146" cy="95250"/>
+          </a:xfrm>
+          <a:prstGeom prst="rect">
+            <a:avLst/>
+          </a:prstGeom>
+          <a:noFill/>
+          <a:ln/>
+        </p:spPr>
+        <p:txBody>
+          <a:bodyPr wrap="square" lIns="0" tIns="114300" rIns="114300" bIns="0" rtlCol="0" anchor="ctr"/>
           <a:lstStyle/>
           <a:p>
             <a:pPr algn="r" indent="0" marL="0">
@@ -6431,17 +6431,17 @@
         </p:nvSpPr>
         <p:spPr>
           <a:xfrm>
-            <a:off x="8965222" y="3886223"/>
-            <a:ext cx="489146" cy="180975"/>
-          </a:xfrm>
-          <a:prstGeom prst="rect">
-            <a:avLst/>
-          </a:prstGeom>
-          <a:noFill/>
-          <a:ln/>
-        </p:spPr>
-        <p:txBody>
-          <a:bodyPr wrap="square" lIns="38100" tIns="114300" rIns="114300" bIns="38100" rtlCol="0" anchor="ctr"/>
+            <a:off x="8965222" y="3943350"/>
+            <a:ext cx="489146" cy="95250"/>
+          </a:xfrm>
+          <a:prstGeom prst="rect">
+            <a:avLst/>
+          </a:prstGeom>
+          <a:noFill/>
+          <a:ln/>
+        </p:spPr>
+        <p:txBody>
+          <a:bodyPr wrap="square" lIns="0" tIns="114300" rIns="114300" bIns="0" rtlCol="0" anchor="ctr"/>
           <a:lstStyle/>
           <a:p>
             <a:pPr algn="r" indent="0" marL="0">
@@ -6470,17 +6470,17 @@
         </p:nvSpPr>
         <p:spPr>
           <a:xfrm>
-            <a:off x="2203068" y="1656182"/>
-            <a:ext cx="454042" cy="242888"/>
-          </a:xfrm>
-          <a:prstGeom prst="rect">
-            <a:avLst/>
-          </a:prstGeom>
-          <a:noFill/>
-          <a:ln/>
-        </p:spPr>
-        <p:txBody>
-          <a:bodyPr wrap="square" lIns="38100" tIns="114300" rIns="114300" bIns="38100" rtlCol="0" anchor="ctr"/>
+            <a:off x="2203068" y="1737122"/>
+            <a:ext cx="454042" cy="104775"/>
+          </a:xfrm>
+          <a:prstGeom prst="rect">
+            <a:avLst/>
+          </a:prstGeom>
+          <a:noFill/>
+          <a:ln/>
+        </p:spPr>
+        <p:txBody>
+          <a:bodyPr wrap="square" lIns="0" tIns="114300" rIns="114300" bIns="0" rtlCol="0" anchor="ctr"/>
           <a:lstStyle/>
           <a:p>
             <a:pPr algn="r" indent="0" marL="0">
@@ -6509,17 +6509,17 @@
         </p:nvSpPr>
         <p:spPr>
           <a:xfrm>
-            <a:off x="2643886" y="1656182"/>
-            <a:ext cx="454042" cy="242888"/>
-          </a:xfrm>
-          <a:prstGeom prst="rect">
-            <a:avLst/>
-          </a:prstGeom>
-          <a:noFill/>
-          <a:ln/>
-        </p:spPr>
-        <p:txBody>
-          <a:bodyPr wrap="square" lIns="38100" tIns="114300" rIns="114300" bIns="38100" rtlCol="0" anchor="ctr"/>
+            <a:off x="2643886" y="1737122"/>
+            <a:ext cx="454042" cy="104775"/>
+          </a:xfrm>
+          <a:prstGeom prst="rect">
+            <a:avLst/>
+          </a:prstGeom>
+          <a:noFill/>
+          <a:ln/>
+        </p:spPr>
+        <p:txBody>
+          <a:bodyPr wrap="square" lIns="0" tIns="114300" rIns="114300" bIns="0" rtlCol="0" anchor="ctr"/>
           <a:lstStyle/>
           <a:p>
             <a:pPr algn="r" indent="0" marL="0">
@@ -6548,17 +6548,17 @@
         </p:nvSpPr>
         <p:spPr>
           <a:xfrm>
-            <a:off x="3075252" y="1656182"/>
-            <a:ext cx="778556" cy="242888"/>
-          </a:xfrm>
-          <a:prstGeom prst="rect">
-            <a:avLst/>
-          </a:prstGeom>
-          <a:noFill/>
-          <a:ln/>
-        </p:spPr>
-        <p:txBody>
-          <a:bodyPr wrap="square" lIns="38100" tIns="114300" rIns="114300" bIns="38100" rtlCol="0" anchor="ctr"/>
+            <a:off x="3075252" y="1727597"/>
+            <a:ext cx="778556" cy="123825"/>
+          </a:xfrm>
+          <a:prstGeom prst="rect">
+            <a:avLst/>
+          </a:prstGeom>
+          <a:noFill/>
+          <a:ln/>
+        </p:spPr>
+        <p:txBody>
+          <a:bodyPr wrap="square" lIns="0" tIns="114300" rIns="114300" bIns="0" rtlCol="0" anchor="ctr"/>
           <a:lstStyle/>
           <a:p>
             <a:pPr algn="r" indent="0" marL="0">
@@ -6587,17 +6587,17 @@
         </p:nvSpPr>
         <p:spPr>
           <a:xfrm>
-            <a:off x="2203068" y="1899070"/>
-            <a:ext cx="454042" cy="247650"/>
-          </a:xfrm>
-          <a:prstGeom prst="rect">
-            <a:avLst/>
-          </a:prstGeom>
-          <a:noFill/>
-          <a:ln/>
-        </p:spPr>
-        <p:txBody>
-          <a:bodyPr wrap="square" lIns="38100" tIns="114300" rIns="114300" bIns="38100" rtlCol="0" anchor="ctr"/>
+            <a:off x="2203068" y="1984772"/>
+            <a:ext cx="454042" cy="104775"/>
+          </a:xfrm>
+          <a:prstGeom prst="rect">
+            <a:avLst/>
+          </a:prstGeom>
+          <a:noFill/>
+          <a:ln/>
+        </p:spPr>
+        <p:txBody>
+          <a:bodyPr wrap="square" lIns="0" tIns="114300" rIns="114300" bIns="0" rtlCol="0" anchor="ctr"/>
           <a:lstStyle/>
           <a:p>
             <a:pPr algn="r" indent="0" marL="0">
@@ -6626,17 +6626,17 @@
         </p:nvSpPr>
         <p:spPr>
           <a:xfrm>
-            <a:off x="2643886" y="1899070"/>
-            <a:ext cx="454042" cy="247650"/>
-          </a:xfrm>
-          <a:prstGeom prst="rect">
-            <a:avLst/>
-          </a:prstGeom>
-          <a:noFill/>
-          <a:ln/>
-        </p:spPr>
-        <p:txBody>
-          <a:bodyPr wrap="square" lIns="38100" tIns="114300" rIns="114300" bIns="38100" rtlCol="0" anchor="ctr"/>
+            <a:off x="2643886" y="1984772"/>
+            <a:ext cx="454042" cy="104775"/>
+          </a:xfrm>
+          <a:prstGeom prst="rect">
+            <a:avLst/>
+          </a:prstGeom>
+          <a:noFill/>
+          <a:ln/>
+        </p:spPr>
+        <p:txBody>
+          <a:bodyPr wrap="square" lIns="0" tIns="114300" rIns="114300" bIns="0" rtlCol="0" anchor="ctr"/>
           <a:lstStyle/>
           <a:p>
             <a:pPr algn="r" indent="0" marL="0">
@@ -6665,17 +6665,17 @@
         </p:nvSpPr>
         <p:spPr>
           <a:xfrm>
-            <a:off x="2203068" y="2146720"/>
-            <a:ext cx="454042" cy="247650"/>
-          </a:xfrm>
-          <a:prstGeom prst="rect">
-            <a:avLst/>
-          </a:prstGeom>
-          <a:noFill/>
-          <a:ln/>
-        </p:spPr>
-        <p:txBody>
-          <a:bodyPr wrap="square" lIns="38100" tIns="114300" rIns="114300" bIns="38100" rtlCol="0" anchor="ctr"/>
+            <a:off x="2203068" y="2232422"/>
+            <a:ext cx="454042" cy="104775"/>
+          </a:xfrm>
+          <a:prstGeom prst="rect">
+            <a:avLst/>
+          </a:prstGeom>
+          <a:noFill/>
+          <a:ln/>
+        </p:spPr>
+        <p:txBody>
+          <a:bodyPr wrap="square" lIns="0" tIns="114300" rIns="114300" bIns="0" rtlCol="0" anchor="ctr"/>
           <a:lstStyle/>
           <a:p>
             <a:pPr algn="r" indent="0" marL="0">
@@ -6704,17 +6704,17 @@
         </p:nvSpPr>
         <p:spPr>
           <a:xfrm>
-            <a:off x="2643886" y="2146720"/>
-            <a:ext cx="454042" cy="247650"/>
-          </a:xfrm>
-          <a:prstGeom prst="rect">
-            <a:avLst/>
-          </a:prstGeom>
-          <a:noFill/>
-          <a:ln/>
-        </p:spPr>
-        <p:txBody>
-          <a:bodyPr wrap="square" lIns="38100" tIns="114300" rIns="114300" bIns="38100" rtlCol="0" anchor="ctr"/>
+            <a:off x="2643886" y="2232422"/>
+            <a:ext cx="454042" cy="104775"/>
+          </a:xfrm>
+          <a:prstGeom prst="rect">
+            <a:avLst/>
+          </a:prstGeom>
+          <a:noFill/>
+          <a:ln/>
+        </p:spPr>
+        <p:txBody>
+          <a:bodyPr wrap="square" lIns="0" tIns="114300" rIns="114300" bIns="0" rtlCol="0" anchor="ctr"/>
           <a:lstStyle/>
           <a:p>
             <a:pPr algn="r" indent="0" marL="0">
@@ -6743,17 +6743,17 @@
         </p:nvSpPr>
         <p:spPr>
           <a:xfrm>
-            <a:off x="2203068" y="2394370"/>
-            <a:ext cx="454042" cy="247650"/>
-          </a:xfrm>
-          <a:prstGeom prst="rect">
-            <a:avLst/>
-          </a:prstGeom>
-          <a:noFill/>
-          <a:ln/>
-        </p:spPr>
-        <p:txBody>
-          <a:bodyPr wrap="square" lIns="38100" tIns="114300" rIns="114300" bIns="38100" rtlCol="0" anchor="ctr"/>
+            <a:off x="2203068" y="2480072"/>
+            <a:ext cx="454042" cy="104775"/>
+          </a:xfrm>
+          <a:prstGeom prst="rect">
+            <a:avLst/>
+          </a:prstGeom>
+          <a:noFill/>
+          <a:ln/>
+        </p:spPr>
+        <p:txBody>
+          <a:bodyPr wrap="square" lIns="0" tIns="114300" rIns="114300" bIns="0" rtlCol="0" anchor="ctr"/>
           <a:lstStyle/>
           <a:p>
             <a:pPr algn="r" indent="0" marL="0">
@@ -6782,17 +6782,17 @@
         </p:nvSpPr>
         <p:spPr>
           <a:xfrm>
-            <a:off x="2203068" y="2642020"/>
-            <a:ext cx="454042" cy="247650"/>
-          </a:xfrm>
-          <a:prstGeom prst="rect">
-            <a:avLst/>
-          </a:prstGeom>
-          <a:noFill/>
-          <a:ln/>
-        </p:spPr>
-        <p:txBody>
-          <a:bodyPr wrap="square" lIns="38100" tIns="114300" rIns="114300" bIns="38100" rtlCol="0" anchor="ctr"/>
+            <a:off x="2203068" y="2727722"/>
+            <a:ext cx="454042" cy="104775"/>
+          </a:xfrm>
+          <a:prstGeom prst="rect">
+            <a:avLst/>
+          </a:prstGeom>
+          <a:noFill/>
+          <a:ln/>
+        </p:spPr>
+        <p:txBody>
+          <a:bodyPr wrap="square" lIns="0" tIns="114300" rIns="114300" bIns="0" rtlCol="0" anchor="ctr"/>
           <a:lstStyle/>
           <a:p>
             <a:pPr algn="r" indent="0" marL="0">
@@ -6821,17 +6821,17 @@
         </p:nvSpPr>
         <p:spPr>
           <a:xfrm>
-            <a:off x="2643886" y="2642020"/>
-            <a:ext cx="454042" cy="247650"/>
-          </a:xfrm>
-          <a:prstGeom prst="rect">
-            <a:avLst/>
-          </a:prstGeom>
-          <a:noFill/>
-          <a:ln/>
-        </p:spPr>
-        <p:txBody>
-          <a:bodyPr wrap="square" lIns="38100" tIns="114300" rIns="114300" bIns="38100" rtlCol="0" anchor="ctr"/>
+            <a:off x="2643886" y="2727722"/>
+            <a:ext cx="454042" cy="104775"/>
+          </a:xfrm>
+          <a:prstGeom prst="rect">
+            <a:avLst/>
+          </a:prstGeom>
+          <a:noFill/>
+          <a:ln/>
+        </p:spPr>
+        <p:txBody>
+          <a:bodyPr wrap="square" lIns="0" tIns="114300" rIns="114300" bIns="0" rtlCol="0" anchor="ctr"/>
           <a:lstStyle/>
           <a:p>
             <a:pPr algn="r" indent="0" marL="0">
@@ -6860,17 +6860,17 @@
         </p:nvSpPr>
         <p:spPr>
           <a:xfrm>
-            <a:off x="2203068" y="2889670"/>
-            <a:ext cx="454042" cy="247650"/>
-          </a:xfrm>
-          <a:prstGeom prst="rect">
-            <a:avLst/>
-          </a:prstGeom>
-          <a:noFill/>
-          <a:ln/>
-        </p:spPr>
-        <p:txBody>
-          <a:bodyPr wrap="square" lIns="38100" tIns="114300" rIns="114300" bIns="38100" rtlCol="0" anchor="ctr"/>
+            <a:off x="2203068" y="2975372"/>
+            <a:ext cx="454042" cy="104775"/>
+          </a:xfrm>
+          <a:prstGeom prst="rect">
+            <a:avLst/>
+          </a:prstGeom>
+          <a:noFill/>
+          <a:ln/>
+        </p:spPr>
+        <p:txBody>
+          <a:bodyPr wrap="square" lIns="0" tIns="114300" rIns="114300" bIns="0" rtlCol="0" anchor="ctr"/>
           <a:lstStyle/>
           <a:p>
             <a:pPr algn="r" indent="0" marL="0">
@@ -6899,17 +6899,17 @@
         </p:nvSpPr>
         <p:spPr>
           <a:xfrm>
-            <a:off x="2643886" y="2889670"/>
-            <a:ext cx="454042" cy="247650"/>
-          </a:xfrm>
-          <a:prstGeom prst="rect">
-            <a:avLst/>
-          </a:prstGeom>
-          <a:noFill/>
-          <a:ln/>
-        </p:spPr>
-        <p:txBody>
-          <a:bodyPr wrap="square" lIns="38100" tIns="114300" rIns="114300" bIns="38100" rtlCol="0" anchor="ctr"/>
+            <a:off x="2643886" y="2975372"/>
+            <a:ext cx="454042" cy="104775"/>
+          </a:xfrm>
+          <a:prstGeom prst="rect">
+            <a:avLst/>
+          </a:prstGeom>
+          <a:noFill/>
+          <a:ln/>
+        </p:spPr>
+        <p:txBody>
+          <a:bodyPr wrap="square" lIns="0" tIns="114300" rIns="114300" bIns="0" rtlCol="0" anchor="ctr"/>
           <a:lstStyle/>
           <a:p>
             <a:pPr algn="r" indent="0" marL="0">
@@ -6938,17 +6938,17 @@
         </p:nvSpPr>
         <p:spPr>
           <a:xfrm>
-            <a:off x="3075252" y="2889670"/>
-            <a:ext cx="778556" cy="247650"/>
-          </a:xfrm>
-          <a:prstGeom prst="rect">
-            <a:avLst/>
-          </a:prstGeom>
-          <a:noFill/>
-          <a:ln/>
-        </p:spPr>
-        <p:txBody>
-          <a:bodyPr wrap="square" lIns="38100" tIns="114300" rIns="114300" bIns="38100" rtlCol="0" anchor="ctr"/>
+            <a:off x="3075252" y="2965847"/>
+            <a:ext cx="778556" cy="123825"/>
+          </a:xfrm>
+          <a:prstGeom prst="rect">
+            <a:avLst/>
+          </a:prstGeom>
+          <a:noFill/>
+          <a:ln/>
+        </p:spPr>
+        <p:txBody>
+          <a:bodyPr wrap="square" lIns="0" tIns="114300" rIns="114300" bIns="0" rtlCol="0" anchor="ctr"/>
           <a:lstStyle/>
           <a:p>
             <a:pPr algn="r" indent="0" marL="0">
@@ -6977,17 +6977,17 @@
         </p:nvSpPr>
         <p:spPr>
           <a:xfrm>
-            <a:off x="2643886" y="3137320"/>
-            <a:ext cx="454042" cy="247650"/>
-          </a:xfrm>
-          <a:prstGeom prst="rect">
-            <a:avLst/>
-          </a:prstGeom>
-          <a:noFill/>
-          <a:ln/>
-        </p:spPr>
-        <p:txBody>
-          <a:bodyPr wrap="square" lIns="38100" tIns="114300" rIns="114300" bIns="38100" rtlCol="0" anchor="ctr"/>
+            <a:off x="2643886" y="3223022"/>
+            <a:ext cx="454042" cy="104775"/>
+          </a:xfrm>
+          <a:prstGeom prst="rect">
+            <a:avLst/>
+          </a:prstGeom>
+          <a:noFill/>
+          <a:ln/>
+        </p:spPr>
+        <p:txBody>
+          <a:bodyPr wrap="square" lIns="0" tIns="114300" rIns="114300" bIns="0" rtlCol="0" anchor="ctr"/>
           <a:lstStyle/>
           <a:p>
             <a:pPr algn="r" indent="0" marL="0">
@@ -7016,17 +7016,17 @@
         </p:nvSpPr>
         <p:spPr>
           <a:xfrm>
-            <a:off x="2643886" y="3384970"/>
-            <a:ext cx="454042" cy="247650"/>
-          </a:xfrm>
-          <a:prstGeom prst="rect">
-            <a:avLst/>
-          </a:prstGeom>
-          <a:noFill/>
-          <a:ln/>
-        </p:spPr>
-        <p:txBody>
-          <a:bodyPr wrap="square" lIns="38100" tIns="114300" rIns="114300" bIns="38100" rtlCol="0" anchor="ctr"/>
+            <a:off x="2643886" y="3470672"/>
+            <a:ext cx="454042" cy="104775"/>
+          </a:xfrm>
+          <a:prstGeom prst="rect">
+            <a:avLst/>
+          </a:prstGeom>
+          <a:noFill/>
+          <a:ln/>
+        </p:spPr>
+        <p:txBody>
+          <a:bodyPr wrap="square" lIns="0" tIns="114300" rIns="114300" bIns="0" rtlCol="0" anchor="ctr"/>
           <a:lstStyle/>
           <a:p>
             <a:pPr algn="r" indent="0" marL="0">
@@ -7055,17 +7055,17 @@
         </p:nvSpPr>
         <p:spPr>
           <a:xfrm>
-            <a:off x="3075252" y="3632620"/>
-            <a:ext cx="778556" cy="247650"/>
-          </a:xfrm>
-          <a:prstGeom prst="rect">
-            <a:avLst/>
-          </a:prstGeom>
-          <a:noFill/>
-          <a:ln/>
-        </p:spPr>
-        <p:txBody>
-          <a:bodyPr wrap="square" lIns="38100" tIns="114300" rIns="114300" bIns="38100" rtlCol="0" anchor="ctr"/>
+            <a:off x="3075252" y="3708797"/>
+            <a:ext cx="778556" cy="123825"/>
+          </a:xfrm>
+          <a:prstGeom prst="rect">
+            <a:avLst/>
+          </a:prstGeom>
+          <a:noFill/>
+          <a:ln/>
+        </p:spPr>
+        <p:txBody>
+          <a:bodyPr wrap="square" lIns="0" tIns="114300" rIns="114300" bIns="0" rtlCol="0" anchor="ctr"/>
           <a:lstStyle/>
           <a:p>
             <a:pPr algn="r" indent="0" marL="0">
@@ -7094,17 +7094,17 @@
         </p:nvSpPr>
         <p:spPr>
           <a:xfrm>
-            <a:off x="6376624" y="1656182"/>
-            <a:ext cx="778556" cy="242888"/>
-          </a:xfrm>
-          <a:prstGeom prst="rect">
-            <a:avLst/>
-          </a:prstGeom>
-          <a:noFill/>
-          <a:ln/>
-        </p:spPr>
-        <p:txBody>
-          <a:bodyPr wrap="square" lIns="38100" tIns="114300" rIns="114300" bIns="38100" rtlCol="0" anchor="ctr"/>
+            <a:off x="6376624" y="1727597"/>
+            <a:ext cx="778556" cy="123825"/>
+          </a:xfrm>
+          <a:prstGeom prst="rect">
+            <a:avLst/>
+          </a:prstGeom>
+          <a:noFill/>
+          <a:ln/>
+        </p:spPr>
+        <p:txBody>
+          <a:bodyPr wrap="square" lIns="0" tIns="114300" rIns="114300" bIns="0" rtlCol="0" anchor="ctr"/>
           <a:lstStyle/>
           <a:p>
             <a:pPr algn="r" indent="0" marL="0">
@@ -7133,17 +7133,17 @@
         </p:nvSpPr>
         <p:spPr>
           <a:xfrm>
-            <a:off x="5945258" y="2394370"/>
-            <a:ext cx="454042" cy="247650"/>
-          </a:xfrm>
-          <a:prstGeom prst="rect">
-            <a:avLst/>
-          </a:prstGeom>
-          <a:noFill/>
-          <a:ln/>
-        </p:spPr>
-        <p:txBody>
-          <a:bodyPr wrap="square" lIns="38100" tIns="114300" rIns="114300" bIns="38100" rtlCol="0" anchor="ctr"/>
+            <a:off x="5945258" y="2480072"/>
+            <a:ext cx="454042" cy="104775"/>
+          </a:xfrm>
+          <a:prstGeom prst="rect">
+            <a:avLst/>
+          </a:prstGeom>
+          <a:noFill/>
+          <a:ln/>
+        </p:spPr>
+        <p:txBody>
+          <a:bodyPr wrap="square" lIns="0" tIns="114300" rIns="114300" bIns="0" rtlCol="0" anchor="ctr"/>
           <a:lstStyle/>
           <a:p>
             <a:pPr algn="r" indent="0" marL="0">
@@ -7172,17 +7172,17 @@
         </p:nvSpPr>
         <p:spPr>
           <a:xfrm>
-            <a:off x="5945258" y="2642020"/>
-            <a:ext cx="454042" cy="247650"/>
-          </a:xfrm>
-          <a:prstGeom prst="rect">
-            <a:avLst/>
-          </a:prstGeom>
-          <a:noFill/>
-          <a:ln/>
-        </p:spPr>
-        <p:txBody>
-          <a:bodyPr wrap="square" lIns="38100" tIns="114300" rIns="114300" bIns="38100" rtlCol="0" anchor="ctr"/>
+            <a:off x="5945258" y="2727722"/>
+            <a:ext cx="454042" cy="104775"/>
+          </a:xfrm>
+          <a:prstGeom prst="rect">
+            <a:avLst/>
+          </a:prstGeom>
+          <a:noFill/>
+          <a:ln/>
+        </p:spPr>
+        <p:txBody>
+          <a:bodyPr wrap="square" lIns="0" tIns="114300" rIns="114300" bIns="0" rtlCol="0" anchor="ctr"/>
           <a:lstStyle/>
           <a:p>
             <a:pPr algn="r" indent="0" marL="0">
@@ -7211,17 +7211,17 @@
         </p:nvSpPr>
         <p:spPr>
           <a:xfrm>
-            <a:off x="6376624" y="2642020"/>
-            <a:ext cx="778556" cy="247650"/>
-          </a:xfrm>
-          <a:prstGeom prst="rect">
-            <a:avLst/>
-          </a:prstGeom>
-          <a:noFill/>
-          <a:ln/>
-        </p:spPr>
-        <p:txBody>
-          <a:bodyPr wrap="square" lIns="38100" tIns="114300" rIns="114300" bIns="38100" rtlCol="0" anchor="ctr"/>
+            <a:off x="6376624" y="2718197"/>
+            <a:ext cx="778556" cy="123825"/>
+          </a:xfrm>
+          <a:prstGeom prst="rect">
+            <a:avLst/>
+          </a:prstGeom>
+          <a:noFill/>
+          <a:ln/>
+        </p:spPr>
+        <p:txBody>
+          <a:bodyPr wrap="square" lIns="0" tIns="114300" rIns="114300" bIns="0" rtlCol="0" anchor="ctr"/>
           <a:lstStyle/>
           <a:p>
             <a:pPr algn="r" indent="0" marL="0">
@@ -7250,17 +7250,17 @@
         </p:nvSpPr>
         <p:spPr>
           <a:xfrm>
-            <a:off x="6376624" y="2889670"/>
-            <a:ext cx="778556" cy="247650"/>
-          </a:xfrm>
-          <a:prstGeom prst="rect">
-            <a:avLst/>
-          </a:prstGeom>
-          <a:noFill/>
-          <a:ln/>
-        </p:spPr>
-        <p:txBody>
-          <a:bodyPr wrap="square" lIns="38100" tIns="114300" rIns="114300" bIns="38100" rtlCol="0" anchor="ctr"/>
+            <a:off x="6376624" y="2965847"/>
+            <a:ext cx="778556" cy="123825"/>
+          </a:xfrm>
+          <a:prstGeom prst="rect">
+            <a:avLst/>
+          </a:prstGeom>
+          <a:noFill/>
+          <a:ln/>
+        </p:spPr>
+        <p:txBody>
+          <a:bodyPr wrap="square" lIns="0" tIns="114300" rIns="114300" bIns="0" rtlCol="0" anchor="ctr"/>
           <a:lstStyle/>
           <a:p>
             <a:pPr algn="r" indent="0" marL="0">
@@ -7289,17 +7289,17 @@
         </p:nvSpPr>
         <p:spPr>
           <a:xfrm>
-            <a:off x="5945258" y="3137320"/>
-            <a:ext cx="454042" cy="247650"/>
-          </a:xfrm>
-          <a:prstGeom prst="rect">
-            <a:avLst/>
-          </a:prstGeom>
-          <a:noFill/>
-          <a:ln/>
-        </p:spPr>
-        <p:txBody>
-          <a:bodyPr wrap="square" lIns="38100" tIns="114300" rIns="114300" bIns="38100" rtlCol="0" anchor="ctr"/>
+            <a:off x="5945258" y="3223022"/>
+            <a:ext cx="454042" cy="104775"/>
+          </a:xfrm>
+          <a:prstGeom prst="rect">
+            <a:avLst/>
+          </a:prstGeom>
+          <a:noFill/>
+          <a:ln/>
+        </p:spPr>
+        <p:txBody>
+          <a:bodyPr wrap="square" lIns="0" tIns="114300" rIns="114300" bIns="0" rtlCol="0" anchor="ctr"/>
           <a:lstStyle/>
           <a:p>
             <a:pPr algn="r" indent="0" marL="0">
@@ -7328,17 +7328,17 @@
         </p:nvSpPr>
         <p:spPr>
           <a:xfrm>
-            <a:off x="6376624" y="3137320"/>
-            <a:ext cx="778556" cy="247650"/>
-          </a:xfrm>
-          <a:prstGeom prst="rect">
-            <a:avLst/>
-          </a:prstGeom>
-          <a:noFill/>
-          <a:ln/>
-        </p:spPr>
-        <p:txBody>
-          <a:bodyPr wrap="square" lIns="38100" tIns="114300" rIns="114300" bIns="38100" rtlCol="0" anchor="ctr"/>
+            <a:off x="6376624" y="3213497"/>
+            <a:ext cx="778556" cy="123825"/>
+          </a:xfrm>
+          <a:prstGeom prst="rect">
+            <a:avLst/>
+          </a:prstGeom>
+          <a:noFill/>
+          <a:ln/>
+        </p:spPr>
+        <p:txBody>
+          <a:bodyPr wrap="square" lIns="0" tIns="114300" rIns="114300" bIns="0" rtlCol="0" anchor="ctr"/>
           <a:lstStyle/>
           <a:p>
             <a:pPr algn="r" indent="0" marL="0">
@@ -7367,17 +7367,17 @@
         </p:nvSpPr>
         <p:spPr>
           <a:xfrm>
-            <a:off x="6376624" y="3384970"/>
-            <a:ext cx="778556" cy="247650"/>
-          </a:xfrm>
-          <a:prstGeom prst="rect">
-            <a:avLst/>
-          </a:prstGeom>
-          <a:noFill/>
-          <a:ln/>
-        </p:spPr>
-        <p:txBody>
-          <a:bodyPr wrap="square" lIns="38100" tIns="114300" rIns="114300" bIns="38100" rtlCol="0" anchor="ctr"/>
+            <a:off x="6376624" y="3461147"/>
+            <a:ext cx="778556" cy="123825"/>
+          </a:xfrm>
+          <a:prstGeom prst="rect">
+            <a:avLst/>
+          </a:prstGeom>
+          <a:noFill/>
+          <a:ln/>
+        </p:spPr>
+        <p:txBody>
+          <a:bodyPr wrap="square" lIns="0" tIns="114300" rIns="114300" bIns="0" rtlCol="0" anchor="ctr"/>
           <a:lstStyle/>
           <a:p>
             <a:pPr algn="r" indent="0" marL="0">
@@ -7406,17 +7406,17 @@
         </p:nvSpPr>
         <p:spPr>
           <a:xfrm>
-            <a:off x="6376624" y="3632620"/>
-            <a:ext cx="778556" cy="247650"/>
-          </a:xfrm>
-          <a:prstGeom prst="rect">
-            <a:avLst/>
-          </a:prstGeom>
-          <a:noFill/>
-          <a:ln/>
-        </p:spPr>
-        <p:txBody>
-          <a:bodyPr wrap="square" lIns="38100" tIns="114300" rIns="114300" bIns="38100" rtlCol="0" anchor="ctr"/>
+            <a:off x="6376624" y="3708797"/>
+            <a:ext cx="778556" cy="123825"/>
+          </a:xfrm>
+          <a:prstGeom prst="rect">
+            <a:avLst/>
+          </a:prstGeom>
+          <a:noFill/>
+          <a:ln/>
+        </p:spPr>
+        <p:txBody>
+          <a:bodyPr wrap="square" lIns="0" tIns="114300" rIns="114300" bIns="0" rtlCol="0" anchor="ctr"/>
           <a:lstStyle/>
           <a:p>
             <a:pPr algn="r" indent="0" marL="0">
@@ -7445,17 +7445,17 @@
         </p:nvSpPr>
         <p:spPr>
           <a:xfrm>
-            <a:off x="8283129" y="1443060"/>
-            <a:ext cx="827455" cy="242888"/>
-          </a:xfrm>
-          <a:prstGeom prst="rect">
-            <a:avLst/>
-          </a:prstGeom>
-          <a:noFill/>
-          <a:ln/>
-        </p:spPr>
-        <p:txBody>
-          <a:bodyPr wrap="square" lIns="38100" tIns="114300" rIns="114300" bIns="38100" rtlCol="0" anchor="ctr"/>
+            <a:off x="8283129" y="1524000"/>
+            <a:ext cx="827455" cy="104775"/>
+          </a:xfrm>
+          <a:prstGeom prst="rect">
+            <a:avLst/>
+          </a:prstGeom>
+          <a:noFill/>
+          <a:ln/>
+        </p:spPr>
+        <p:txBody>
+          <a:bodyPr wrap="square" lIns="0" tIns="114300" rIns="114300" bIns="0" rtlCol="0" anchor="ctr"/>
           <a:lstStyle/>
           <a:p>
             <a:pPr algn="r" indent="0" marL="0">
@@ -7484,17 +7484,17 @@
         </p:nvSpPr>
         <p:spPr>
           <a:xfrm>
-            <a:off x="9087287" y="1443060"/>
-            <a:ext cx="799863" cy="242888"/>
-          </a:xfrm>
-          <a:prstGeom prst="rect">
-            <a:avLst/>
-          </a:prstGeom>
-          <a:noFill/>
-          <a:ln/>
-        </p:spPr>
-        <p:txBody>
-          <a:bodyPr wrap="square" lIns="38100" tIns="114300" rIns="114300" bIns="38100" rtlCol="0" anchor="ctr"/>
+            <a:off x="9087287" y="1524000"/>
+            <a:ext cx="799863" cy="104775"/>
+          </a:xfrm>
+          <a:prstGeom prst="rect">
+            <a:avLst/>
+          </a:prstGeom>
+          <a:noFill/>
+          <a:ln/>
+        </p:spPr>
+        <p:txBody>
+          <a:bodyPr wrap="square" lIns="0" tIns="114300" rIns="114300" bIns="0" rtlCol="0" anchor="ctr"/>
           <a:lstStyle/>
           <a:p>
             <a:pPr algn="r" indent="0" marL="0">
@@ -7523,17 +7523,17 @@
         </p:nvSpPr>
         <p:spPr>
           <a:xfrm>
-            <a:off x="8283129" y="1685948"/>
-            <a:ext cx="827455" cy="247650"/>
-          </a:xfrm>
-          <a:prstGeom prst="rect">
-            <a:avLst/>
-          </a:prstGeom>
-          <a:noFill/>
-          <a:ln/>
-        </p:spPr>
-        <p:txBody>
-          <a:bodyPr wrap="square" lIns="38100" tIns="114300" rIns="114300" bIns="38100" rtlCol="0" anchor="ctr"/>
+            <a:off x="8283129" y="1771650"/>
+            <a:ext cx="827455" cy="104775"/>
+          </a:xfrm>
+          <a:prstGeom prst="rect">
+            <a:avLst/>
+          </a:prstGeom>
+          <a:noFill/>
+          <a:ln/>
+        </p:spPr>
+        <p:txBody>
+          <a:bodyPr wrap="square" lIns="0" tIns="114300" rIns="114300" bIns="0" rtlCol="0" anchor="ctr"/>
           <a:lstStyle/>
           <a:p>
             <a:pPr algn="r" indent="0" marL="0">
@@ -7562,17 +7562,17 @@
         </p:nvSpPr>
         <p:spPr>
           <a:xfrm>
-            <a:off x="9087287" y="1685948"/>
-            <a:ext cx="799863" cy="247650"/>
-          </a:xfrm>
-          <a:prstGeom prst="rect">
-            <a:avLst/>
-          </a:prstGeom>
-          <a:noFill/>
-          <a:ln/>
-        </p:spPr>
-        <p:txBody>
-          <a:bodyPr wrap="square" lIns="38100" tIns="114300" rIns="114300" bIns="38100" rtlCol="0" anchor="ctr"/>
+            <a:off x="9087287" y="1771650"/>
+            <a:ext cx="799863" cy="104775"/>
+          </a:xfrm>
+          <a:prstGeom prst="rect">
+            <a:avLst/>
+          </a:prstGeom>
+          <a:noFill/>
+          <a:ln/>
+        </p:spPr>
+        <p:txBody>
+          <a:bodyPr wrap="square" lIns="0" tIns="114300" rIns="114300" bIns="0" rtlCol="0" anchor="ctr"/>
           <a:lstStyle/>
           <a:p>
             <a:pPr algn="r" indent="0" marL="0">
@@ -7601,17 +7601,17 @@
         </p:nvSpPr>
         <p:spPr>
           <a:xfrm>
-            <a:off x="8283129" y="1933598"/>
-            <a:ext cx="827455" cy="247650"/>
-          </a:xfrm>
-          <a:prstGeom prst="rect">
-            <a:avLst/>
-          </a:prstGeom>
-          <a:noFill/>
-          <a:ln/>
-        </p:spPr>
-        <p:txBody>
-          <a:bodyPr wrap="square" lIns="38100" tIns="114300" rIns="114300" bIns="38100" rtlCol="0" anchor="ctr"/>
+            <a:off x="8283129" y="2019300"/>
+            <a:ext cx="827455" cy="104775"/>
+          </a:xfrm>
+          <a:prstGeom prst="rect">
+            <a:avLst/>
+          </a:prstGeom>
+          <a:noFill/>
+          <a:ln/>
+        </p:spPr>
+        <p:txBody>
+          <a:bodyPr wrap="square" lIns="0" tIns="114300" rIns="114300" bIns="0" rtlCol="0" anchor="ctr"/>
           <a:lstStyle/>
           <a:p>
             <a:pPr algn="r" indent="0" marL="0">
@@ -7640,17 +7640,17 @@
         </p:nvSpPr>
         <p:spPr>
           <a:xfrm>
-            <a:off x="9087287" y="1933598"/>
-            <a:ext cx="799863" cy="247650"/>
-          </a:xfrm>
-          <a:prstGeom prst="rect">
-            <a:avLst/>
-          </a:prstGeom>
-          <a:noFill/>
-          <a:ln/>
-        </p:spPr>
-        <p:txBody>
-          <a:bodyPr wrap="square" lIns="38100" tIns="114300" rIns="114300" bIns="38100" rtlCol="0" anchor="ctr"/>
+            <a:off x="9087287" y="2019300"/>
+            <a:ext cx="799863" cy="104775"/>
+          </a:xfrm>
+          <a:prstGeom prst="rect">
+            <a:avLst/>
+          </a:prstGeom>
+          <a:noFill/>
+          <a:ln/>
+        </p:spPr>
+        <p:txBody>
+          <a:bodyPr wrap="square" lIns="0" tIns="114300" rIns="114300" bIns="0" rtlCol="0" anchor="ctr"/>
           <a:lstStyle/>
           <a:p>
             <a:pPr algn="r" indent="0" marL="0">
@@ -7679,17 +7679,17 @@
         </p:nvSpPr>
         <p:spPr>
           <a:xfrm>
-            <a:off x="8283129" y="2181248"/>
-            <a:ext cx="827455" cy="247650"/>
-          </a:xfrm>
-          <a:prstGeom prst="rect">
-            <a:avLst/>
-          </a:prstGeom>
-          <a:noFill/>
-          <a:ln/>
-        </p:spPr>
-        <p:txBody>
-          <a:bodyPr wrap="square" lIns="38100" tIns="114300" rIns="114300" bIns="38100" rtlCol="0" anchor="ctr"/>
+            <a:off x="8283129" y="2266950"/>
+            <a:ext cx="827455" cy="104775"/>
+          </a:xfrm>
+          <a:prstGeom prst="rect">
+            <a:avLst/>
+          </a:prstGeom>
+          <a:noFill/>
+          <a:ln/>
+        </p:spPr>
+        <p:txBody>
+          <a:bodyPr wrap="square" lIns="0" tIns="114300" rIns="114300" bIns="0" rtlCol="0" anchor="ctr"/>
           <a:lstStyle/>
           <a:p>
             <a:pPr algn="r" indent="0" marL="0">
@@ -7718,17 +7718,17 @@
         </p:nvSpPr>
         <p:spPr>
           <a:xfrm>
-            <a:off x="9087287" y="2181248"/>
-            <a:ext cx="799863" cy="247650"/>
-          </a:xfrm>
-          <a:prstGeom prst="rect">
-            <a:avLst/>
-          </a:prstGeom>
-          <a:noFill/>
-          <a:ln/>
-        </p:spPr>
-        <p:txBody>
-          <a:bodyPr wrap="square" lIns="38100" tIns="114300" rIns="114300" bIns="38100" rtlCol="0" anchor="ctr"/>
+            <a:off x="9087287" y="2266950"/>
+            <a:ext cx="799863" cy="104775"/>
+          </a:xfrm>
+          <a:prstGeom prst="rect">
+            <a:avLst/>
+          </a:prstGeom>
+          <a:noFill/>
+          <a:ln/>
+        </p:spPr>
+        <p:txBody>
+          <a:bodyPr wrap="square" lIns="0" tIns="114300" rIns="114300" bIns="0" rtlCol="0" anchor="ctr"/>
           <a:lstStyle/>
           <a:p>
             <a:pPr algn="r" indent="0" marL="0">
@@ -7757,17 +7757,17 @@
         </p:nvSpPr>
         <p:spPr>
           <a:xfrm>
-            <a:off x="8283129" y="2428898"/>
-            <a:ext cx="827455" cy="247650"/>
-          </a:xfrm>
-          <a:prstGeom prst="rect">
-            <a:avLst/>
-          </a:prstGeom>
-          <a:noFill/>
-          <a:ln/>
-        </p:spPr>
-        <p:txBody>
-          <a:bodyPr wrap="square" lIns="38100" tIns="114300" rIns="114300" bIns="38100" rtlCol="0" anchor="ctr"/>
+            <a:off x="8283129" y="2514600"/>
+            <a:ext cx="827455" cy="104775"/>
+          </a:xfrm>
+          <a:prstGeom prst="rect">
+            <a:avLst/>
+          </a:prstGeom>
+          <a:noFill/>
+          <a:ln/>
+        </p:spPr>
+        <p:txBody>
+          <a:bodyPr wrap="square" lIns="0" tIns="114300" rIns="114300" bIns="0" rtlCol="0" anchor="ctr"/>
           <a:lstStyle/>
           <a:p>
             <a:pPr algn="r" indent="0" marL="0">
@@ -7796,17 +7796,17 @@
         </p:nvSpPr>
         <p:spPr>
           <a:xfrm>
-            <a:off x="9087287" y="2428898"/>
-            <a:ext cx="799863" cy="247650"/>
-          </a:xfrm>
-          <a:prstGeom prst="rect">
-            <a:avLst/>
-          </a:prstGeom>
-          <a:noFill/>
-          <a:ln/>
-        </p:spPr>
-        <p:txBody>
-          <a:bodyPr wrap="square" lIns="38100" tIns="114300" rIns="114300" bIns="38100" rtlCol="0" anchor="ctr"/>
+            <a:off x="9087287" y="2514600"/>
+            <a:ext cx="799863" cy="104775"/>
+          </a:xfrm>
+          <a:prstGeom prst="rect">
+            <a:avLst/>
+          </a:prstGeom>
+          <a:noFill/>
+          <a:ln/>
+        </p:spPr>
+        <p:txBody>
+          <a:bodyPr wrap="square" lIns="0" tIns="114300" rIns="114300" bIns="0" rtlCol="0" anchor="ctr"/>
           <a:lstStyle/>
           <a:p>
             <a:pPr algn="r" indent="0" marL="0">
@@ -7835,17 +7835,17 @@
         </p:nvSpPr>
         <p:spPr>
           <a:xfrm>
-            <a:off x="8283129" y="2676548"/>
-            <a:ext cx="827455" cy="247650"/>
-          </a:xfrm>
-          <a:prstGeom prst="rect">
-            <a:avLst/>
-          </a:prstGeom>
-          <a:noFill/>
-          <a:ln/>
-        </p:spPr>
-        <p:txBody>
-          <a:bodyPr wrap="square" lIns="38100" tIns="114300" rIns="114300" bIns="38100" rtlCol="0" anchor="ctr"/>
+            <a:off x="8283129" y="2762250"/>
+            <a:ext cx="827455" cy="104775"/>
+          </a:xfrm>
+          <a:prstGeom prst="rect">
+            <a:avLst/>
+          </a:prstGeom>
+          <a:noFill/>
+          <a:ln/>
+        </p:spPr>
+        <p:txBody>
+          <a:bodyPr wrap="square" lIns="0" tIns="114300" rIns="114300" bIns="0" rtlCol="0" anchor="ctr"/>
           <a:lstStyle/>
           <a:p>
             <a:pPr algn="r" indent="0" marL="0">
@@ -7874,17 +7874,17 @@
         </p:nvSpPr>
         <p:spPr>
           <a:xfrm>
-            <a:off x="9087287" y="2676548"/>
-            <a:ext cx="799863" cy="247650"/>
-          </a:xfrm>
-          <a:prstGeom prst="rect">
-            <a:avLst/>
-          </a:prstGeom>
-          <a:noFill/>
-          <a:ln/>
-        </p:spPr>
-        <p:txBody>
-          <a:bodyPr wrap="square" lIns="38100" tIns="114300" rIns="114300" bIns="38100" rtlCol="0" anchor="ctr"/>
+            <a:off x="9087287" y="2762250"/>
+            <a:ext cx="799863" cy="104775"/>
+          </a:xfrm>
+          <a:prstGeom prst="rect">
+            <a:avLst/>
+          </a:prstGeom>
+          <a:noFill/>
+          <a:ln/>
+        </p:spPr>
+        <p:txBody>
+          <a:bodyPr wrap="square" lIns="0" tIns="114300" rIns="114300" bIns="0" rtlCol="0" anchor="ctr"/>
           <a:lstStyle/>
           <a:p>
             <a:pPr algn="r" indent="0" marL="0">
@@ -7913,17 +7913,17 @@
         </p:nvSpPr>
         <p:spPr>
           <a:xfrm>
-            <a:off x="8283129" y="2924198"/>
-            <a:ext cx="827455" cy="242888"/>
-          </a:xfrm>
-          <a:prstGeom prst="rect">
-            <a:avLst/>
-          </a:prstGeom>
-          <a:noFill/>
-          <a:ln/>
-        </p:spPr>
-        <p:txBody>
-          <a:bodyPr wrap="square" lIns="38100" tIns="114300" rIns="114300" bIns="38100" rtlCol="0" anchor="ctr"/>
+            <a:off x="8283129" y="3009900"/>
+            <a:ext cx="827455" cy="104775"/>
+          </a:xfrm>
+          <a:prstGeom prst="rect">
+            <a:avLst/>
+          </a:prstGeom>
+          <a:noFill/>
+          <a:ln/>
+        </p:spPr>
+        <p:txBody>
+          <a:bodyPr wrap="square" lIns="0" tIns="114300" rIns="114300" bIns="0" rtlCol="0" anchor="ctr"/>
           <a:lstStyle/>
           <a:p>
             <a:pPr algn="r" indent="0" marL="0">
@@ -7952,17 +7952,17 @@
         </p:nvSpPr>
         <p:spPr>
           <a:xfrm>
-            <a:off x="9087287" y="2924198"/>
-            <a:ext cx="799863" cy="242888"/>
-          </a:xfrm>
-          <a:prstGeom prst="rect">
-            <a:avLst/>
-          </a:prstGeom>
-          <a:noFill/>
-          <a:ln/>
-        </p:spPr>
-        <p:txBody>
-          <a:bodyPr wrap="square" lIns="38100" tIns="114300" rIns="114300" bIns="38100" rtlCol="0" anchor="ctr"/>
+            <a:off x="9087287" y="3009900"/>
+            <a:ext cx="799863" cy="104775"/>
+          </a:xfrm>
+          <a:prstGeom prst="rect">
+            <a:avLst/>
+          </a:prstGeom>
+          <a:noFill/>
+          <a:ln/>
+        </p:spPr>
+        <p:txBody>
+          <a:bodyPr wrap="square" lIns="0" tIns="114300" rIns="114300" bIns="0" rtlCol="0" anchor="ctr"/>
           <a:lstStyle/>
           <a:p>
             <a:pPr algn="r" indent="0" marL="0">
@@ -7991,17 +7991,17 @@
         </p:nvSpPr>
         <p:spPr>
           <a:xfrm>
-            <a:off x="8965222" y="4067198"/>
-            <a:ext cx="489146" cy="180975"/>
-          </a:xfrm>
-          <a:prstGeom prst="rect">
-            <a:avLst/>
-          </a:prstGeom>
-          <a:noFill/>
-          <a:ln/>
-        </p:spPr>
-        <p:txBody>
-          <a:bodyPr wrap="square" lIns="38100" tIns="114300" rIns="114300" bIns="38100" rtlCol="0" anchor="ctr"/>
+            <a:off x="8965222" y="4124325"/>
+            <a:ext cx="489146" cy="95250"/>
+          </a:xfrm>
+          <a:prstGeom prst="rect">
+            <a:avLst/>
+          </a:prstGeom>
+          <a:noFill/>
+          <a:ln/>
+        </p:spPr>
+        <p:txBody>
+          <a:bodyPr wrap="square" lIns="0" tIns="114300" rIns="114300" bIns="0" rtlCol="0" anchor="ctr"/>
           <a:lstStyle/>
           <a:p>
             <a:pPr algn="r" indent="0" marL="0">
@@ -8030,17 +8030,17 @@
         </p:nvSpPr>
         <p:spPr>
           <a:xfrm>
-            <a:off x="8965222" y="4248173"/>
-            <a:ext cx="489146" cy="180975"/>
-          </a:xfrm>
-          <a:prstGeom prst="rect">
-            <a:avLst/>
-          </a:prstGeom>
-          <a:noFill/>
-          <a:ln/>
-        </p:spPr>
-        <p:txBody>
-          <a:bodyPr wrap="square" lIns="38100" tIns="114300" rIns="114300" bIns="38100" rtlCol="0" anchor="ctr"/>
+            <a:off x="8965222" y="4305300"/>
+            <a:ext cx="489146" cy="95250"/>
+          </a:xfrm>
+          <a:prstGeom prst="rect">
+            <a:avLst/>
+          </a:prstGeom>
+          <a:noFill/>
+          <a:ln/>
+        </p:spPr>
+        <p:txBody>
+          <a:bodyPr wrap="square" lIns="0" tIns="114300" rIns="114300" bIns="0" rtlCol="0" anchor="ctr"/>
           <a:lstStyle/>
           <a:p>
             <a:pPr algn="r" indent="0" marL="0">
@@ -8069,17 +8069,17 @@
         </p:nvSpPr>
         <p:spPr>
           <a:xfrm>
-            <a:off x="8965222" y="4429148"/>
-            <a:ext cx="489146" cy="180975"/>
-          </a:xfrm>
-          <a:prstGeom prst="rect">
-            <a:avLst/>
-          </a:prstGeom>
-          <a:noFill/>
-          <a:ln/>
-        </p:spPr>
-        <p:txBody>
-          <a:bodyPr wrap="square" lIns="38100" tIns="114300" rIns="114300" bIns="38100" rtlCol="0" anchor="ctr"/>
+            <a:off x="8965222" y="4486275"/>
+            <a:ext cx="489146" cy="95250"/>
+          </a:xfrm>
+          <a:prstGeom prst="rect">
+            <a:avLst/>
+          </a:prstGeom>
+          <a:noFill/>
+          <a:ln/>
+        </p:spPr>
+        <p:txBody>
+          <a:bodyPr wrap="square" lIns="0" tIns="114300" rIns="114300" bIns="0" rtlCol="0" anchor="ctr"/>
           <a:lstStyle/>
           <a:p>
             <a:pPr algn="r" indent="0" marL="0">
@@ -8108,17 +8108,17 @@
         </p:nvSpPr>
         <p:spPr>
           <a:xfrm>
-            <a:off x="8965222" y="4610123"/>
-            <a:ext cx="489146" cy="176212"/>
-          </a:xfrm>
-          <a:prstGeom prst="rect">
-            <a:avLst/>
-          </a:prstGeom>
-          <a:noFill/>
-          <a:ln/>
-        </p:spPr>
-        <p:txBody>
-          <a:bodyPr wrap="square" lIns="38100" tIns="114300" rIns="114300" bIns="38100" rtlCol="0" anchor="ctr"/>
+            <a:off x="8965222" y="4667250"/>
+            <a:ext cx="489146" cy="95250"/>
+          </a:xfrm>
+          <a:prstGeom prst="rect">
+            <a:avLst/>
+          </a:prstGeom>
+          <a:noFill/>
+          <a:ln/>
+        </p:spPr>
+        <p:txBody>
+          <a:bodyPr wrap="square" lIns="0" tIns="114300" rIns="114300" bIns="0" rtlCol="0" anchor="ctr"/>
           <a:lstStyle/>
           <a:p>
             <a:pPr algn="r" indent="0" marL="0">
@@ -8147,17 +8147,17 @@
         </p:nvSpPr>
         <p:spPr>
           <a:xfrm>
-            <a:off x="10997717" y="3710010"/>
-            <a:ext cx="489146" cy="176212"/>
-          </a:xfrm>
-          <a:prstGeom prst="rect">
-            <a:avLst/>
-          </a:prstGeom>
-          <a:noFill/>
-          <a:ln/>
-        </p:spPr>
-        <p:txBody>
-          <a:bodyPr wrap="square" lIns="38100" tIns="114300" rIns="114300" bIns="38100" rtlCol="0" anchor="ctr"/>
+            <a:off x="10997717" y="3762375"/>
+            <a:ext cx="489146" cy="95250"/>
+          </a:xfrm>
+          <a:prstGeom prst="rect">
+            <a:avLst/>
+          </a:prstGeom>
+          <a:noFill/>
+          <a:ln/>
+        </p:spPr>
+        <p:txBody>
+          <a:bodyPr wrap="square" lIns="0" tIns="114300" rIns="114300" bIns="0" rtlCol="0" anchor="ctr"/>
           <a:lstStyle/>
           <a:p>
             <a:pPr algn="r" indent="0" marL="0">
@@ -8173,6 +8173,1566 @@
                 <a:cs typeface="Raleway" pitchFamily="34" charset="-120"/>
               </a:rPr>
               <a:t>13</a:t>
+            </a:r>
+            <a:endParaRPr lang="en-US" sz="672" dirty="0"/>
+          </a:p>
+        </p:txBody>
+      </p:sp>
+      <p:sp>
+        <p:nvSpPr>
+          <p:cNvPr id="128" name="Text 125"/>
+          <p:cNvSpPr/>
+          <p:nvPr/>
+        </p:nvSpPr>
+        <p:spPr>
+          <a:xfrm>
+            <a:off x="2643886" y="2480072"/>
+            <a:ext cx="454042" cy="104775"/>
+          </a:xfrm>
+          <a:prstGeom prst="rect">
+            <a:avLst/>
+          </a:prstGeom>
+          <a:noFill/>
+          <a:ln/>
+        </p:spPr>
+        <p:txBody>
+          <a:bodyPr wrap="square" lIns="0" tIns="114300" rIns="114300" bIns="0" rtlCol="0" anchor="ctr"/>
+          <a:lstStyle/>
+          <a:p>
+            <a:pPr algn="r" indent="0" marL="0">
+              <a:buNone/>
+            </a:pPr>
+            <a:r>
+              <a:rPr lang="en-US" sz="720" dirty="0">
+                <a:solidFill>
+                  <a:srgbClr val="333333"/>
+                </a:solidFill>
+                <a:latin typeface="Raleway" pitchFamily="34" charset="0"/>
+                <a:ea typeface="Raleway" pitchFamily="34" charset="-122"/>
+                <a:cs typeface="Raleway" pitchFamily="34" charset="-120"/>
+              </a:rPr>
+              <a:t>9</a:t>
+            </a:r>
+            <a:endParaRPr lang="en-US" sz="720" dirty="0"/>
+          </a:p>
+        </p:txBody>
+      </p:sp>
+      <p:sp>
+        <p:nvSpPr>
+          <p:cNvPr id="129" name="Text 126"/>
+          <p:cNvSpPr/>
+          <p:nvPr/>
+        </p:nvSpPr>
+        <p:spPr>
+          <a:xfrm>
+            <a:off x="2203068" y="3223022"/>
+            <a:ext cx="454042" cy="104775"/>
+          </a:xfrm>
+          <a:prstGeom prst="rect">
+            <a:avLst/>
+          </a:prstGeom>
+          <a:noFill/>
+          <a:ln/>
+        </p:spPr>
+        <p:txBody>
+          <a:bodyPr wrap="square" lIns="0" tIns="114300" rIns="114300" bIns="0" rtlCol="0" anchor="ctr"/>
+          <a:lstStyle/>
+          <a:p>
+            <a:pPr algn="r" indent="0" marL="0">
+              <a:buNone/>
+            </a:pPr>
+            <a:r>
+              <a:rPr lang="en-US" sz="720" dirty="0">
+                <a:solidFill>
+                  <a:srgbClr val="333333"/>
+                </a:solidFill>
+                <a:latin typeface="Raleway" pitchFamily="34" charset="0"/>
+                <a:ea typeface="Raleway" pitchFamily="34" charset="-122"/>
+                <a:cs typeface="Raleway" pitchFamily="34" charset="-120"/>
+              </a:rPr>
+              <a:t>9</a:t>
+            </a:r>
+            <a:endParaRPr lang="en-US" sz="720" dirty="0"/>
+          </a:p>
+        </p:txBody>
+      </p:sp>
+      <p:sp>
+        <p:nvSpPr>
+          <p:cNvPr id="130" name="Text 127"/>
+          <p:cNvSpPr/>
+          <p:nvPr/>
+        </p:nvSpPr>
+        <p:spPr>
+          <a:xfrm>
+            <a:off x="2203068" y="3470672"/>
+            <a:ext cx="454042" cy="104775"/>
+          </a:xfrm>
+          <a:prstGeom prst="rect">
+            <a:avLst/>
+          </a:prstGeom>
+          <a:noFill/>
+          <a:ln/>
+        </p:spPr>
+        <p:txBody>
+          <a:bodyPr wrap="square" lIns="0" tIns="114300" rIns="114300" bIns="0" rtlCol="0" anchor="ctr"/>
+          <a:lstStyle/>
+          <a:p>
+            <a:pPr algn="r" indent="0" marL="0">
+              <a:buNone/>
+            </a:pPr>
+            <a:r>
+              <a:rPr lang="en-US" sz="720" dirty="0">
+                <a:solidFill>
+                  <a:srgbClr val="333333"/>
+                </a:solidFill>
+                <a:latin typeface="Raleway" pitchFamily="34" charset="0"/>
+                <a:ea typeface="Raleway" pitchFamily="34" charset="-122"/>
+                <a:cs typeface="Raleway" pitchFamily="34" charset="-120"/>
+              </a:rPr>
+              <a:t>7</a:t>
+            </a:r>
+            <a:endParaRPr lang="en-US" sz="720" dirty="0"/>
+          </a:p>
+        </p:txBody>
+      </p:sp>
+      <p:sp>
+        <p:nvSpPr>
+          <p:cNvPr id="131" name="Text 128"/>
+          <p:cNvSpPr/>
+          <p:nvPr/>
+        </p:nvSpPr>
+        <p:spPr>
+          <a:xfrm>
+            <a:off x="2203068" y="3718322"/>
+            <a:ext cx="454042" cy="104775"/>
+          </a:xfrm>
+          <a:prstGeom prst="rect">
+            <a:avLst/>
+          </a:prstGeom>
+          <a:noFill/>
+          <a:ln/>
+        </p:spPr>
+        <p:txBody>
+          <a:bodyPr wrap="square" lIns="0" tIns="114300" rIns="114300" bIns="0" rtlCol="0" anchor="ctr"/>
+          <a:lstStyle/>
+          <a:p>
+            <a:pPr algn="r" indent="0" marL="0">
+              <a:buNone/>
+            </a:pPr>
+            <a:r>
+              <a:rPr lang="en-US" sz="720" dirty="0">
+                <a:solidFill>
+                  <a:srgbClr val="333333"/>
+                </a:solidFill>
+                <a:latin typeface="Raleway" pitchFamily="34" charset="0"/>
+                <a:ea typeface="Raleway" pitchFamily="34" charset="-122"/>
+                <a:cs typeface="Raleway" pitchFamily="34" charset="-120"/>
+              </a:rPr>
+              <a:t>4</a:t>
+            </a:r>
+            <a:endParaRPr lang="en-US" sz="720" dirty="0"/>
+          </a:p>
+        </p:txBody>
+      </p:sp>
+      <p:sp>
+        <p:nvSpPr>
+          <p:cNvPr id="132" name="Text 129"/>
+          <p:cNvSpPr/>
+          <p:nvPr/>
+        </p:nvSpPr>
+        <p:spPr>
+          <a:xfrm>
+            <a:off x="2643886" y="3718322"/>
+            <a:ext cx="454042" cy="104775"/>
+          </a:xfrm>
+          <a:prstGeom prst="rect">
+            <a:avLst/>
+          </a:prstGeom>
+          <a:noFill/>
+          <a:ln/>
+        </p:spPr>
+        <p:txBody>
+          <a:bodyPr wrap="square" lIns="0" tIns="114300" rIns="114300" bIns="0" rtlCol="0" anchor="ctr"/>
+          <a:lstStyle/>
+          <a:p>
+            <a:pPr algn="r" indent="0" marL="0">
+              <a:buNone/>
+            </a:pPr>
+            <a:r>
+              <a:rPr lang="en-US" sz="720" dirty="0">
+                <a:solidFill>
+                  <a:srgbClr val="333333"/>
+                </a:solidFill>
+                <a:latin typeface="Raleway" pitchFamily="34" charset="0"/>
+                <a:ea typeface="Raleway" pitchFamily="34" charset="-122"/>
+                <a:cs typeface="Raleway" pitchFamily="34" charset="-120"/>
+              </a:rPr>
+              <a:t>1</a:t>
+            </a:r>
+            <a:endParaRPr lang="en-US" sz="720" dirty="0"/>
+          </a:p>
+        </p:txBody>
+      </p:sp>
+      <p:sp>
+        <p:nvSpPr>
+          <p:cNvPr id="133" name="Text 130"/>
+          <p:cNvSpPr/>
+          <p:nvPr/>
+        </p:nvSpPr>
+        <p:spPr>
+          <a:xfrm>
+            <a:off x="2203068" y="3965972"/>
+            <a:ext cx="454042" cy="104775"/>
+          </a:xfrm>
+          <a:prstGeom prst="rect">
+            <a:avLst/>
+          </a:prstGeom>
+          <a:noFill/>
+          <a:ln/>
+        </p:spPr>
+        <p:txBody>
+          <a:bodyPr wrap="square" lIns="0" tIns="114300" rIns="114300" bIns="0" rtlCol="0" anchor="ctr"/>
+          <a:lstStyle/>
+          <a:p>
+            <a:pPr algn="r" indent="0" marL="0">
+              <a:buNone/>
+            </a:pPr>
+            <a:r>
+              <a:rPr lang="en-US" sz="720" dirty="0">
+                <a:solidFill>
+                  <a:srgbClr val="333333"/>
+                </a:solidFill>
+                <a:latin typeface="Raleway" pitchFamily="34" charset="0"/>
+                <a:ea typeface="Raleway" pitchFamily="34" charset="-122"/>
+                <a:cs typeface="Raleway" pitchFamily="34" charset="-120"/>
+              </a:rPr>
+              <a:t>4</a:t>
+            </a:r>
+            <a:endParaRPr lang="en-US" sz="720" dirty="0"/>
+          </a:p>
+        </p:txBody>
+      </p:sp>
+      <p:sp>
+        <p:nvSpPr>
+          <p:cNvPr id="134" name="Text 131"/>
+          <p:cNvSpPr/>
+          <p:nvPr/>
+        </p:nvSpPr>
+        <p:spPr>
+          <a:xfrm>
+            <a:off x="2643886" y="3965972"/>
+            <a:ext cx="454042" cy="104775"/>
+          </a:xfrm>
+          <a:prstGeom prst="rect">
+            <a:avLst/>
+          </a:prstGeom>
+          <a:noFill/>
+          <a:ln/>
+        </p:spPr>
+        <p:txBody>
+          <a:bodyPr wrap="square" lIns="0" tIns="114300" rIns="114300" bIns="0" rtlCol="0" anchor="ctr"/>
+          <a:lstStyle/>
+          <a:p>
+            <a:pPr algn="r" indent="0" marL="0">
+              <a:buNone/>
+            </a:pPr>
+            <a:r>
+              <a:rPr lang="en-US" sz="720" dirty="0">
+                <a:solidFill>
+                  <a:srgbClr val="333333"/>
+                </a:solidFill>
+                <a:latin typeface="Raleway" pitchFamily="34" charset="0"/>
+                <a:ea typeface="Raleway" pitchFamily="34" charset="-122"/>
+                <a:cs typeface="Raleway" pitchFamily="34" charset="-120"/>
+              </a:rPr>
+              <a:t>9</a:t>
+            </a:r>
+            <a:endParaRPr lang="en-US" sz="720" dirty="0"/>
+          </a:p>
+        </p:txBody>
+      </p:sp>
+      <p:sp>
+        <p:nvSpPr>
+          <p:cNvPr id="135" name="Text 132"/>
+          <p:cNvSpPr/>
+          <p:nvPr/>
+        </p:nvSpPr>
+        <p:spPr>
+          <a:xfrm>
+            <a:off x="2203068" y="4213622"/>
+            <a:ext cx="454042" cy="104775"/>
+          </a:xfrm>
+          <a:prstGeom prst="rect">
+            <a:avLst/>
+          </a:prstGeom>
+          <a:noFill/>
+          <a:ln/>
+        </p:spPr>
+        <p:txBody>
+          <a:bodyPr wrap="square" lIns="0" tIns="114300" rIns="114300" bIns="0" rtlCol="0" anchor="ctr"/>
+          <a:lstStyle/>
+          <a:p>
+            <a:pPr algn="r" indent="0" marL="0">
+              <a:buNone/>
+            </a:pPr>
+            <a:r>
+              <a:rPr lang="en-US" sz="720" dirty="0">
+                <a:solidFill>
+                  <a:srgbClr val="333333"/>
+                </a:solidFill>
+                <a:latin typeface="Raleway" pitchFamily="34" charset="0"/>
+                <a:ea typeface="Raleway" pitchFamily="34" charset="-122"/>
+                <a:cs typeface="Raleway" pitchFamily="34" charset="-120"/>
+              </a:rPr>
+              <a:t>4</a:t>
+            </a:r>
+            <a:endParaRPr lang="en-US" sz="720" dirty="0"/>
+          </a:p>
+        </p:txBody>
+      </p:sp>
+      <p:sp>
+        <p:nvSpPr>
+          <p:cNvPr id="136" name="Text 133"/>
+          <p:cNvSpPr/>
+          <p:nvPr/>
+        </p:nvSpPr>
+        <p:spPr>
+          <a:xfrm>
+            <a:off x="2643886" y="4213622"/>
+            <a:ext cx="454042" cy="104775"/>
+          </a:xfrm>
+          <a:prstGeom prst="rect">
+            <a:avLst/>
+          </a:prstGeom>
+          <a:noFill/>
+          <a:ln/>
+        </p:spPr>
+        <p:txBody>
+          <a:bodyPr wrap="square" lIns="0" tIns="114300" rIns="114300" bIns="0" rtlCol="0" anchor="ctr"/>
+          <a:lstStyle/>
+          <a:p>
+            <a:pPr algn="r" indent="0" marL="0">
+              <a:buNone/>
+            </a:pPr>
+            <a:r>
+              <a:rPr lang="en-US" sz="720" dirty="0">
+                <a:solidFill>
+                  <a:srgbClr val="333333"/>
+                </a:solidFill>
+                <a:latin typeface="Raleway" pitchFamily="34" charset="0"/>
+                <a:ea typeface="Raleway" pitchFamily="34" charset="-122"/>
+                <a:cs typeface="Raleway" pitchFamily="34" charset="-120"/>
+              </a:rPr>
+              <a:t>8</a:t>
+            </a:r>
+            <a:endParaRPr lang="en-US" sz="720" dirty="0"/>
+          </a:p>
+        </p:txBody>
+      </p:sp>
+      <p:sp>
+        <p:nvSpPr>
+          <p:cNvPr id="137" name="Text 134"/>
+          <p:cNvSpPr/>
+          <p:nvPr/>
+        </p:nvSpPr>
+        <p:spPr>
+          <a:xfrm>
+            <a:off x="5504440" y="1737122"/>
+            <a:ext cx="454042" cy="104775"/>
+          </a:xfrm>
+          <a:prstGeom prst="rect">
+            <a:avLst/>
+          </a:prstGeom>
+          <a:noFill/>
+          <a:ln/>
+        </p:spPr>
+        <p:txBody>
+          <a:bodyPr wrap="square" lIns="0" tIns="114300" rIns="114300" bIns="0" rtlCol="0" anchor="ctr"/>
+          <a:lstStyle/>
+          <a:p>
+            <a:pPr algn="r" indent="0" marL="0">
+              <a:buNone/>
+            </a:pPr>
+            <a:r>
+              <a:rPr lang="en-US" sz="720" dirty="0">
+                <a:solidFill>
+                  <a:srgbClr val="333333"/>
+                </a:solidFill>
+                <a:latin typeface="Raleway" pitchFamily="34" charset="0"/>
+                <a:ea typeface="Raleway" pitchFamily="34" charset="-122"/>
+                <a:cs typeface="Raleway" pitchFamily="34" charset="-120"/>
+              </a:rPr>
+              <a:t>3</a:t>
+            </a:r>
+            <a:endParaRPr lang="en-US" sz="720" dirty="0"/>
+          </a:p>
+        </p:txBody>
+      </p:sp>
+      <p:sp>
+        <p:nvSpPr>
+          <p:cNvPr id="138" name="Text 135"/>
+          <p:cNvSpPr/>
+          <p:nvPr/>
+        </p:nvSpPr>
+        <p:spPr>
+          <a:xfrm>
+            <a:off x="5945258" y="1737122"/>
+            <a:ext cx="454042" cy="104775"/>
+          </a:xfrm>
+          <a:prstGeom prst="rect">
+            <a:avLst/>
+          </a:prstGeom>
+          <a:noFill/>
+          <a:ln/>
+        </p:spPr>
+        <p:txBody>
+          <a:bodyPr wrap="square" lIns="0" tIns="114300" rIns="114300" bIns="0" rtlCol="0" anchor="ctr"/>
+          <a:lstStyle/>
+          <a:p>
+            <a:pPr algn="r" indent="0" marL="0">
+              <a:buNone/>
+            </a:pPr>
+            <a:r>
+              <a:rPr lang="en-US" sz="720" dirty="0">
+                <a:solidFill>
+                  <a:srgbClr val="333333"/>
+                </a:solidFill>
+                <a:latin typeface="Raleway" pitchFamily="34" charset="0"/>
+                <a:ea typeface="Raleway" pitchFamily="34" charset="-122"/>
+                <a:cs typeface="Raleway" pitchFamily="34" charset="-120"/>
+              </a:rPr>
+              <a:t>2</a:t>
+            </a:r>
+            <a:endParaRPr lang="en-US" sz="720" dirty="0"/>
+          </a:p>
+        </p:txBody>
+      </p:sp>
+      <p:sp>
+        <p:nvSpPr>
+          <p:cNvPr id="139" name="Text 136"/>
+          <p:cNvSpPr/>
+          <p:nvPr/>
+        </p:nvSpPr>
+        <p:spPr>
+          <a:xfrm>
+            <a:off x="5504440" y="1984772"/>
+            <a:ext cx="454042" cy="104775"/>
+          </a:xfrm>
+          <a:prstGeom prst="rect">
+            <a:avLst/>
+          </a:prstGeom>
+          <a:noFill/>
+          <a:ln/>
+        </p:spPr>
+        <p:txBody>
+          <a:bodyPr wrap="square" lIns="0" tIns="114300" rIns="114300" bIns="0" rtlCol="0" anchor="ctr"/>
+          <a:lstStyle/>
+          <a:p>
+            <a:pPr algn="r" indent="0" marL="0">
+              <a:buNone/>
+            </a:pPr>
+            <a:r>
+              <a:rPr lang="en-US" sz="720" dirty="0">
+                <a:solidFill>
+                  <a:srgbClr val="333333"/>
+                </a:solidFill>
+                <a:latin typeface="Raleway" pitchFamily="34" charset="0"/>
+                <a:ea typeface="Raleway" pitchFamily="34" charset="-122"/>
+                <a:cs typeface="Raleway" pitchFamily="34" charset="-120"/>
+              </a:rPr>
+              <a:t>3</a:t>
+            </a:r>
+            <a:endParaRPr lang="en-US" sz="720" dirty="0"/>
+          </a:p>
+        </p:txBody>
+      </p:sp>
+      <p:sp>
+        <p:nvSpPr>
+          <p:cNvPr id="140" name="Text 137"/>
+          <p:cNvSpPr/>
+          <p:nvPr/>
+        </p:nvSpPr>
+        <p:spPr>
+          <a:xfrm>
+            <a:off x="5945258" y="1984772"/>
+            <a:ext cx="454042" cy="104775"/>
+          </a:xfrm>
+          <a:prstGeom prst="rect">
+            <a:avLst/>
+          </a:prstGeom>
+          <a:noFill/>
+          <a:ln/>
+        </p:spPr>
+        <p:txBody>
+          <a:bodyPr wrap="square" lIns="0" tIns="114300" rIns="114300" bIns="0" rtlCol="0" anchor="ctr"/>
+          <a:lstStyle/>
+          <a:p>
+            <a:pPr algn="r" indent="0" marL="0">
+              <a:buNone/>
+            </a:pPr>
+            <a:r>
+              <a:rPr lang="en-US" sz="720" dirty="0">
+                <a:solidFill>
+                  <a:srgbClr val="333333"/>
+                </a:solidFill>
+                <a:latin typeface="Raleway" pitchFamily="34" charset="0"/>
+                <a:ea typeface="Raleway" pitchFamily="34" charset="-122"/>
+                <a:cs typeface="Raleway" pitchFamily="34" charset="-120"/>
+              </a:rPr>
+              <a:t>6</a:t>
+            </a:r>
+            <a:endParaRPr lang="en-US" sz="720" dirty="0"/>
+          </a:p>
+        </p:txBody>
+      </p:sp>
+      <p:sp>
+        <p:nvSpPr>
+          <p:cNvPr id="141" name="Text 138"/>
+          <p:cNvSpPr/>
+          <p:nvPr/>
+        </p:nvSpPr>
+        <p:spPr>
+          <a:xfrm>
+            <a:off x="5504440" y="2232422"/>
+            <a:ext cx="454042" cy="104775"/>
+          </a:xfrm>
+          <a:prstGeom prst="rect">
+            <a:avLst/>
+          </a:prstGeom>
+          <a:noFill/>
+          <a:ln/>
+        </p:spPr>
+        <p:txBody>
+          <a:bodyPr wrap="square" lIns="0" tIns="114300" rIns="114300" bIns="0" rtlCol="0" anchor="ctr"/>
+          <a:lstStyle/>
+          <a:p>
+            <a:pPr algn="r" indent="0" marL="0">
+              <a:buNone/>
+            </a:pPr>
+            <a:r>
+              <a:rPr lang="en-US" sz="720" dirty="0">
+                <a:solidFill>
+                  <a:srgbClr val="333333"/>
+                </a:solidFill>
+                <a:latin typeface="Raleway" pitchFamily="34" charset="0"/>
+                <a:ea typeface="Raleway" pitchFamily="34" charset="-122"/>
+                <a:cs typeface="Raleway" pitchFamily="34" charset="-120"/>
+              </a:rPr>
+              <a:t>2</a:t>
+            </a:r>
+            <a:endParaRPr lang="en-US" sz="720" dirty="0"/>
+          </a:p>
+        </p:txBody>
+      </p:sp>
+      <p:sp>
+        <p:nvSpPr>
+          <p:cNvPr id="142" name="Text 139"/>
+          <p:cNvSpPr/>
+          <p:nvPr/>
+        </p:nvSpPr>
+        <p:spPr>
+          <a:xfrm>
+            <a:off x="5945258" y="2232422"/>
+            <a:ext cx="454042" cy="104775"/>
+          </a:xfrm>
+          <a:prstGeom prst="rect">
+            <a:avLst/>
+          </a:prstGeom>
+          <a:noFill/>
+          <a:ln/>
+        </p:spPr>
+        <p:txBody>
+          <a:bodyPr wrap="square" lIns="0" tIns="114300" rIns="114300" bIns="0" rtlCol="0" anchor="ctr"/>
+          <a:lstStyle/>
+          <a:p>
+            <a:pPr algn="r" indent="0" marL="0">
+              <a:buNone/>
+            </a:pPr>
+            <a:r>
+              <a:rPr lang="en-US" sz="720" dirty="0">
+                <a:solidFill>
+                  <a:srgbClr val="333333"/>
+                </a:solidFill>
+                <a:latin typeface="Raleway" pitchFamily="34" charset="0"/>
+                <a:ea typeface="Raleway" pitchFamily="34" charset="-122"/>
+                <a:cs typeface="Raleway" pitchFamily="34" charset="-120"/>
+              </a:rPr>
+              <a:t>1</a:t>
+            </a:r>
+            <a:endParaRPr lang="en-US" sz="720" dirty="0"/>
+          </a:p>
+        </p:txBody>
+      </p:sp>
+      <p:sp>
+        <p:nvSpPr>
+          <p:cNvPr id="143" name="Text 140"/>
+          <p:cNvSpPr/>
+          <p:nvPr/>
+        </p:nvSpPr>
+        <p:spPr>
+          <a:xfrm>
+            <a:off x="5504440" y="2480072"/>
+            <a:ext cx="454042" cy="104775"/>
+          </a:xfrm>
+          <a:prstGeom prst="rect">
+            <a:avLst/>
+          </a:prstGeom>
+          <a:noFill/>
+          <a:ln/>
+        </p:spPr>
+        <p:txBody>
+          <a:bodyPr wrap="square" lIns="0" tIns="114300" rIns="114300" bIns="0" rtlCol="0" anchor="ctr"/>
+          <a:lstStyle/>
+          <a:p>
+            <a:pPr algn="r" indent="0" marL="0">
+              <a:buNone/>
+            </a:pPr>
+            <a:r>
+              <a:rPr lang="en-US" sz="720" dirty="0">
+                <a:solidFill>
+                  <a:srgbClr val="333333"/>
+                </a:solidFill>
+                <a:latin typeface="Raleway" pitchFamily="34" charset="0"/>
+                <a:ea typeface="Raleway" pitchFamily="34" charset="-122"/>
+                <a:cs typeface="Raleway" pitchFamily="34" charset="-120"/>
+              </a:rPr>
+              <a:t>2</a:t>
+            </a:r>
+            <a:endParaRPr lang="en-US" sz="720" dirty="0"/>
+          </a:p>
+        </p:txBody>
+      </p:sp>
+      <p:sp>
+        <p:nvSpPr>
+          <p:cNvPr id="144" name="Text 141"/>
+          <p:cNvSpPr/>
+          <p:nvPr/>
+        </p:nvSpPr>
+        <p:spPr>
+          <a:xfrm>
+            <a:off x="5504440" y="2727722"/>
+            <a:ext cx="454042" cy="104775"/>
+          </a:xfrm>
+          <a:prstGeom prst="rect">
+            <a:avLst/>
+          </a:prstGeom>
+          <a:noFill/>
+          <a:ln/>
+        </p:spPr>
+        <p:txBody>
+          <a:bodyPr wrap="square" lIns="0" tIns="114300" rIns="114300" bIns="0" rtlCol="0" anchor="ctr"/>
+          <a:lstStyle/>
+          <a:p>
+            <a:pPr algn="r" indent="0" marL="0">
+              <a:buNone/>
+            </a:pPr>
+            <a:r>
+              <a:rPr lang="en-US" sz="720" dirty="0">
+                <a:solidFill>
+                  <a:srgbClr val="333333"/>
+                </a:solidFill>
+                <a:latin typeface="Raleway" pitchFamily="34" charset="0"/>
+                <a:ea typeface="Raleway" pitchFamily="34" charset="-122"/>
+                <a:cs typeface="Raleway" pitchFamily="34" charset="-120"/>
+              </a:rPr>
+              <a:t>1</a:t>
+            </a:r>
+            <a:endParaRPr lang="en-US" sz="720" dirty="0"/>
+          </a:p>
+        </p:txBody>
+      </p:sp>
+      <p:sp>
+        <p:nvSpPr>
+          <p:cNvPr id="145" name="Text 142"/>
+          <p:cNvSpPr/>
+          <p:nvPr/>
+        </p:nvSpPr>
+        <p:spPr>
+          <a:xfrm>
+            <a:off x="5504440" y="2975372"/>
+            <a:ext cx="454042" cy="104775"/>
+          </a:xfrm>
+          <a:prstGeom prst="rect">
+            <a:avLst/>
+          </a:prstGeom>
+          <a:noFill/>
+          <a:ln/>
+        </p:spPr>
+        <p:txBody>
+          <a:bodyPr wrap="square" lIns="0" tIns="114300" rIns="114300" bIns="0" rtlCol="0" anchor="ctr"/>
+          <a:lstStyle/>
+          <a:p>
+            <a:pPr algn="r" indent="0" marL="0">
+              <a:buNone/>
+            </a:pPr>
+            <a:r>
+              <a:rPr lang="en-US" sz="720" dirty="0">
+                <a:solidFill>
+                  <a:srgbClr val="333333"/>
+                </a:solidFill>
+                <a:latin typeface="Raleway" pitchFamily="34" charset="0"/>
+                <a:ea typeface="Raleway" pitchFamily="34" charset="-122"/>
+                <a:cs typeface="Raleway" pitchFamily="34" charset="-120"/>
+              </a:rPr>
+              <a:t>1</a:t>
+            </a:r>
+            <a:endParaRPr lang="en-US" sz="720" dirty="0"/>
+          </a:p>
+        </p:txBody>
+      </p:sp>
+      <p:sp>
+        <p:nvSpPr>
+          <p:cNvPr id="146" name="Text 143"/>
+          <p:cNvSpPr/>
+          <p:nvPr/>
+        </p:nvSpPr>
+        <p:spPr>
+          <a:xfrm>
+            <a:off x="5945258" y="2975372"/>
+            <a:ext cx="454042" cy="104775"/>
+          </a:xfrm>
+          <a:prstGeom prst="rect">
+            <a:avLst/>
+          </a:prstGeom>
+          <a:noFill/>
+          <a:ln/>
+        </p:spPr>
+        <p:txBody>
+          <a:bodyPr wrap="square" lIns="0" tIns="114300" rIns="114300" bIns="0" rtlCol="0" anchor="ctr"/>
+          <a:lstStyle/>
+          <a:p>
+            <a:pPr algn="r" indent="0" marL="0">
+              <a:buNone/>
+            </a:pPr>
+            <a:r>
+              <a:rPr lang="en-US" sz="720" dirty="0">
+                <a:solidFill>
+                  <a:srgbClr val="333333"/>
+                </a:solidFill>
+                <a:latin typeface="Raleway" pitchFamily="34" charset="0"/>
+                <a:ea typeface="Raleway" pitchFamily="34" charset="-122"/>
+                <a:cs typeface="Raleway" pitchFamily="34" charset="-120"/>
+              </a:rPr>
+              <a:t>5</a:t>
+            </a:r>
+            <a:endParaRPr lang="en-US" sz="720" dirty="0"/>
+          </a:p>
+        </p:txBody>
+      </p:sp>
+      <p:sp>
+        <p:nvSpPr>
+          <p:cNvPr id="147" name="Text 144"/>
+          <p:cNvSpPr/>
+          <p:nvPr/>
+        </p:nvSpPr>
+        <p:spPr>
+          <a:xfrm>
+            <a:off x="5504440" y="3223022"/>
+            <a:ext cx="454042" cy="104775"/>
+          </a:xfrm>
+          <a:prstGeom prst="rect">
+            <a:avLst/>
+          </a:prstGeom>
+          <a:noFill/>
+          <a:ln/>
+        </p:spPr>
+        <p:txBody>
+          <a:bodyPr wrap="square" lIns="0" tIns="114300" rIns="114300" bIns="0" rtlCol="0" anchor="ctr"/>
+          <a:lstStyle/>
+          <a:p>
+            <a:pPr algn="r" indent="0" marL="0">
+              <a:buNone/>
+            </a:pPr>
+            <a:r>
+              <a:rPr lang="en-US" sz="720" dirty="0">
+                <a:solidFill>
+                  <a:srgbClr val="333333"/>
+                </a:solidFill>
+                <a:latin typeface="Raleway" pitchFamily="34" charset="0"/>
+                <a:ea typeface="Raleway" pitchFamily="34" charset="-122"/>
+                <a:cs typeface="Raleway" pitchFamily="34" charset="-120"/>
+              </a:rPr>
+              <a:t>1</a:t>
+            </a:r>
+            <a:endParaRPr lang="en-US" sz="720" dirty="0"/>
+          </a:p>
+        </p:txBody>
+      </p:sp>
+      <p:sp>
+        <p:nvSpPr>
+          <p:cNvPr id="148" name="Text 145"/>
+          <p:cNvSpPr/>
+          <p:nvPr/>
+        </p:nvSpPr>
+        <p:spPr>
+          <a:xfrm>
+            <a:off x="5504440" y="3470672"/>
+            <a:ext cx="454042" cy="104775"/>
+          </a:xfrm>
+          <a:prstGeom prst="rect">
+            <a:avLst/>
+          </a:prstGeom>
+          <a:noFill/>
+          <a:ln/>
+        </p:spPr>
+        <p:txBody>
+          <a:bodyPr wrap="square" lIns="0" tIns="114300" rIns="114300" bIns="0" rtlCol="0" anchor="ctr"/>
+          <a:lstStyle/>
+          <a:p>
+            <a:pPr algn="r" indent="0" marL="0">
+              <a:buNone/>
+            </a:pPr>
+            <a:r>
+              <a:rPr lang="en-US" sz="720" dirty="0">
+                <a:solidFill>
+                  <a:srgbClr val="333333"/>
+                </a:solidFill>
+                <a:latin typeface="Raleway" pitchFamily="34" charset="0"/>
+                <a:ea typeface="Raleway" pitchFamily="34" charset="-122"/>
+                <a:cs typeface="Raleway" pitchFamily="34" charset="-120"/>
+              </a:rPr>
+              <a:t>1</a:t>
+            </a:r>
+            <a:endParaRPr lang="en-US" sz="720" dirty="0"/>
+          </a:p>
+        </p:txBody>
+      </p:sp>
+      <p:sp>
+        <p:nvSpPr>
+          <p:cNvPr id="149" name="Text 146"/>
+          <p:cNvSpPr/>
+          <p:nvPr/>
+        </p:nvSpPr>
+        <p:spPr>
+          <a:xfrm>
+            <a:off x="5945258" y="3470672"/>
+            <a:ext cx="454042" cy="104775"/>
+          </a:xfrm>
+          <a:prstGeom prst="rect">
+            <a:avLst/>
+          </a:prstGeom>
+          <a:noFill/>
+          <a:ln/>
+        </p:spPr>
+        <p:txBody>
+          <a:bodyPr wrap="square" lIns="0" tIns="114300" rIns="114300" bIns="0" rtlCol="0" anchor="ctr"/>
+          <a:lstStyle/>
+          <a:p>
+            <a:pPr algn="r" indent="0" marL="0">
+              <a:buNone/>
+            </a:pPr>
+            <a:r>
+              <a:rPr lang="en-US" sz="720" dirty="0">
+                <a:solidFill>
+                  <a:srgbClr val="333333"/>
+                </a:solidFill>
+                <a:latin typeface="Raleway" pitchFamily="34" charset="0"/>
+                <a:ea typeface="Raleway" pitchFamily="34" charset="-122"/>
+                <a:cs typeface="Raleway" pitchFamily="34" charset="-120"/>
+              </a:rPr>
+              <a:t>0</a:t>
+            </a:r>
+            <a:endParaRPr lang="en-US" sz="720" dirty="0"/>
+          </a:p>
+        </p:txBody>
+      </p:sp>
+      <p:sp>
+        <p:nvSpPr>
+          <p:cNvPr id="150" name="Text 147"/>
+          <p:cNvSpPr/>
+          <p:nvPr/>
+        </p:nvSpPr>
+        <p:spPr>
+          <a:xfrm>
+            <a:off x="5504440" y="3718322"/>
+            <a:ext cx="454042" cy="104775"/>
+          </a:xfrm>
+          <a:prstGeom prst="rect">
+            <a:avLst/>
+          </a:prstGeom>
+          <a:noFill/>
+          <a:ln/>
+        </p:spPr>
+        <p:txBody>
+          <a:bodyPr wrap="square" lIns="0" tIns="114300" rIns="114300" bIns="0" rtlCol="0" anchor="ctr"/>
+          <a:lstStyle/>
+          <a:p>
+            <a:pPr algn="r" indent="0" marL="0">
+              <a:buNone/>
+            </a:pPr>
+            <a:r>
+              <a:rPr lang="en-US" sz="720" dirty="0">
+                <a:solidFill>
+                  <a:srgbClr val="333333"/>
+                </a:solidFill>
+                <a:latin typeface="Raleway" pitchFamily="34" charset="0"/>
+                <a:ea typeface="Raleway" pitchFamily="34" charset="-122"/>
+                <a:cs typeface="Raleway" pitchFamily="34" charset="-120"/>
+              </a:rPr>
+              <a:t>1</a:t>
+            </a:r>
+            <a:endParaRPr lang="en-US" sz="720" dirty="0"/>
+          </a:p>
+        </p:txBody>
+      </p:sp>
+      <p:sp>
+        <p:nvSpPr>
+          <p:cNvPr id="151" name="Text 148"/>
+          <p:cNvSpPr/>
+          <p:nvPr/>
+        </p:nvSpPr>
+        <p:spPr>
+          <a:xfrm>
+            <a:off x="5945258" y="3718322"/>
+            <a:ext cx="454042" cy="104775"/>
+          </a:xfrm>
+          <a:prstGeom prst="rect">
+            <a:avLst/>
+          </a:prstGeom>
+          <a:noFill/>
+          <a:ln/>
+        </p:spPr>
+        <p:txBody>
+          <a:bodyPr wrap="square" lIns="0" tIns="114300" rIns="114300" bIns="0" rtlCol="0" anchor="ctr"/>
+          <a:lstStyle/>
+          <a:p>
+            <a:pPr algn="r" indent="0" marL="0">
+              <a:buNone/>
+            </a:pPr>
+            <a:r>
+              <a:rPr lang="en-US" sz="720" dirty="0">
+                <a:solidFill>
+                  <a:srgbClr val="333333"/>
+                </a:solidFill>
+                <a:latin typeface="Raleway" pitchFamily="34" charset="0"/>
+                <a:ea typeface="Raleway" pitchFamily="34" charset="-122"/>
+                <a:cs typeface="Raleway" pitchFamily="34" charset="-120"/>
+              </a:rPr>
+              <a:t>0</a:t>
+            </a:r>
+            <a:endParaRPr lang="en-US" sz="720" dirty="0"/>
+          </a:p>
+        </p:txBody>
+      </p:sp>
+      <p:sp>
+        <p:nvSpPr>
+          <p:cNvPr id="152" name="Text 149"/>
+          <p:cNvSpPr/>
+          <p:nvPr/>
+        </p:nvSpPr>
+        <p:spPr>
+          <a:xfrm>
+            <a:off x="5504440" y="3965972"/>
+            <a:ext cx="454042" cy="104775"/>
+          </a:xfrm>
+          <a:prstGeom prst="rect">
+            <a:avLst/>
+          </a:prstGeom>
+          <a:noFill/>
+          <a:ln/>
+        </p:spPr>
+        <p:txBody>
+          <a:bodyPr wrap="square" lIns="0" tIns="114300" rIns="114300" bIns="0" rtlCol="0" anchor="ctr"/>
+          <a:lstStyle/>
+          <a:p>
+            <a:pPr algn="r" indent="0" marL="0">
+              <a:buNone/>
+            </a:pPr>
+            <a:r>
+              <a:rPr lang="en-US" sz="720" dirty="0">
+                <a:solidFill>
+                  <a:srgbClr val="333333"/>
+                </a:solidFill>
+                <a:latin typeface="Raleway" pitchFamily="34" charset="0"/>
+                <a:ea typeface="Raleway" pitchFamily="34" charset="-122"/>
+                <a:cs typeface="Raleway" pitchFamily="34" charset="-120"/>
+              </a:rPr>
+              <a:t>0</a:t>
+            </a:r>
+            <a:endParaRPr lang="en-US" sz="720" dirty="0"/>
+          </a:p>
+        </p:txBody>
+      </p:sp>
+      <p:sp>
+        <p:nvSpPr>
+          <p:cNvPr id="153" name="Text 150"/>
+          <p:cNvSpPr/>
+          <p:nvPr/>
+        </p:nvSpPr>
+        <p:spPr>
+          <a:xfrm>
+            <a:off x="5945258" y="3965972"/>
+            <a:ext cx="454042" cy="104775"/>
+          </a:xfrm>
+          <a:prstGeom prst="rect">
+            <a:avLst/>
+          </a:prstGeom>
+          <a:noFill/>
+          <a:ln/>
+        </p:spPr>
+        <p:txBody>
+          <a:bodyPr wrap="square" lIns="0" tIns="114300" rIns="114300" bIns="0" rtlCol="0" anchor="ctr"/>
+          <a:lstStyle/>
+          <a:p>
+            <a:pPr algn="r" indent="0" marL="0">
+              <a:buNone/>
+            </a:pPr>
+            <a:r>
+              <a:rPr lang="en-US" sz="720" dirty="0">
+                <a:solidFill>
+                  <a:srgbClr val="333333"/>
+                </a:solidFill>
+                <a:latin typeface="Raleway" pitchFamily="34" charset="0"/>
+                <a:ea typeface="Raleway" pitchFamily="34" charset="-122"/>
+                <a:cs typeface="Raleway" pitchFamily="34" charset="-120"/>
+              </a:rPr>
+              <a:t>8</a:t>
+            </a:r>
+            <a:endParaRPr lang="en-US" sz="720" dirty="0"/>
+          </a:p>
+        </p:txBody>
+      </p:sp>
+      <p:sp>
+        <p:nvSpPr>
+          <p:cNvPr id="154" name="Text 151"/>
+          <p:cNvSpPr/>
+          <p:nvPr/>
+        </p:nvSpPr>
+        <p:spPr>
+          <a:xfrm>
+            <a:off x="5504440" y="4213622"/>
+            <a:ext cx="454042" cy="104775"/>
+          </a:xfrm>
+          <a:prstGeom prst="rect">
+            <a:avLst/>
+          </a:prstGeom>
+          <a:noFill/>
+          <a:ln/>
+        </p:spPr>
+        <p:txBody>
+          <a:bodyPr wrap="square" lIns="0" tIns="114300" rIns="114300" bIns="0" rtlCol="0" anchor="ctr"/>
+          <a:lstStyle/>
+          <a:p>
+            <a:pPr algn="r" indent="0" marL="0">
+              <a:buNone/>
+            </a:pPr>
+            <a:r>
+              <a:rPr lang="en-US" sz="720" dirty="0">
+                <a:solidFill>
+                  <a:srgbClr val="333333"/>
+                </a:solidFill>
+                <a:latin typeface="Raleway" pitchFamily="34" charset="0"/>
+                <a:ea typeface="Raleway" pitchFamily="34" charset="-122"/>
+                <a:cs typeface="Raleway" pitchFamily="34" charset="-120"/>
+              </a:rPr>
+              <a:t>0</a:t>
+            </a:r>
+            <a:endParaRPr lang="en-US" sz="720" dirty="0"/>
+          </a:p>
+        </p:txBody>
+      </p:sp>
+      <p:sp>
+        <p:nvSpPr>
+          <p:cNvPr id="155" name="Text 152"/>
+          <p:cNvSpPr/>
+          <p:nvPr/>
+        </p:nvSpPr>
+        <p:spPr>
+          <a:xfrm>
+            <a:off x="5945258" y="4213622"/>
+            <a:ext cx="454042" cy="104775"/>
+          </a:xfrm>
+          <a:prstGeom prst="rect">
+            <a:avLst/>
+          </a:prstGeom>
+          <a:noFill/>
+          <a:ln/>
+        </p:spPr>
+        <p:txBody>
+          <a:bodyPr wrap="square" lIns="0" tIns="114300" rIns="114300" bIns="0" rtlCol="0" anchor="ctr"/>
+          <a:lstStyle/>
+          <a:p>
+            <a:pPr algn="r" indent="0" marL="0">
+              <a:buNone/>
+            </a:pPr>
+            <a:r>
+              <a:rPr lang="en-US" sz="720" dirty="0">
+                <a:solidFill>
+                  <a:srgbClr val="333333"/>
+                </a:solidFill>
+                <a:latin typeface="Raleway" pitchFamily="34" charset="0"/>
+                <a:ea typeface="Raleway" pitchFamily="34" charset="-122"/>
+                <a:cs typeface="Raleway" pitchFamily="34" charset="-120"/>
+              </a:rPr>
+              <a:t>5</a:t>
+            </a:r>
+            <a:endParaRPr lang="en-US" sz="720" dirty="0"/>
+          </a:p>
+        </p:txBody>
+      </p:sp>
+      <p:sp>
+        <p:nvSpPr>
+          <p:cNvPr id="156" name="Text 153"/>
+          <p:cNvSpPr/>
+          <p:nvPr/>
+        </p:nvSpPr>
+        <p:spPr>
+          <a:xfrm>
+            <a:off x="9863727" y="1524000"/>
+            <a:ext cx="804155" cy="104775"/>
+          </a:xfrm>
+          <a:prstGeom prst="rect">
+            <a:avLst/>
+          </a:prstGeom>
+          <a:noFill/>
+          <a:ln/>
+        </p:spPr>
+        <p:txBody>
+          <a:bodyPr wrap="square" lIns="0" tIns="114300" rIns="114300" bIns="0" rtlCol="0" anchor="ctr"/>
+          <a:lstStyle/>
+          <a:p>
+            <a:pPr algn="r" indent="0" marL="0">
+              <a:buNone/>
+            </a:pPr>
+            <a:r>
+              <a:rPr lang="en-US" sz="720" b="1" dirty="0">
+                <a:solidFill>
+                  <a:srgbClr val="333333"/>
+                </a:solidFill>
+                <a:latin typeface="Raleway" pitchFamily="34" charset="0"/>
+                <a:ea typeface="Raleway" pitchFamily="34" charset="-122"/>
+                <a:cs typeface="Raleway" pitchFamily="34" charset="-120"/>
+              </a:rPr>
+              <a:t>9</a:t>
+            </a:r>
+            <a:endParaRPr lang="en-US" sz="720" dirty="0"/>
+          </a:p>
+        </p:txBody>
+      </p:sp>
+      <p:sp>
+        <p:nvSpPr>
+          <p:cNvPr id="157" name="Text 154"/>
+          <p:cNvSpPr/>
+          <p:nvPr/>
+        </p:nvSpPr>
+        <p:spPr>
+          <a:xfrm>
+            <a:off x="9863727" y="1771650"/>
+            <a:ext cx="804155" cy="104775"/>
+          </a:xfrm>
+          <a:prstGeom prst="rect">
+            <a:avLst/>
+          </a:prstGeom>
+          <a:noFill/>
+          <a:ln/>
+        </p:spPr>
+        <p:txBody>
+          <a:bodyPr wrap="square" lIns="0" tIns="114300" rIns="114300" bIns="0" rtlCol="0" anchor="ctr"/>
+          <a:lstStyle/>
+          <a:p>
+            <a:pPr algn="r" indent="0" marL="0">
+              <a:buNone/>
+            </a:pPr>
+            <a:r>
+              <a:rPr lang="en-US" sz="720" b="1" dirty="0">
+                <a:solidFill>
+                  <a:srgbClr val="333333"/>
+                </a:solidFill>
+                <a:latin typeface="Raleway" pitchFamily="34" charset="0"/>
+                <a:ea typeface="Raleway" pitchFamily="34" charset="-122"/>
+                <a:cs typeface="Raleway" pitchFamily="34" charset="-120"/>
+              </a:rPr>
+              <a:t>3</a:t>
+            </a:r>
+            <a:endParaRPr lang="en-US" sz="720" dirty="0"/>
+          </a:p>
+        </p:txBody>
+      </p:sp>
+      <p:sp>
+        <p:nvSpPr>
+          <p:cNvPr id="158" name="Text 155"/>
+          <p:cNvSpPr/>
+          <p:nvPr/>
+        </p:nvSpPr>
+        <p:spPr>
+          <a:xfrm>
+            <a:off x="9863727" y="2019300"/>
+            <a:ext cx="804155" cy="104775"/>
+          </a:xfrm>
+          <a:prstGeom prst="rect">
+            <a:avLst/>
+          </a:prstGeom>
+          <a:noFill/>
+          <a:ln/>
+        </p:spPr>
+        <p:txBody>
+          <a:bodyPr wrap="square" lIns="0" tIns="114300" rIns="114300" bIns="0" rtlCol="0" anchor="ctr"/>
+          <a:lstStyle/>
+          <a:p>
+            <a:pPr algn="r" indent="0" marL="0">
+              <a:buNone/>
+            </a:pPr>
+            <a:r>
+              <a:rPr lang="en-US" sz="720" b="1" dirty="0">
+                <a:solidFill>
+                  <a:srgbClr val="333333"/>
+                </a:solidFill>
+                <a:latin typeface="Raleway" pitchFamily="34" charset="0"/>
+                <a:ea typeface="Raleway" pitchFamily="34" charset="-122"/>
+                <a:cs typeface="Raleway" pitchFamily="34" charset="-120"/>
+              </a:rPr>
+              <a:t>8</a:t>
+            </a:r>
+            <a:endParaRPr lang="en-US" sz="720" dirty="0"/>
+          </a:p>
+        </p:txBody>
+      </p:sp>
+      <p:sp>
+        <p:nvSpPr>
+          <p:cNvPr id="159" name="Text 156"/>
+          <p:cNvSpPr/>
+          <p:nvPr/>
+        </p:nvSpPr>
+        <p:spPr>
+          <a:xfrm>
+            <a:off x="9863727" y="2266950"/>
+            <a:ext cx="804155" cy="104775"/>
+          </a:xfrm>
+          <a:prstGeom prst="rect">
+            <a:avLst/>
+          </a:prstGeom>
+          <a:noFill/>
+          <a:ln/>
+        </p:spPr>
+        <p:txBody>
+          <a:bodyPr wrap="square" lIns="0" tIns="114300" rIns="114300" bIns="0" rtlCol="0" anchor="ctr"/>
+          <a:lstStyle/>
+          <a:p>
+            <a:pPr algn="r" indent="0" marL="0">
+              <a:buNone/>
+            </a:pPr>
+            <a:r>
+              <a:rPr lang="en-US" sz="720" b="1" dirty="0">
+                <a:solidFill>
+                  <a:srgbClr val="333333"/>
+                </a:solidFill>
+                <a:latin typeface="Raleway" pitchFamily="34" charset="0"/>
+                <a:ea typeface="Raleway" pitchFamily="34" charset="-122"/>
+                <a:cs typeface="Raleway" pitchFamily="34" charset="-120"/>
+              </a:rPr>
+              <a:t>6</a:t>
+            </a:r>
+            <a:endParaRPr lang="en-US" sz="720" dirty="0"/>
+          </a:p>
+        </p:txBody>
+      </p:sp>
+      <p:sp>
+        <p:nvSpPr>
+          <p:cNvPr id="160" name="Text 157"/>
+          <p:cNvSpPr/>
+          <p:nvPr/>
+        </p:nvSpPr>
+        <p:spPr>
+          <a:xfrm>
+            <a:off x="9863727" y="2514600"/>
+            <a:ext cx="804155" cy="104775"/>
+          </a:xfrm>
+          <a:prstGeom prst="rect">
+            <a:avLst/>
+          </a:prstGeom>
+          <a:noFill/>
+          <a:ln/>
+        </p:spPr>
+        <p:txBody>
+          <a:bodyPr wrap="square" lIns="0" tIns="114300" rIns="114300" bIns="0" rtlCol="0" anchor="ctr"/>
+          <a:lstStyle/>
+          <a:p>
+            <a:pPr algn="r" indent="0" marL="0">
+              <a:buNone/>
+            </a:pPr>
+            <a:r>
+              <a:rPr lang="en-US" sz="720" b="1" dirty="0">
+                <a:solidFill>
+                  <a:srgbClr val="333333"/>
+                </a:solidFill>
+                <a:latin typeface="Raleway" pitchFamily="34" charset="0"/>
+                <a:ea typeface="Raleway" pitchFamily="34" charset="-122"/>
+                <a:cs typeface="Raleway" pitchFamily="34" charset="-120"/>
+              </a:rPr>
+              <a:t>4</a:t>
+            </a:r>
+            <a:endParaRPr lang="en-US" sz="720" dirty="0"/>
+          </a:p>
+        </p:txBody>
+      </p:sp>
+      <p:sp>
+        <p:nvSpPr>
+          <p:cNvPr id="161" name="Text 158"/>
+          <p:cNvSpPr/>
+          <p:nvPr/>
+        </p:nvSpPr>
+        <p:spPr>
+          <a:xfrm>
+            <a:off x="9863727" y="2762250"/>
+            <a:ext cx="804155" cy="104775"/>
+          </a:xfrm>
+          <a:prstGeom prst="rect">
+            <a:avLst/>
+          </a:prstGeom>
+          <a:noFill/>
+          <a:ln/>
+        </p:spPr>
+        <p:txBody>
+          <a:bodyPr wrap="square" lIns="0" tIns="114300" rIns="114300" bIns="0" rtlCol="0" anchor="ctr"/>
+          <a:lstStyle/>
+          <a:p>
+            <a:pPr algn="r" indent="0" marL="0">
+              <a:buNone/>
+            </a:pPr>
+            <a:r>
+              <a:rPr lang="en-US" sz="720" b="1" dirty="0">
+                <a:solidFill>
+                  <a:srgbClr val="333333"/>
+                </a:solidFill>
+                <a:latin typeface="Raleway" pitchFamily="34" charset="0"/>
+                <a:ea typeface="Raleway" pitchFamily="34" charset="-122"/>
+                <a:cs typeface="Raleway" pitchFamily="34" charset="-120"/>
+              </a:rPr>
+              <a:t>4</a:t>
+            </a:r>
+            <a:endParaRPr lang="en-US" sz="720" dirty="0"/>
+          </a:p>
+        </p:txBody>
+      </p:sp>
+      <p:sp>
+        <p:nvSpPr>
+          <p:cNvPr id="162" name="Text 159"/>
+          <p:cNvSpPr/>
+          <p:nvPr/>
+        </p:nvSpPr>
+        <p:spPr>
+          <a:xfrm>
+            <a:off x="9863727" y="3009900"/>
+            <a:ext cx="804155" cy="104775"/>
+          </a:xfrm>
+          <a:prstGeom prst="rect">
+            <a:avLst/>
+          </a:prstGeom>
+          <a:noFill/>
+          <a:ln/>
+        </p:spPr>
+        <p:txBody>
+          <a:bodyPr wrap="square" lIns="0" tIns="114300" rIns="114300" bIns="0" rtlCol="0" anchor="ctr"/>
+          <a:lstStyle/>
+          <a:p>
+            <a:pPr algn="r" indent="0" marL="0">
+              <a:buNone/>
+            </a:pPr>
+            <a:r>
+              <a:rPr lang="en-US" sz="720" b="1" dirty="0">
+                <a:solidFill>
+                  <a:srgbClr val="120180"/>
+                </a:solidFill>
+                <a:latin typeface="Raleway" pitchFamily="34" charset="0"/>
+                <a:ea typeface="Raleway" pitchFamily="34" charset="-122"/>
+                <a:cs typeface="Raleway" pitchFamily="34" charset="-120"/>
+              </a:rPr>
+              <a:t>6</a:t>
+            </a:r>
+            <a:endParaRPr lang="en-US" sz="720" dirty="0"/>
+          </a:p>
+        </p:txBody>
+      </p:sp>
+      <p:sp>
+        <p:nvSpPr>
+          <p:cNvPr id="163" name="Text 160"/>
+          <p:cNvSpPr/>
+          <p:nvPr/>
+        </p:nvSpPr>
+        <p:spPr>
+          <a:xfrm>
+            <a:off x="10997717" y="3943350"/>
+            <a:ext cx="489146" cy="95250"/>
+          </a:xfrm>
+          <a:prstGeom prst="rect">
+            <a:avLst/>
+          </a:prstGeom>
+          <a:noFill/>
+          <a:ln/>
+        </p:spPr>
+        <p:txBody>
+          <a:bodyPr wrap="square" lIns="0" tIns="114300" rIns="114300" bIns="0" rtlCol="0" anchor="ctr"/>
+          <a:lstStyle/>
+          <a:p>
+            <a:pPr algn="r" indent="0" marL="0">
+              <a:buNone/>
+            </a:pPr>
+            <a:r>
+              <a:rPr lang="en-US" sz="672" dirty="0">
+                <a:solidFill>
+                  <a:srgbClr val="00CD93"/>
+                </a:solidFill>
+                <a:latin typeface="Raleway" pitchFamily="34" charset="0"/>
+                <a:ea typeface="Raleway" pitchFamily="34" charset="-122"/>
+                <a:cs typeface="Raleway" pitchFamily="34" charset="-120"/>
+              </a:rPr>
+              <a:t>7</a:t>
+            </a:r>
+            <a:endParaRPr lang="en-US" sz="672" dirty="0"/>
+          </a:p>
+        </p:txBody>
+      </p:sp>
+      <p:sp>
+        <p:nvSpPr>
+          <p:cNvPr id="164" name="Text 161"/>
+          <p:cNvSpPr/>
+          <p:nvPr/>
+        </p:nvSpPr>
+        <p:spPr>
+          <a:xfrm>
+            <a:off x="10997717" y="4124325"/>
+            <a:ext cx="489146" cy="95250"/>
+          </a:xfrm>
+          <a:prstGeom prst="rect">
+            <a:avLst/>
+          </a:prstGeom>
+          <a:noFill/>
+          <a:ln/>
+        </p:spPr>
+        <p:txBody>
+          <a:bodyPr wrap="square" lIns="0" tIns="114300" rIns="114300" bIns="0" rtlCol="0" anchor="ctr"/>
+          <a:lstStyle/>
+          <a:p>
+            <a:pPr algn="r" indent="0" marL="0">
+              <a:buNone/>
+            </a:pPr>
+            <a:r>
+              <a:rPr lang="en-US" sz="672" dirty="0">
+                <a:solidFill>
+                  <a:srgbClr val="00CD93"/>
+                </a:solidFill>
+                <a:latin typeface="Raleway" pitchFamily="34" charset="0"/>
+                <a:ea typeface="Raleway" pitchFamily="34" charset="-122"/>
+                <a:cs typeface="Raleway" pitchFamily="34" charset="-120"/>
+              </a:rPr>
+              <a:t>7</a:t>
+            </a:r>
+            <a:endParaRPr lang="en-US" sz="672" dirty="0"/>
+          </a:p>
+        </p:txBody>
+      </p:sp>
+      <p:sp>
+        <p:nvSpPr>
+          <p:cNvPr id="165" name="Text 162"/>
+          <p:cNvSpPr/>
+          <p:nvPr/>
+        </p:nvSpPr>
+        <p:spPr>
+          <a:xfrm>
+            <a:off x="10997717" y="4305300"/>
+            <a:ext cx="489146" cy="95250"/>
+          </a:xfrm>
+          <a:prstGeom prst="rect">
+            <a:avLst/>
+          </a:prstGeom>
+          <a:noFill/>
+          <a:ln/>
+        </p:spPr>
+        <p:txBody>
+          <a:bodyPr wrap="square" lIns="0" tIns="114300" rIns="114300" bIns="0" rtlCol="0" anchor="ctr"/>
+          <a:lstStyle/>
+          <a:p>
+            <a:pPr algn="r" indent="0" marL="0">
+              <a:buNone/>
+            </a:pPr>
+            <a:r>
+              <a:rPr lang="en-US" sz="672" dirty="0">
+                <a:solidFill>
+                  <a:srgbClr val="00CD93"/>
+                </a:solidFill>
+                <a:latin typeface="Raleway" pitchFamily="34" charset="0"/>
+                <a:ea typeface="Raleway" pitchFamily="34" charset="-122"/>
+                <a:cs typeface="Raleway" pitchFamily="34" charset="-120"/>
+              </a:rPr>
+              <a:t>4</a:t>
+            </a:r>
+            <a:endParaRPr lang="en-US" sz="672" dirty="0"/>
+          </a:p>
+        </p:txBody>
+      </p:sp>
+      <p:sp>
+        <p:nvSpPr>
+          <p:cNvPr id="166" name="Text 163"/>
+          <p:cNvSpPr/>
+          <p:nvPr/>
+        </p:nvSpPr>
+        <p:spPr>
+          <a:xfrm>
+            <a:off x="10997717" y="4486275"/>
+            <a:ext cx="489146" cy="95250"/>
+          </a:xfrm>
+          <a:prstGeom prst="rect">
+            <a:avLst/>
+          </a:prstGeom>
+          <a:noFill/>
+          <a:ln/>
+        </p:spPr>
+        <p:txBody>
+          <a:bodyPr wrap="square" lIns="0" tIns="114300" rIns="114300" bIns="0" rtlCol="0" anchor="ctr"/>
+          <a:lstStyle/>
+          <a:p>
+            <a:pPr algn="r" indent="0" marL="0">
+              <a:buNone/>
+            </a:pPr>
+            <a:r>
+              <a:rPr lang="en-US" sz="672" dirty="0">
+                <a:solidFill>
+                  <a:srgbClr val="00CD93"/>
+                </a:solidFill>
+                <a:latin typeface="Raleway" pitchFamily="34" charset="0"/>
+                <a:ea typeface="Raleway" pitchFamily="34" charset="-122"/>
+                <a:cs typeface="Raleway" pitchFamily="34" charset="-120"/>
+              </a:rPr>
+              <a:t>4</a:t>
+            </a:r>
+            <a:endParaRPr lang="en-US" sz="672" dirty="0"/>
+          </a:p>
+        </p:txBody>
+      </p:sp>
+      <p:sp>
+        <p:nvSpPr>
+          <p:cNvPr id="167" name="Text 164"/>
+          <p:cNvSpPr/>
+          <p:nvPr/>
+        </p:nvSpPr>
+        <p:spPr>
+          <a:xfrm>
+            <a:off x="10997717" y="4667250"/>
+            <a:ext cx="489146" cy="95250"/>
+          </a:xfrm>
+          <a:prstGeom prst="rect">
+            <a:avLst/>
+          </a:prstGeom>
+          <a:noFill/>
+          <a:ln/>
+        </p:spPr>
+        <p:txBody>
+          <a:bodyPr wrap="square" lIns="0" tIns="114300" rIns="114300" bIns="0" rtlCol="0" anchor="ctr"/>
+          <a:lstStyle/>
+          <a:p>
+            <a:pPr algn="r" indent="0" marL="0">
+              <a:buNone/>
+            </a:pPr>
+            <a:r>
+              <a:rPr lang="en-US" sz="672" dirty="0">
+                <a:solidFill>
+                  <a:srgbClr val="00CD93"/>
+                </a:solidFill>
+                <a:latin typeface="Raleway" pitchFamily="34" charset="0"/>
+                <a:ea typeface="Raleway" pitchFamily="34" charset="-122"/>
+                <a:cs typeface="Raleway" pitchFamily="34" charset="-120"/>
+              </a:rPr>
+              <a:t>2</a:t>
             </a:r>
             <a:endParaRPr lang="en-US" sz="672" dirty="0"/>
           </a:p>
@@ -8820,17 +10380,17 @@
         </p:nvSpPr>
         <p:spPr>
           <a:xfrm>
-            <a:off x="4260697" y="1982116"/>
-            <a:ext cx="837878" cy="228600"/>
-          </a:xfrm>
-          <a:prstGeom prst="rect">
-            <a:avLst/>
-          </a:prstGeom>
-          <a:noFill/>
-          <a:ln/>
-        </p:spPr>
-        <p:txBody>
-          <a:bodyPr wrap="square" lIns="47625" tIns="114300" rIns="114300" bIns="47625" rtlCol="0" anchor="ctr"/>
+            <a:off x="4260697" y="2044005"/>
+            <a:ext cx="837878" cy="133350"/>
+          </a:xfrm>
+          <a:prstGeom prst="rect">
+            <a:avLst/>
+          </a:prstGeom>
+          <a:noFill/>
+          <a:ln/>
+        </p:spPr>
+        <p:txBody>
+          <a:bodyPr wrap="square" lIns="0" tIns="114300" rIns="114300" bIns="0" rtlCol="0" anchor="ctr"/>
           <a:lstStyle/>
           <a:p>
             <a:pPr algn="r" indent="0" marL="0">
@@ -8859,17 +10419,17 @@
         </p:nvSpPr>
         <p:spPr>
           <a:xfrm>
-            <a:off x="9832683" y="1982116"/>
-            <a:ext cx="837878" cy="228600"/>
-          </a:xfrm>
-          <a:prstGeom prst="rect">
-            <a:avLst/>
-          </a:prstGeom>
-          <a:noFill/>
-          <a:ln/>
-        </p:spPr>
-        <p:txBody>
-          <a:bodyPr wrap="square" lIns="47625" tIns="114300" rIns="114300" bIns="47625" rtlCol="0" anchor="ctr"/>
+            <a:off x="9832683" y="2044005"/>
+            <a:ext cx="837878" cy="133350"/>
+          </a:xfrm>
+          <a:prstGeom prst="rect">
+            <a:avLst/>
+          </a:prstGeom>
+          <a:noFill/>
+          <a:ln/>
+        </p:spPr>
+        <p:txBody>
+          <a:bodyPr wrap="square" lIns="0" tIns="114300" rIns="114300" bIns="0" rtlCol="0" anchor="ctr"/>
           <a:lstStyle/>
           <a:p>
             <a:pPr algn="r" indent="0" marL="0">
@@ -8898,17 +10458,17 @@
         </p:nvSpPr>
         <p:spPr>
           <a:xfrm>
-            <a:off x="1896428" y="1982116"/>
-            <a:ext cx="839411" cy="228600"/>
-          </a:xfrm>
-          <a:prstGeom prst="rect">
-            <a:avLst/>
-          </a:prstGeom>
-          <a:noFill/>
-          <a:ln/>
-        </p:spPr>
-        <p:txBody>
-          <a:bodyPr wrap="square" lIns="47625" tIns="114300" rIns="114300" bIns="47625" rtlCol="0" anchor="ctr"/>
+            <a:off x="1896428" y="2044005"/>
+            <a:ext cx="839411" cy="133350"/>
+          </a:xfrm>
+          <a:prstGeom prst="rect">
+            <a:avLst/>
+          </a:prstGeom>
+          <a:noFill/>
+          <a:ln/>
+        </p:spPr>
+        <p:txBody>
+          <a:bodyPr wrap="square" lIns="0" tIns="114300" rIns="114300" bIns="0" rtlCol="0" anchor="ctr"/>
           <a:lstStyle/>
           <a:p>
             <a:pPr algn="r" indent="0" marL="0">
@@ -8937,17 +10497,17 @@
         </p:nvSpPr>
         <p:spPr>
           <a:xfrm>
-            <a:off x="3413192" y="1982116"/>
-            <a:ext cx="871909" cy="228600"/>
-          </a:xfrm>
-          <a:prstGeom prst="rect">
-            <a:avLst/>
-          </a:prstGeom>
-          <a:noFill/>
-          <a:ln/>
-        </p:spPr>
-        <p:txBody>
-          <a:bodyPr wrap="square" lIns="47625" tIns="114300" rIns="114300" bIns="47625" rtlCol="0" anchor="ctr"/>
+            <a:off x="3413192" y="2044005"/>
+            <a:ext cx="871909" cy="133350"/>
+          </a:xfrm>
+          <a:prstGeom prst="rect">
+            <a:avLst/>
+          </a:prstGeom>
+          <a:noFill/>
+          <a:ln/>
+        </p:spPr>
+        <p:txBody>
+          <a:bodyPr wrap="square" lIns="0" tIns="114300" rIns="114300" bIns="0" rtlCol="0" anchor="ctr"/>
           <a:lstStyle/>
           <a:p>
             <a:pPr algn="r" indent="0" marL="0">
@@ -8976,17 +10536,17 @@
         </p:nvSpPr>
         <p:spPr>
           <a:xfrm>
-            <a:off x="5073515" y="1982116"/>
-            <a:ext cx="860412" cy="228600"/>
-          </a:xfrm>
-          <a:prstGeom prst="rect">
-            <a:avLst/>
-          </a:prstGeom>
-          <a:noFill/>
-          <a:ln/>
-        </p:spPr>
-        <p:txBody>
-          <a:bodyPr wrap="square" lIns="47625" tIns="114300" rIns="114300" bIns="47625" rtlCol="0" anchor="ctr"/>
+            <a:off x="5073515" y="2044005"/>
+            <a:ext cx="860412" cy="133350"/>
+          </a:xfrm>
+          <a:prstGeom prst="rect">
+            <a:avLst/>
+          </a:prstGeom>
+          <a:noFill/>
+          <a:ln/>
+        </p:spPr>
+        <p:txBody>
+          <a:bodyPr wrap="square" lIns="0" tIns="114300" rIns="114300" bIns="0" rtlCol="0" anchor="ctr"/>
           <a:lstStyle/>
           <a:p>
             <a:pPr algn="r" indent="0" marL="0">
@@ -9015,17 +10575,17 @@
         </p:nvSpPr>
         <p:spPr>
           <a:xfrm>
-            <a:off x="7468413" y="1982116"/>
-            <a:ext cx="839411" cy="228600"/>
-          </a:xfrm>
-          <a:prstGeom prst="rect">
-            <a:avLst/>
-          </a:prstGeom>
-          <a:noFill/>
-          <a:ln/>
-        </p:spPr>
-        <p:txBody>
-          <a:bodyPr wrap="square" lIns="47625" tIns="114300" rIns="114300" bIns="47625" rtlCol="0" anchor="ctr"/>
+            <a:off x="7468413" y="2044005"/>
+            <a:ext cx="839411" cy="133350"/>
+          </a:xfrm>
+          <a:prstGeom prst="rect">
+            <a:avLst/>
+          </a:prstGeom>
+          <a:noFill/>
+          <a:ln/>
+        </p:spPr>
+        <p:txBody>
+          <a:bodyPr wrap="square" lIns="0" tIns="114300" rIns="114300" bIns="0" rtlCol="0" anchor="ctr"/>
           <a:lstStyle/>
           <a:p>
             <a:pPr algn="r" indent="0" marL="0">
@@ -9054,17 +10614,17 @@
         </p:nvSpPr>
         <p:spPr>
           <a:xfrm>
-            <a:off x="8985178" y="1982116"/>
-            <a:ext cx="871909" cy="228600"/>
-          </a:xfrm>
-          <a:prstGeom prst="rect">
-            <a:avLst/>
-          </a:prstGeom>
-          <a:noFill/>
-          <a:ln/>
-        </p:spPr>
-        <p:txBody>
-          <a:bodyPr wrap="square" lIns="47625" tIns="114300" rIns="114300" bIns="47625" rtlCol="0" anchor="ctr"/>
+            <a:off x="8985178" y="2044005"/>
+            <a:ext cx="871909" cy="133350"/>
+          </a:xfrm>
+          <a:prstGeom prst="rect">
+            <a:avLst/>
+          </a:prstGeom>
+          <a:noFill/>
+          <a:ln/>
+        </p:spPr>
+        <p:txBody>
+          <a:bodyPr wrap="square" lIns="0" tIns="114300" rIns="114300" bIns="0" rtlCol="0" anchor="ctr"/>
           <a:lstStyle/>
           <a:p>
             <a:pPr algn="r" indent="0" marL="0">
@@ -9093,17 +10653,17 @@
         </p:nvSpPr>
         <p:spPr>
           <a:xfrm>
-            <a:off x="10645500" y="1982116"/>
-            <a:ext cx="860412" cy="228600"/>
-          </a:xfrm>
-          <a:prstGeom prst="rect">
-            <a:avLst/>
-          </a:prstGeom>
-          <a:noFill/>
-          <a:ln/>
-        </p:spPr>
-        <p:txBody>
-          <a:bodyPr wrap="square" lIns="47625" tIns="114300" rIns="114300" bIns="47625" rtlCol="0" anchor="ctr"/>
+            <a:off x="10645500" y="2044005"/>
+            <a:ext cx="860412" cy="133350"/>
+          </a:xfrm>
+          <a:prstGeom prst="rect">
+            <a:avLst/>
+          </a:prstGeom>
+          <a:noFill/>
+          <a:ln/>
+        </p:spPr>
+        <p:txBody>
+          <a:bodyPr wrap="square" lIns="0" tIns="114300" rIns="114300" bIns="0" rtlCol="0" anchor="ctr"/>
           <a:lstStyle/>
           <a:p>
             <a:pPr algn="r" indent="0" marL="0">
@@ -9132,17 +10692,17 @@
         </p:nvSpPr>
         <p:spPr>
           <a:xfrm>
-            <a:off x="1176964" y="1982116"/>
-            <a:ext cx="743912" cy="228600"/>
-          </a:xfrm>
-          <a:prstGeom prst="rect">
-            <a:avLst/>
-          </a:prstGeom>
-          <a:noFill/>
-          <a:ln/>
-        </p:spPr>
-        <p:txBody>
-          <a:bodyPr wrap="square" lIns="47625" tIns="114300" rIns="114300" bIns="47625" rtlCol="0" anchor="ctr"/>
+            <a:off x="1176964" y="2044005"/>
+            <a:ext cx="743912" cy="133350"/>
+          </a:xfrm>
+          <a:prstGeom prst="rect">
+            <a:avLst/>
+          </a:prstGeom>
+          <a:noFill/>
+          <a:ln/>
+        </p:spPr>
+        <p:txBody>
+          <a:bodyPr wrap="square" lIns="0" tIns="114300" rIns="114300" bIns="0" rtlCol="0" anchor="ctr"/>
           <a:lstStyle/>
           <a:p>
             <a:pPr algn="r" indent="0" marL="0">
@@ -9171,17 +10731,17 @@
         </p:nvSpPr>
         <p:spPr>
           <a:xfrm>
-            <a:off x="2714757" y="1982116"/>
-            <a:ext cx="723831" cy="228600"/>
-          </a:xfrm>
-          <a:prstGeom prst="rect">
-            <a:avLst/>
-          </a:prstGeom>
-          <a:noFill/>
-          <a:ln/>
-        </p:spPr>
-        <p:txBody>
-          <a:bodyPr wrap="square" lIns="47625" tIns="114300" rIns="114300" bIns="47625" rtlCol="0" anchor="ctr"/>
+            <a:off x="2714757" y="2044005"/>
+            <a:ext cx="723831" cy="133350"/>
+          </a:xfrm>
+          <a:prstGeom prst="rect">
+            <a:avLst/>
+          </a:prstGeom>
+          <a:noFill/>
+          <a:ln/>
+        </p:spPr>
+        <p:txBody>
+          <a:bodyPr wrap="square" lIns="0" tIns="114300" rIns="114300" bIns="0" rtlCol="0" anchor="ctr"/>
           <a:lstStyle/>
           <a:p>
             <a:pPr algn="r" indent="0" marL="0">
@@ -9210,17 +10770,17 @@
         </p:nvSpPr>
         <p:spPr>
           <a:xfrm>
-            <a:off x="6748950" y="1982116"/>
-            <a:ext cx="743912" cy="228600"/>
-          </a:xfrm>
-          <a:prstGeom prst="rect">
-            <a:avLst/>
-          </a:prstGeom>
-          <a:noFill/>
-          <a:ln/>
-        </p:spPr>
-        <p:txBody>
-          <a:bodyPr wrap="square" lIns="47625" tIns="114300" rIns="114300" bIns="47625" rtlCol="0" anchor="ctr"/>
+            <a:off x="6748950" y="2044005"/>
+            <a:ext cx="743912" cy="133350"/>
+          </a:xfrm>
+          <a:prstGeom prst="rect">
+            <a:avLst/>
+          </a:prstGeom>
+          <a:noFill/>
+          <a:ln/>
+        </p:spPr>
+        <p:txBody>
+          <a:bodyPr wrap="square" lIns="0" tIns="114300" rIns="114300" bIns="0" rtlCol="0" anchor="ctr"/>
           <a:lstStyle/>
           <a:p>
             <a:pPr algn="r" indent="0" marL="0">
@@ -9249,17 +10809,17 @@
         </p:nvSpPr>
         <p:spPr>
           <a:xfrm>
-            <a:off x="8286742" y="1982116"/>
-            <a:ext cx="723831" cy="228600"/>
-          </a:xfrm>
-          <a:prstGeom prst="rect">
-            <a:avLst/>
-          </a:prstGeom>
-          <a:noFill/>
-          <a:ln/>
-        </p:spPr>
-        <p:txBody>
-          <a:bodyPr wrap="square" lIns="47625" tIns="114300" rIns="114300" bIns="47625" rtlCol="0" anchor="ctr"/>
+            <a:off x="8286742" y="2044005"/>
+            <a:ext cx="723831" cy="133350"/>
+          </a:xfrm>
+          <a:prstGeom prst="rect">
+            <a:avLst/>
+          </a:prstGeom>
+          <a:noFill/>
+          <a:ln/>
+        </p:spPr>
+        <p:txBody>
+          <a:bodyPr wrap="square" lIns="0" tIns="114300" rIns="114300" bIns="0" rtlCol="0" anchor="ctr"/>
           <a:lstStyle/>
           <a:p>
             <a:pPr algn="r" indent="0" marL="0">
@@ -9288,17 +10848,17 @@
         </p:nvSpPr>
         <p:spPr>
           <a:xfrm>
-            <a:off x="5073515" y="2681608"/>
-            <a:ext cx="860412" cy="480120"/>
-          </a:xfrm>
-          <a:prstGeom prst="rect">
-            <a:avLst/>
-          </a:prstGeom>
-          <a:noFill/>
-          <a:ln/>
-        </p:spPr>
-        <p:txBody>
-          <a:bodyPr wrap="square" lIns="38100" tIns="114300" rIns="114300" bIns="38100" rtlCol="0" anchor="ctr"/>
+            <a:off x="5073515" y="2874020"/>
+            <a:ext cx="860412" cy="123825"/>
+          </a:xfrm>
+          <a:prstGeom prst="rect">
+            <a:avLst/>
+          </a:prstGeom>
+          <a:noFill/>
+          <a:ln/>
+        </p:spPr>
+        <p:txBody>
+          <a:bodyPr wrap="square" lIns="0" tIns="114300" rIns="114300" bIns="0" rtlCol="0" anchor="ctr"/>
           <a:lstStyle/>
           <a:p>
             <a:pPr algn="r" indent="0" marL="0">
@@ -9327,17 +10887,17 @@
         </p:nvSpPr>
         <p:spPr>
           <a:xfrm>
-            <a:off x="2714757" y="5082206"/>
-            <a:ext cx="723831" cy="471488"/>
-          </a:xfrm>
-          <a:prstGeom prst="rect">
-            <a:avLst/>
-          </a:prstGeom>
-          <a:noFill/>
-          <a:ln/>
-        </p:spPr>
-        <p:txBody>
-          <a:bodyPr wrap="square" lIns="38100" tIns="114300" rIns="114300" bIns="38100" rtlCol="0" anchor="ctr"/>
+            <a:off x="2714757" y="5277445"/>
+            <a:ext cx="723831" cy="114300"/>
+          </a:xfrm>
+          <a:prstGeom prst="rect">
+            <a:avLst/>
+          </a:prstGeom>
+          <a:noFill/>
+          <a:ln/>
+        </p:spPr>
+        <p:txBody>
+          <a:bodyPr wrap="square" lIns="0" tIns="114300" rIns="114300" bIns="0" rtlCol="0" anchor="ctr"/>
           <a:lstStyle/>
           <a:p>
             <a:pPr algn="r" indent="0" marL="0">
@@ -9366,17 +10926,17 @@
         </p:nvSpPr>
         <p:spPr>
           <a:xfrm>
-            <a:off x="5073515" y="5082206"/>
-            <a:ext cx="860412" cy="471488"/>
-          </a:xfrm>
-          <a:prstGeom prst="rect">
-            <a:avLst/>
-          </a:prstGeom>
-          <a:noFill/>
-          <a:ln/>
-        </p:spPr>
-        <p:txBody>
-          <a:bodyPr wrap="square" lIns="38100" tIns="114300" rIns="114300" bIns="38100" rtlCol="0" anchor="ctr"/>
+            <a:off x="5073515" y="5272683"/>
+            <a:ext cx="860412" cy="123825"/>
+          </a:xfrm>
+          <a:prstGeom prst="rect">
+            <a:avLst/>
+          </a:prstGeom>
+          <a:noFill/>
+          <a:ln/>
+        </p:spPr>
+        <p:txBody>
+          <a:bodyPr wrap="square" lIns="0" tIns="114300" rIns="114300" bIns="0" rtlCol="0" anchor="ctr"/>
           <a:lstStyle/>
           <a:p>
             <a:pPr algn="r" indent="0" marL="0">
@@ -9444,17 +11004,17 @@
         </p:nvSpPr>
         <p:spPr>
           <a:xfrm>
-            <a:off x="2714757" y="2210716"/>
-            <a:ext cx="723831" cy="470892"/>
-          </a:xfrm>
-          <a:prstGeom prst="rect">
-            <a:avLst/>
-          </a:prstGeom>
-          <a:noFill/>
-          <a:ln/>
-        </p:spPr>
-        <p:txBody>
-          <a:bodyPr wrap="square" lIns="38100" tIns="114300" rIns="114300" bIns="38100" rtlCol="0" anchor="ctr"/>
+            <a:off x="2714757" y="2400895"/>
+            <a:ext cx="723831" cy="114300"/>
+          </a:xfrm>
+          <a:prstGeom prst="rect">
+            <a:avLst/>
+          </a:prstGeom>
+          <a:noFill/>
+          <a:ln/>
+        </p:spPr>
+        <p:txBody>
+          <a:bodyPr wrap="square" lIns="0" tIns="114300" rIns="114300" bIns="0" rtlCol="0" anchor="ctr"/>
           <a:lstStyle/>
           <a:p>
             <a:pPr algn="r" indent="0" marL="0">
@@ -9483,17 +11043,17 @@
         </p:nvSpPr>
         <p:spPr>
           <a:xfrm>
-            <a:off x="5073515" y="2210716"/>
-            <a:ext cx="860412" cy="470892"/>
-          </a:xfrm>
-          <a:prstGeom prst="rect">
-            <a:avLst/>
-          </a:prstGeom>
-          <a:noFill/>
-          <a:ln/>
-        </p:spPr>
-        <p:txBody>
-          <a:bodyPr wrap="square" lIns="38100" tIns="114300" rIns="114300" bIns="38100" rtlCol="0" anchor="ctr"/>
+            <a:off x="5073515" y="2396133"/>
+            <a:ext cx="860412" cy="123825"/>
+          </a:xfrm>
+          <a:prstGeom prst="rect">
+            <a:avLst/>
+          </a:prstGeom>
+          <a:noFill/>
+          <a:ln/>
+        </p:spPr>
+        <p:txBody>
+          <a:bodyPr wrap="square" lIns="0" tIns="114300" rIns="114300" bIns="0" rtlCol="0" anchor="ctr"/>
           <a:lstStyle/>
           <a:p>
             <a:pPr algn="r" indent="0" marL="0">
@@ -9522,17 +11082,17 @@
         </p:nvSpPr>
         <p:spPr>
           <a:xfrm>
-            <a:off x="2714757" y="2681608"/>
-            <a:ext cx="723831" cy="480120"/>
-          </a:xfrm>
-          <a:prstGeom prst="rect">
-            <a:avLst/>
-          </a:prstGeom>
-          <a:noFill/>
-          <a:ln/>
-        </p:spPr>
-        <p:txBody>
-          <a:bodyPr wrap="square" lIns="38100" tIns="114300" rIns="114300" bIns="38100" rtlCol="0" anchor="ctr"/>
+            <a:off x="2714757" y="2878782"/>
+            <a:ext cx="723831" cy="114300"/>
+          </a:xfrm>
+          <a:prstGeom prst="rect">
+            <a:avLst/>
+          </a:prstGeom>
+          <a:noFill/>
+          <a:ln/>
+        </p:spPr>
+        <p:txBody>
+          <a:bodyPr wrap="square" lIns="0" tIns="114300" rIns="114300" bIns="0" rtlCol="0" anchor="ctr"/>
           <a:lstStyle/>
           <a:p>
             <a:pPr algn="r" indent="0" marL="0">
@@ -9561,17 +11121,17 @@
         </p:nvSpPr>
         <p:spPr>
           <a:xfrm>
-            <a:off x="2714757" y="3161728"/>
-            <a:ext cx="723831" cy="480120"/>
-          </a:xfrm>
-          <a:prstGeom prst="rect">
-            <a:avLst/>
-          </a:prstGeom>
-          <a:noFill/>
-          <a:ln/>
-        </p:spPr>
-        <p:txBody>
-          <a:bodyPr wrap="square" lIns="38100" tIns="114300" rIns="114300" bIns="38100" rtlCol="0" anchor="ctr"/>
+            <a:off x="2714757" y="3358902"/>
+            <a:ext cx="723831" cy="114300"/>
+          </a:xfrm>
+          <a:prstGeom prst="rect">
+            <a:avLst/>
+          </a:prstGeom>
+          <a:noFill/>
+          <a:ln/>
+        </p:spPr>
+        <p:txBody>
+          <a:bodyPr wrap="square" lIns="0" tIns="114300" rIns="114300" bIns="0" rtlCol="0" anchor="ctr"/>
           <a:lstStyle/>
           <a:p>
             <a:pPr algn="r" indent="0" marL="0">
@@ -9600,17 +11160,17 @@
         </p:nvSpPr>
         <p:spPr>
           <a:xfrm>
-            <a:off x="5073515" y="3161728"/>
-            <a:ext cx="860412" cy="480120"/>
-          </a:xfrm>
-          <a:prstGeom prst="rect">
-            <a:avLst/>
-          </a:prstGeom>
-          <a:noFill/>
-          <a:ln/>
-        </p:spPr>
-        <p:txBody>
-          <a:bodyPr wrap="square" lIns="38100" tIns="114300" rIns="114300" bIns="38100" rtlCol="0" anchor="ctr"/>
+            <a:off x="5073515" y="3354139"/>
+            <a:ext cx="860412" cy="123825"/>
+          </a:xfrm>
+          <a:prstGeom prst="rect">
+            <a:avLst/>
+          </a:prstGeom>
+          <a:noFill/>
+          <a:ln/>
+        </p:spPr>
+        <p:txBody>
+          <a:bodyPr wrap="square" lIns="0" tIns="114300" rIns="114300" bIns="0" rtlCol="0" anchor="ctr"/>
           <a:lstStyle/>
           <a:p>
             <a:pPr algn="r" indent="0" marL="0">
@@ -9639,17 +11199,17 @@
         </p:nvSpPr>
         <p:spPr>
           <a:xfrm>
-            <a:off x="2714757" y="3641847"/>
-            <a:ext cx="723831" cy="480120"/>
-          </a:xfrm>
-          <a:prstGeom prst="rect">
-            <a:avLst/>
-          </a:prstGeom>
-          <a:noFill/>
-          <a:ln/>
-        </p:spPr>
-        <p:txBody>
-          <a:bodyPr wrap="square" lIns="38100" tIns="114300" rIns="114300" bIns="38100" rtlCol="0" anchor="ctr"/>
+            <a:off x="2714757" y="3839021"/>
+            <a:ext cx="723831" cy="114300"/>
+          </a:xfrm>
+          <a:prstGeom prst="rect">
+            <a:avLst/>
+          </a:prstGeom>
+          <a:noFill/>
+          <a:ln/>
+        </p:spPr>
+        <p:txBody>
+          <a:bodyPr wrap="square" lIns="0" tIns="114300" rIns="114300" bIns="0" rtlCol="0" anchor="ctr"/>
           <a:lstStyle/>
           <a:p>
             <a:pPr algn="r" indent="0" marL="0">
@@ -9678,17 +11238,17 @@
         </p:nvSpPr>
         <p:spPr>
           <a:xfrm>
-            <a:off x="5073515" y="3641847"/>
-            <a:ext cx="860412" cy="480120"/>
-          </a:xfrm>
-          <a:prstGeom prst="rect">
-            <a:avLst/>
-          </a:prstGeom>
-          <a:noFill/>
-          <a:ln/>
-        </p:spPr>
-        <p:txBody>
-          <a:bodyPr wrap="square" lIns="38100" tIns="114300" rIns="114300" bIns="38100" rtlCol="0" anchor="ctr"/>
+            <a:off x="5073515" y="3834259"/>
+            <a:ext cx="860412" cy="123825"/>
+          </a:xfrm>
+          <a:prstGeom prst="rect">
+            <a:avLst/>
+          </a:prstGeom>
+          <a:noFill/>
+          <a:ln/>
+        </p:spPr>
+        <p:txBody>
+          <a:bodyPr wrap="square" lIns="0" tIns="114300" rIns="114300" bIns="0" rtlCol="0" anchor="ctr"/>
           <a:lstStyle/>
           <a:p>
             <a:pPr algn="r" indent="0" marL="0">
@@ -9717,17 +11277,17 @@
         </p:nvSpPr>
         <p:spPr>
           <a:xfrm>
-            <a:off x="2714757" y="4121967"/>
-            <a:ext cx="723831" cy="480120"/>
-          </a:xfrm>
-          <a:prstGeom prst="rect">
-            <a:avLst/>
-          </a:prstGeom>
-          <a:noFill/>
-          <a:ln/>
-        </p:spPr>
-        <p:txBody>
-          <a:bodyPr wrap="square" lIns="38100" tIns="114300" rIns="114300" bIns="38100" rtlCol="0" anchor="ctr"/>
+            <a:off x="2714757" y="4319141"/>
+            <a:ext cx="723831" cy="114300"/>
+          </a:xfrm>
+          <a:prstGeom prst="rect">
+            <a:avLst/>
+          </a:prstGeom>
+          <a:noFill/>
+          <a:ln/>
+        </p:spPr>
+        <p:txBody>
+          <a:bodyPr wrap="square" lIns="0" tIns="114300" rIns="114300" bIns="0" rtlCol="0" anchor="ctr"/>
           <a:lstStyle/>
           <a:p>
             <a:pPr algn="r" indent="0" marL="0">
@@ -9756,17 +11316,17 @@
         </p:nvSpPr>
         <p:spPr>
           <a:xfrm>
-            <a:off x="2714757" y="4602086"/>
-            <a:ext cx="723831" cy="480120"/>
-          </a:xfrm>
-          <a:prstGeom prst="rect">
-            <a:avLst/>
-          </a:prstGeom>
-          <a:noFill/>
-          <a:ln/>
-        </p:spPr>
-        <p:txBody>
-          <a:bodyPr wrap="square" lIns="38100" tIns="114300" rIns="114300" bIns="38100" rtlCol="0" anchor="ctr"/>
+            <a:off x="2714757" y="4799261"/>
+            <a:ext cx="723831" cy="114300"/>
+          </a:xfrm>
+          <a:prstGeom prst="rect">
+            <a:avLst/>
+          </a:prstGeom>
+          <a:noFill/>
+          <a:ln/>
+        </p:spPr>
+        <p:txBody>
+          <a:bodyPr wrap="square" lIns="0" tIns="114300" rIns="114300" bIns="0" rtlCol="0" anchor="ctr"/>
           <a:lstStyle/>
           <a:p>
             <a:pPr algn="r" indent="0" marL="0">
@@ -9795,17 +11355,17 @@
         </p:nvSpPr>
         <p:spPr>
           <a:xfrm>
-            <a:off x="685783" y="5082206"/>
-            <a:ext cx="528234" cy="471488"/>
-          </a:xfrm>
-          <a:prstGeom prst="rect">
-            <a:avLst/>
-          </a:prstGeom>
-          <a:noFill/>
-          <a:ln/>
-        </p:spPr>
-        <p:txBody>
-          <a:bodyPr wrap="square" lIns="38100" tIns="114300" rIns="114300" bIns="38100" rtlCol="0" anchor="ctr"/>
+            <a:off x="685783" y="5277445"/>
+            <a:ext cx="528234" cy="114300"/>
+          </a:xfrm>
+          <a:prstGeom prst="rect">
+            <a:avLst/>
+          </a:prstGeom>
+          <a:noFill/>
+          <a:ln/>
+        </p:spPr>
+        <p:txBody>
+          <a:bodyPr wrap="square" lIns="0" tIns="114300" rIns="114300" bIns="0" rtlCol="0" anchor="ctr"/>
           <a:lstStyle/>
           <a:p>
             <a:pPr algn="l" indent="0" marL="0">
@@ -9834,17 +11394,17 @@
         </p:nvSpPr>
         <p:spPr>
           <a:xfrm>
-            <a:off x="10645500" y="2210716"/>
-            <a:ext cx="860412" cy="470892"/>
-          </a:xfrm>
-          <a:prstGeom prst="rect">
-            <a:avLst/>
-          </a:prstGeom>
-          <a:noFill/>
-          <a:ln/>
-        </p:spPr>
-        <p:txBody>
-          <a:bodyPr wrap="square" lIns="38100" tIns="114300" rIns="114300" bIns="38100" rtlCol="0" anchor="ctr"/>
+            <a:off x="10645500" y="2396133"/>
+            <a:ext cx="860412" cy="123825"/>
+          </a:xfrm>
+          <a:prstGeom prst="rect">
+            <a:avLst/>
+          </a:prstGeom>
+          <a:noFill/>
+          <a:ln/>
+        </p:spPr>
+        <p:txBody>
+          <a:bodyPr wrap="square" lIns="0" tIns="114300" rIns="114300" bIns="0" rtlCol="0" anchor="ctr"/>
           <a:lstStyle/>
           <a:p>
             <a:pPr algn="r" indent="0" marL="0">
@@ -9873,17 +11433,17 @@
         </p:nvSpPr>
         <p:spPr>
           <a:xfrm>
-            <a:off x="10645500" y="2681608"/>
-            <a:ext cx="860412" cy="480120"/>
-          </a:xfrm>
-          <a:prstGeom prst="rect">
-            <a:avLst/>
-          </a:prstGeom>
-          <a:noFill/>
-          <a:ln/>
-        </p:spPr>
-        <p:txBody>
-          <a:bodyPr wrap="square" lIns="38100" tIns="114300" rIns="114300" bIns="38100" rtlCol="0" anchor="ctr"/>
+            <a:off x="10645500" y="2874020"/>
+            <a:ext cx="860412" cy="123825"/>
+          </a:xfrm>
+          <a:prstGeom prst="rect">
+            <a:avLst/>
+          </a:prstGeom>
+          <a:noFill/>
+          <a:ln/>
+        </p:spPr>
+        <p:txBody>
+          <a:bodyPr wrap="square" lIns="0" tIns="114300" rIns="114300" bIns="0" rtlCol="0" anchor="ctr"/>
           <a:lstStyle/>
           <a:p>
             <a:pPr algn="r" indent="0" marL="0">
@@ -9912,17 +11472,17 @@
         </p:nvSpPr>
         <p:spPr>
           <a:xfrm>
-            <a:off x="10645500" y="3161728"/>
-            <a:ext cx="860412" cy="480120"/>
-          </a:xfrm>
-          <a:prstGeom prst="rect">
-            <a:avLst/>
-          </a:prstGeom>
-          <a:noFill/>
-          <a:ln/>
-        </p:spPr>
-        <p:txBody>
-          <a:bodyPr wrap="square" lIns="38100" tIns="114300" rIns="114300" bIns="38100" rtlCol="0" anchor="ctr"/>
+            <a:off x="10645500" y="3354139"/>
+            <a:ext cx="860412" cy="123825"/>
+          </a:xfrm>
+          <a:prstGeom prst="rect">
+            <a:avLst/>
+          </a:prstGeom>
+          <a:noFill/>
+          <a:ln/>
+        </p:spPr>
+        <p:txBody>
+          <a:bodyPr wrap="square" lIns="0" tIns="114300" rIns="114300" bIns="0" rtlCol="0" anchor="ctr"/>
           <a:lstStyle/>
           <a:p>
             <a:pPr algn="r" indent="0" marL="0">
@@ -9951,17 +11511,17 @@
         </p:nvSpPr>
         <p:spPr>
           <a:xfrm>
-            <a:off x="8286742" y="4602086"/>
-            <a:ext cx="723831" cy="480120"/>
-          </a:xfrm>
-          <a:prstGeom prst="rect">
-            <a:avLst/>
-          </a:prstGeom>
-          <a:noFill/>
-          <a:ln/>
-        </p:spPr>
-        <p:txBody>
-          <a:bodyPr wrap="square" lIns="38100" tIns="114300" rIns="114300" bIns="38100" rtlCol="0" anchor="ctr"/>
+            <a:off x="8286742" y="4799261"/>
+            <a:ext cx="723831" cy="114300"/>
+          </a:xfrm>
+          <a:prstGeom prst="rect">
+            <a:avLst/>
+          </a:prstGeom>
+          <a:noFill/>
+          <a:ln/>
+        </p:spPr>
+        <p:txBody>
+          <a:bodyPr wrap="square" lIns="0" tIns="114300" rIns="114300" bIns="0" rtlCol="0" anchor="ctr"/>
           <a:lstStyle/>
           <a:p>
             <a:pPr algn="r" indent="0" marL="0">
@@ -9990,17 +11550,17 @@
         </p:nvSpPr>
         <p:spPr>
           <a:xfrm>
-            <a:off x="6257769" y="5082206"/>
-            <a:ext cx="528234" cy="471488"/>
-          </a:xfrm>
-          <a:prstGeom prst="rect">
-            <a:avLst/>
-          </a:prstGeom>
-          <a:noFill/>
-          <a:ln/>
-        </p:spPr>
-        <p:txBody>
-          <a:bodyPr wrap="square" lIns="38100" tIns="114300" rIns="114300" bIns="38100" rtlCol="0" anchor="ctr"/>
+            <a:off x="6257769" y="5277445"/>
+            <a:ext cx="528234" cy="114300"/>
+          </a:xfrm>
+          <a:prstGeom prst="rect">
+            <a:avLst/>
+          </a:prstGeom>
+          <a:noFill/>
+          <a:ln/>
+        </p:spPr>
+        <p:txBody>
+          <a:bodyPr wrap="square" lIns="0" tIns="114300" rIns="114300" bIns="0" rtlCol="0" anchor="ctr"/>
           <a:lstStyle/>
           <a:p>
             <a:pPr algn="l" indent="0" marL="0">
@@ -10029,17 +11589,17 @@
         </p:nvSpPr>
         <p:spPr>
           <a:xfrm>
-            <a:off x="8286742" y="5082206"/>
-            <a:ext cx="723831" cy="471488"/>
-          </a:xfrm>
-          <a:prstGeom prst="rect">
-            <a:avLst/>
-          </a:prstGeom>
-          <a:noFill/>
-          <a:ln/>
-        </p:spPr>
-        <p:txBody>
-          <a:bodyPr wrap="square" lIns="38100" tIns="114300" rIns="114300" bIns="38100" rtlCol="0" anchor="ctr"/>
+            <a:off x="8286742" y="5277445"/>
+            <a:ext cx="723831" cy="114300"/>
+          </a:xfrm>
+          <a:prstGeom prst="rect">
+            <a:avLst/>
+          </a:prstGeom>
+          <a:noFill/>
+          <a:ln/>
+        </p:spPr>
+        <p:txBody>
+          <a:bodyPr wrap="square" lIns="0" tIns="114300" rIns="114300" bIns="0" rtlCol="0" anchor="ctr"/>
           <a:lstStyle/>
           <a:p>
             <a:pPr algn="r" indent="0" marL="0">
@@ -10068,17 +11628,17 @@
         </p:nvSpPr>
         <p:spPr>
           <a:xfrm>
-            <a:off x="10645500" y="5082206"/>
-            <a:ext cx="860412" cy="471488"/>
-          </a:xfrm>
-          <a:prstGeom prst="rect">
-            <a:avLst/>
-          </a:prstGeom>
-          <a:noFill/>
-          <a:ln/>
-        </p:spPr>
-        <p:txBody>
-          <a:bodyPr wrap="square" lIns="38100" tIns="114300" rIns="114300" bIns="38100" rtlCol="0" anchor="ctr"/>
+            <a:off x="10645500" y="5272683"/>
+            <a:ext cx="860412" cy="123825"/>
+          </a:xfrm>
+          <a:prstGeom prst="rect">
+            <a:avLst/>
+          </a:prstGeom>
+          <a:noFill/>
+          <a:ln/>
+        </p:spPr>
+        <p:txBody>
+          <a:bodyPr wrap="square" lIns="0" tIns="114300" rIns="114300" bIns="0" rtlCol="0" anchor="ctr"/>
           <a:lstStyle/>
           <a:p>
             <a:pPr algn="r" indent="0" marL="0">
@@ -10146,17 +11706,17 @@
         </p:nvSpPr>
         <p:spPr>
           <a:xfrm>
-            <a:off x="685783" y="1982116"/>
-            <a:ext cx="528234" cy="228600"/>
-          </a:xfrm>
-          <a:prstGeom prst="rect">
-            <a:avLst/>
-          </a:prstGeom>
-          <a:noFill/>
-          <a:ln/>
-        </p:spPr>
-        <p:txBody>
-          <a:bodyPr wrap="square" lIns="47625" tIns="114300" rIns="114300" bIns="47625" rtlCol="0" anchor="ctr"/>
+            <a:off x="685783" y="2044005"/>
+            <a:ext cx="528234" cy="133350"/>
+          </a:xfrm>
+          <a:prstGeom prst="rect">
+            <a:avLst/>
+          </a:prstGeom>
+          <a:noFill/>
+          <a:ln/>
+        </p:spPr>
+        <p:txBody>
+          <a:bodyPr wrap="square" lIns="0" tIns="114300" rIns="114300" bIns="0" rtlCol="0" anchor="ctr"/>
           <a:lstStyle/>
           <a:p>
             <a:pPr algn="l" indent="0" marL="0">
@@ -10185,17 +11745,17 @@
         </p:nvSpPr>
         <p:spPr>
           <a:xfrm>
-            <a:off x="685783" y="2210716"/>
-            <a:ext cx="528234" cy="470892"/>
-          </a:xfrm>
-          <a:prstGeom prst="rect">
-            <a:avLst/>
-          </a:prstGeom>
-          <a:noFill/>
-          <a:ln/>
-        </p:spPr>
-        <p:txBody>
-          <a:bodyPr wrap="square" lIns="38100" tIns="114300" rIns="114300" bIns="38100" rtlCol="0" anchor="ctr"/>
+            <a:off x="685783" y="2400895"/>
+            <a:ext cx="528234" cy="114300"/>
+          </a:xfrm>
+          <a:prstGeom prst="rect">
+            <a:avLst/>
+          </a:prstGeom>
+          <a:noFill/>
+          <a:ln/>
+        </p:spPr>
+        <p:txBody>
+          <a:bodyPr wrap="square" lIns="0" tIns="114300" rIns="114300" bIns="0" rtlCol="0" anchor="ctr"/>
           <a:lstStyle/>
           <a:p>
             <a:pPr algn="l" indent="0" marL="0">
@@ -10224,17 +11784,17 @@
         </p:nvSpPr>
         <p:spPr>
           <a:xfrm>
-            <a:off x="685783" y="2681608"/>
-            <a:ext cx="528234" cy="480120"/>
-          </a:xfrm>
-          <a:prstGeom prst="rect">
-            <a:avLst/>
-          </a:prstGeom>
-          <a:noFill/>
-          <a:ln/>
-        </p:spPr>
-        <p:txBody>
-          <a:bodyPr wrap="square" lIns="38100" tIns="114300" rIns="114300" bIns="38100" rtlCol="0" anchor="ctr"/>
+            <a:off x="685783" y="2878782"/>
+            <a:ext cx="528234" cy="114300"/>
+          </a:xfrm>
+          <a:prstGeom prst="rect">
+            <a:avLst/>
+          </a:prstGeom>
+          <a:noFill/>
+          <a:ln/>
+        </p:spPr>
+        <p:txBody>
+          <a:bodyPr wrap="square" lIns="0" tIns="114300" rIns="114300" bIns="0" rtlCol="0" anchor="ctr"/>
           <a:lstStyle/>
           <a:p>
             <a:pPr algn="l" indent="0" marL="0">
@@ -10263,17 +11823,17 @@
         </p:nvSpPr>
         <p:spPr>
           <a:xfrm>
-            <a:off x="3413192" y="2681608"/>
-            <a:ext cx="871909" cy="480120"/>
-          </a:xfrm>
-          <a:prstGeom prst="rect">
-            <a:avLst/>
-          </a:prstGeom>
-          <a:noFill/>
-          <a:ln/>
-        </p:spPr>
-        <p:txBody>
-          <a:bodyPr wrap="square" lIns="38100" tIns="114300" rIns="114300" bIns="38100" rtlCol="0" anchor="ctr"/>
+            <a:off x="3413192" y="2878782"/>
+            <a:ext cx="871909" cy="114300"/>
+          </a:xfrm>
+          <a:prstGeom prst="rect">
+            <a:avLst/>
+          </a:prstGeom>
+          <a:noFill/>
+          <a:ln/>
+        </p:spPr>
+        <p:txBody>
+          <a:bodyPr wrap="square" lIns="0" tIns="114300" rIns="114300" bIns="0" rtlCol="0" anchor="ctr"/>
           <a:lstStyle/>
           <a:p>
             <a:pPr algn="r" indent="0" marL="0">
@@ -10302,17 +11862,17 @@
         </p:nvSpPr>
         <p:spPr>
           <a:xfrm>
-            <a:off x="4260697" y="2681608"/>
-            <a:ext cx="837878" cy="480120"/>
-          </a:xfrm>
-          <a:prstGeom prst="rect">
-            <a:avLst/>
-          </a:prstGeom>
-          <a:noFill/>
-          <a:ln/>
-        </p:spPr>
-        <p:txBody>
-          <a:bodyPr wrap="square" lIns="38100" tIns="114300" rIns="114300" bIns="38100" rtlCol="0" anchor="ctr"/>
+            <a:off x="4260697" y="2854970"/>
+            <a:ext cx="837878" cy="114300"/>
+          </a:xfrm>
+          <a:prstGeom prst="rect">
+            <a:avLst/>
+          </a:prstGeom>
+          <a:noFill/>
+          <a:ln/>
+        </p:spPr>
+        <p:txBody>
+          <a:bodyPr wrap="square" lIns="0" tIns="114300" rIns="114300" bIns="0" rtlCol="0" anchor="ctr"/>
           <a:lstStyle/>
           <a:p>
             <a:pPr algn="r" indent="0" marL="0">
@@ -10341,17 +11901,17 @@
         </p:nvSpPr>
         <p:spPr>
           <a:xfrm>
-            <a:off x="685783" y="3161728"/>
-            <a:ext cx="528234" cy="480120"/>
-          </a:xfrm>
-          <a:prstGeom prst="rect">
-            <a:avLst/>
-          </a:prstGeom>
-          <a:noFill/>
-          <a:ln/>
-        </p:spPr>
-        <p:txBody>
-          <a:bodyPr wrap="square" lIns="38100" tIns="114300" rIns="114300" bIns="38100" rtlCol="0" anchor="ctr"/>
+            <a:off x="685783" y="3358902"/>
+            <a:ext cx="528234" cy="114300"/>
+          </a:xfrm>
+          <a:prstGeom prst="rect">
+            <a:avLst/>
+          </a:prstGeom>
+          <a:noFill/>
+          <a:ln/>
+        </p:spPr>
+        <p:txBody>
+          <a:bodyPr wrap="square" lIns="0" tIns="114300" rIns="114300" bIns="0" rtlCol="0" anchor="ctr"/>
           <a:lstStyle/>
           <a:p>
             <a:pPr algn="l" indent="0" marL="0">
@@ -10380,17 +11940,17 @@
         </p:nvSpPr>
         <p:spPr>
           <a:xfrm>
-            <a:off x="3413192" y="3161728"/>
-            <a:ext cx="871909" cy="480120"/>
-          </a:xfrm>
-          <a:prstGeom prst="rect">
-            <a:avLst/>
-          </a:prstGeom>
-          <a:noFill/>
-          <a:ln/>
-        </p:spPr>
-        <p:txBody>
-          <a:bodyPr wrap="square" lIns="38100" tIns="114300" rIns="114300" bIns="38100" rtlCol="0" anchor="ctr"/>
+            <a:off x="3413192" y="3358902"/>
+            <a:ext cx="871909" cy="114300"/>
+          </a:xfrm>
+          <a:prstGeom prst="rect">
+            <a:avLst/>
+          </a:prstGeom>
+          <a:noFill/>
+          <a:ln/>
+        </p:spPr>
+        <p:txBody>
+          <a:bodyPr wrap="square" lIns="0" tIns="114300" rIns="114300" bIns="0" rtlCol="0" anchor="ctr"/>
           <a:lstStyle/>
           <a:p>
             <a:pPr algn="r" indent="0" marL="0">
@@ -10419,17 +11979,17 @@
         </p:nvSpPr>
         <p:spPr>
           <a:xfrm>
-            <a:off x="685783" y="3641847"/>
-            <a:ext cx="528234" cy="480120"/>
-          </a:xfrm>
-          <a:prstGeom prst="rect">
-            <a:avLst/>
-          </a:prstGeom>
-          <a:noFill/>
-          <a:ln/>
-        </p:spPr>
-        <p:txBody>
-          <a:bodyPr wrap="square" lIns="38100" tIns="114300" rIns="114300" bIns="38100" rtlCol="0" anchor="ctr"/>
+            <a:off x="685783" y="3839021"/>
+            <a:ext cx="528234" cy="114300"/>
+          </a:xfrm>
+          <a:prstGeom prst="rect">
+            <a:avLst/>
+          </a:prstGeom>
+          <a:noFill/>
+          <a:ln/>
+        </p:spPr>
+        <p:txBody>
+          <a:bodyPr wrap="square" lIns="0" tIns="114300" rIns="114300" bIns="0" rtlCol="0" anchor="ctr"/>
           <a:lstStyle/>
           <a:p>
             <a:pPr algn="l" indent="0" marL="0">
@@ -10458,17 +12018,17 @@
         </p:nvSpPr>
         <p:spPr>
           <a:xfrm>
-            <a:off x="3413192" y="3641847"/>
-            <a:ext cx="871909" cy="480120"/>
-          </a:xfrm>
-          <a:prstGeom prst="rect">
-            <a:avLst/>
-          </a:prstGeom>
-          <a:noFill/>
-          <a:ln/>
-        </p:spPr>
-        <p:txBody>
-          <a:bodyPr wrap="square" lIns="38100" tIns="114300" rIns="114300" bIns="38100" rtlCol="0" anchor="ctr"/>
+            <a:off x="3413192" y="3839021"/>
+            <a:ext cx="871909" cy="114300"/>
+          </a:xfrm>
+          <a:prstGeom prst="rect">
+            <a:avLst/>
+          </a:prstGeom>
+          <a:noFill/>
+          <a:ln/>
+        </p:spPr>
+        <p:txBody>
+          <a:bodyPr wrap="square" lIns="0" tIns="114300" rIns="114300" bIns="0" rtlCol="0" anchor="ctr"/>
           <a:lstStyle/>
           <a:p>
             <a:pPr algn="r" indent="0" marL="0">
@@ -10497,17 +12057,17 @@
         </p:nvSpPr>
         <p:spPr>
           <a:xfrm>
-            <a:off x="4260697" y="3641847"/>
-            <a:ext cx="837878" cy="480120"/>
-          </a:xfrm>
-          <a:prstGeom prst="rect">
-            <a:avLst/>
-          </a:prstGeom>
-          <a:noFill/>
-          <a:ln/>
-        </p:spPr>
-        <p:txBody>
-          <a:bodyPr wrap="square" lIns="38100" tIns="114300" rIns="114300" bIns="38100" rtlCol="0" anchor="ctr"/>
+            <a:off x="4260697" y="3815209"/>
+            <a:ext cx="837878" cy="114300"/>
+          </a:xfrm>
+          <a:prstGeom prst="rect">
+            <a:avLst/>
+          </a:prstGeom>
+          <a:noFill/>
+          <a:ln/>
+        </p:spPr>
+        <p:txBody>
+          <a:bodyPr wrap="square" lIns="0" tIns="114300" rIns="114300" bIns="0" rtlCol="0" anchor="ctr"/>
           <a:lstStyle/>
           <a:p>
             <a:pPr algn="r" indent="0" marL="0">
@@ -10536,17 +12096,17 @@
         </p:nvSpPr>
         <p:spPr>
           <a:xfrm>
-            <a:off x="685783" y="4121967"/>
-            <a:ext cx="528234" cy="480120"/>
-          </a:xfrm>
-          <a:prstGeom prst="rect">
-            <a:avLst/>
-          </a:prstGeom>
-          <a:noFill/>
-          <a:ln/>
-        </p:spPr>
-        <p:txBody>
-          <a:bodyPr wrap="square" lIns="38100" tIns="114300" rIns="114300" bIns="38100" rtlCol="0" anchor="ctr"/>
+            <a:off x="685783" y="4319141"/>
+            <a:ext cx="528234" cy="114300"/>
+          </a:xfrm>
+          <a:prstGeom prst="rect">
+            <a:avLst/>
+          </a:prstGeom>
+          <a:noFill/>
+          <a:ln/>
+        </p:spPr>
+        <p:txBody>
+          <a:bodyPr wrap="square" lIns="0" tIns="114300" rIns="114300" bIns="0" rtlCol="0" anchor="ctr"/>
           <a:lstStyle/>
           <a:p>
             <a:pPr algn="l" indent="0" marL="0">
@@ -10575,17 +12135,17 @@
         </p:nvSpPr>
         <p:spPr>
           <a:xfrm>
-            <a:off x="3413192" y="4121967"/>
-            <a:ext cx="871909" cy="480120"/>
-          </a:xfrm>
-          <a:prstGeom prst="rect">
-            <a:avLst/>
-          </a:prstGeom>
-          <a:noFill/>
-          <a:ln/>
-        </p:spPr>
-        <p:txBody>
-          <a:bodyPr wrap="square" lIns="38100" tIns="114300" rIns="114300" bIns="38100" rtlCol="0" anchor="ctr"/>
+            <a:off x="3413192" y="4319141"/>
+            <a:ext cx="871909" cy="114300"/>
+          </a:xfrm>
+          <a:prstGeom prst="rect">
+            <a:avLst/>
+          </a:prstGeom>
+          <a:noFill/>
+          <a:ln/>
+        </p:spPr>
+        <p:txBody>
+          <a:bodyPr wrap="square" lIns="0" tIns="114300" rIns="114300" bIns="0" rtlCol="0" anchor="ctr"/>
           <a:lstStyle/>
           <a:p>
             <a:pPr algn="r" indent="0" marL="0">
@@ -10614,17 +12174,17 @@
         </p:nvSpPr>
         <p:spPr>
           <a:xfrm>
-            <a:off x="5073515" y="4121967"/>
-            <a:ext cx="860412" cy="480120"/>
-          </a:xfrm>
-          <a:prstGeom prst="rect">
-            <a:avLst/>
-          </a:prstGeom>
-          <a:noFill/>
-          <a:ln/>
-        </p:spPr>
-        <p:txBody>
-          <a:bodyPr wrap="square" lIns="38100" tIns="114300" rIns="114300" bIns="38100" rtlCol="0" anchor="ctr"/>
+            <a:off x="5073515" y="4314379"/>
+            <a:ext cx="860412" cy="123825"/>
+          </a:xfrm>
+          <a:prstGeom prst="rect">
+            <a:avLst/>
+          </a:prstGeom>
+          <a:noFill/>
+          <a:ln/>
+        </p:spPr>
+        <p:txBody>
+          <a:bodyPr wrap="square" lIns="0" tIns="114300" rIns="114300" bIns="0" rtlCol="0" anchor="ctr"/>
           <a:lstStyle/>
           <a:p>
             <a:pPr algn="r" indent="0" marL="0">
@@ -10653,17 +12213,17 @@
         </p:nvSpPr>
         <p:spPr>
           <a:xfrm>
-            <a:off x="685783" y="4602086"/>
-            <a:ext cx="528234" cy="480120"/>
-          </a:xfrm>
-          <a:prstGeom prst="rect">
-            <a:avLst/>
-          </a:prstGeom>
-          <a:noFill/>
-          <a:ln/>
-        </p:spPr>
-        <p:txBody>
-          <a:bodyPr wrap="square" lIns="38100" tIns="114300" rIns="114300" bIns="38100" rtlCol="0" anchor="ctr"/>
+            <a:off x="685783" y="4799261"/>
+            <a:ext cx="528234" cy="114300"/>
+          </a:xfrm>
+          <a:prstGeom prst="rect">
+            <a:avLst/>
+          </a:prstGeom>
+          <a:noFill/>
+          <a:ln/>
+        </p:spPr>
+        <p:txBody>
+          <a:bodyPr wrap="square" lIns="0" tIns="114300" rIns="114300" bIns="0" rtlCol="0" anchor="ctr"/>
           <a:lstStyle/>
           <a:p>
             <a:pPr algn="l" indent="0" marL="0">
@@ -10692,17 +12252,17 @@
         </p:nvSpPr>
         <p:spPr>
           <a:xfrm>
-            <a:off x="3413192" y="4602086"/>
-            <a:ext cx="871909" cy="480120"/>
-          </a:xfrm>
-          <a:prstGeom prst="rect">
-            <a:avLst/>
-          </a:prstGeom>
-          <a:noFill/>
-          <a:ln/>
-        </p:spPr>
-        <p:txBody>
-          <a:bodyPr wrap="square" lIns="38100" tIns="114300" rIns="114300" bIns="38100" rtlCol="0" anchor="ctr"/>
+            <a:off x="3413192" y="4799261"/>
+            <a:ext cx="871909" cy="114300"/>
+          </a:xfrm>
+          <a:prstGeom prst="rect">
+            <a:avLst/>
+          </a:prstGeom>
+          <a:noFill/>
+          <a:ln/>
+        </p:spPr>
+        <p:txBody>
+          <a:bodyPr wrap="square" lIns="0" tIns="114300" rIns="114300" bIns="0" rtlCol="0" anchor="ctr"/>
           <a:lstStyle/>
           <a:p>
             <a:pPr algn="r" indent="0" marL="0">
@@ -10731,17 +12291,17 @@
         </p:nvSpPr>
         <p:spPr>
           <a:xfrm>
-            <a:off x="5073515" y="4602086"/>
-            <a:ext cx="860412" cy="480120"/>
-          </a:xfrm>
-          <a:prstGeom prst="rect">
-            <a:avLst/>
-          </a:prstGeom>
-          <a:noFill/>
-          <a:ln/>
-        </p:spPr>
-        <p:txBody>
-          <a:bodyPr wrap="square" lIns="38100" tIns="114300" rIns="114300" bIns="38100" rtlCol="0" anchor="ctr"/>
+            <a:off x="5073515" y="4794498"/>
+            <a:ext cx="860412" cy="123825"/>
+          </a:xfrm>
+          <a:prstGeom prst="rect">
+            <a:avLst/>
+          </a:prstGeom>
+          <a:noFill/>
+          <a:ln/>
+        </p:spPr>
+        <p:txBody>
+          <a:bodyPr wrap="square" lIns="0" tIns="114300" rIns="114300" bIns="0" rtlCol="0" anchor="ctr"/>
           <a:lstStyle/>
           <a:p>
             <a:pPr algn="r" indent="0" marL="0">
@@ -10770,17 +12330,17 @@
         </p:nvSpPr>
         <p:spPr>
           <a:xfrm>
-            <a:off x="1896428" y="5082206"/>
-            <a:ext cx="839411" cy="471488"/>
-          </a:xfrm>
-          <a:prstGeom prst="rect">
-            <a:avLst/>
-          </a:prstGeom>
-          <a:noFill/>
-          <a:ln/>
-        </p:spPr>
-        <p:txBody>
-          <a:bodyPr wrap="square" lIns="38100" tIns="114300" rIns="114300" bIns="38100" rtlCol="0" anchor="ctr"/>
+            <a:off x="1896428" y="5277445"/>
+            <a:ext cx="839411" cy="114300"/>
+          </a:xfrm>
+          <a:prstGeom prst="rect">
+            <a:avLst/>
+          </a:prstGeom>
+          <a:noFill/>
+          <a:ln/>
+        </p:spPr>
+        <p:txBody>
+          <a:bodyPr wrap="square" lIns="0" tIns="114300" rIns="114300" bIns="0" rtlCol="0" anchor="ctr"/>
           <a:lstStyle/>
           <a:p>
             <a:pPr algn="r" indent="0" marL="0">
@@ -10809,17 +12369,17 @@
         </p:nvSpPr>
         <p:spPr>
           <a:xfrm>
-            <a:off x="3413192" y="5082206"/>
-            <a:ext cx="871909" cy="471488"/>
-          </a:xfrm>
-          <a:prstGeom prst="rect">
-            <a:avLst/>
-          </a:prstGeom>
-          <a:noFill/>
-          <a:ln/>
-        </p:spPr>
-        <p:txBody>
-          <a:bodyPr wrap="square" lIns="38100" tIns="114300" rIns="114300" bIns="38100" rtlCol="0" anchor="ctr"/>
+            <a:off x="3413192" y="5277445"/>
+            <a:ext cx="871909" cy="114300"/>
+          </a:xfrm>
+          <a:prstGeom prst="rect">
+            <a:avLst/>
+          </a:prstGeom>
+          <a:noFill/>
+          <a:ln/>
+        </p:spPr>
+        <p:txBody>
+          <a:bodyPr wrap="square" lIns="0" tIns="114300" rIns="114300" bIns="0" rtlCol="0" anchor="ctr"/>
           <a:lstStyle/>
           <a:p>
             <a:pPr algn="r" indent="0" marL="0">
@@ -10848,17 +12408,17 @@
         </p:nvSpPr>
         <p:spPr>
           <a:xfrm>
-            <a:off x="4260697" y="5082206"/>
-            <a:ext cx="837878" cy="471488"/>
-          </a:xfrm>
-          <a:prstGeom prst="rect">
-            <a:avLst/>
-          </a:prstGeom>
-          <a:noFill/>
-          <a:ln/>
-        </p:spPr>
-        <p:txBody>
-          <a:bodyPr wrap="square" lIns="38100" tIns="114300" rIns="114300" bIns="38100" rtlCol="0" anchor="ctr"/>
+            <a:off x="4260697" y="5277445"/>
+            <a:ext cx="837878" cy="114300"/>
+          </a:xfrm>
+          <a:prstGeom prst="rect">
+            <a:avLst/>
+          </a:prstGeom>
+          <a:noFill/>
+          <a:ln/>
+        </p:spPr>
+        <p:txBody>
+          <a:bodyPr wrap="square" lIns="0" tIns="114300" rIns="114300" bIns="0" rtlCol="0" anchor="ctr"/>
           <a:lstStyle/>
           <a:p>
             <a:pPr algn="r" indent="0" marL="0">
@@ -10887,17 +12447,17 @@
         </p:nvSpPr>
         <p:spPr>
           <a:xfrm>
-            <a:off x="6257769" y="1982116"/>
-            <a:ext cx="528234" cy="228600"/>
-          </a:xfrm>
-          <a:prstGeom prst="rect">
-            <a:avLst/>
-          </a:prstGeom>
-          <a:noFill/>
-          <a:ln/>
-        </p:spPr>
-        <p:txBody>
-          <a:bodyPr wrap="square" lIns="47625" tIns="114300" rIns="114300" bIns="47625" rtlCol="0" anchor="ctr"/>
+            <a:off x="6257769" y="2044005"/>
+            <a:ext cx="528234" cy="133350"/>
+          </a:xfrm>
+          <a:prstGeom prst="rect">
+            <a:avLst/>
+          </a:prstGeom>
+          <a:noFill/>
+          <a:ln/>
+        </p:spPr>
+        <p:txBody>
+          <a:bodyPr wrap="square" lIns="0" tIns="114300" rIns="114300" bIns="0" rtlCol="0" anchor="ctr"/>
           <a:lstStyle/>
           <a:p>
             <a:pPr algn="l" indent="0" marL="0">
@@ -10926,17 +12486,17 @@
         </p:nvSpPr>
         <p:spPr>
           <a:xfrm>
-            <a:off x="6257769" y="2210716"/>
-            <a:ext cx="528234" cy="470892"/>
-          </a:xfrm>
-          <a:prstGeom prst="rect">
-            <a:avLst/>
-          </a:prstGeom>
-          <a:noFill/>
-          <a:ln/>
-        </p:spPr>
-        <p:txBody>
-          <a:bodyPr wrap="square" lIns="38100" tIns="114300" rIns="114300" bIns="38100" rtlCol="0" anchor="ctr"/>
+            <a:off x="6257769" y="2400895"/>
+            <a:ext cx="528234" cy="114300"/>
+          </a:xfrm>
+          <a:prstGeom prst="rect">
+            <a:avLst/>
+          </a:prstGeom>
+          <a:noFill/>
+          <a:ln/>
+        </p:spPr>
+        <p:txBody>
+          <a:bodyPr wrap="square" lIns="0" tIns="114300" rIns="114300" bIns="0" rtlCol="0" anchor="ctr"/>
           <a:lstStyle/>
           <a:p>
             <a:pPr algn="l" indent="0" marL="0">
@@ -10965,17 +12525,17 @@
         </p:nvSpPr>
         <p:spPr>
           <a:xfrm>
-            <a:off x="8286742" y="2210716"/>
-            <a:ext cx="723831" cy="470892"/>
-          </a:xfrm>
-          <a:prstGeom prst="rect">
-            <a:avLst/>
-          </a:prstGeom>
-          <a:noFill/>
-          <a:ln/>
-        </p:spPr>
-        <p:txBody>
-          <a:bodyPr wrap="square" lIns="38100" tIns="114300" rIns="114300" bIns="38100" rtlCol="0" anchor="ctr"/>
+            <a:off x="8286742" y="2400895"/>
+            <a:ext cx="723831" cy="114300"/>
+          </a:xfrm>
+          <a:prstGeom prst="rect">
+            <a:avLst/>
+          </a:prstGeom>
+          <a:noFill/>
+          <a:ln/>
+        </p:spPr>
+        <p:txBody>
+          <a:bodyPr wrap="square" lIns="0" tIns="114300" rIns="114300" bIns="0" rtlCol="0" anchor="ctr"/>
           <a:lstStyle/>
           <a:p>
             <a:pPr algn="r" indent="0" marL="0">
@@ -11004,17 +12564,17 @@
         </p:nvSpPr>
         <p:spPr>
           <a:xfrm>
-            <a:off x="6257769" y="2681608"/>
-            <a:ext cx="528234" cy="480120"/>
-          </a:xfrm>
-          <a:prstGeom prst="rect">
-            <a:avLst/>
-          </a:prstGeom>
-          <a:noFill/>
-          <a:ln/>
-        </p:spPr>
-        <p:txBody>
-          <a:bodyPr wrap="square" lIns="38100" tIns="114300" rIns="114300" bIns="38100" rtlCol="0" anchor="ctr"/>
+            <a:off x="6257769" y="2878782"/>
+            <a:ext cx="528234" cy="114300"/>
+          </a:xfrm>
+          <a:prstGeom prst="rect">
+            <a:avLst/>
+          </a:prstGeom>
+          <a:noFill/>
+          <a:ln/>
+        </p:spPr>
+        <p:txBody>
+          <a:bodyPr wrap="square" lIns="0" tIns="114300" rIns="114300" bIns="0" rtlCol="0" anchor="ctr"/>
           <a:lstStyle/>
           <a:p>
             <a:pPr algn="l" indent="0" marL="0">
@@ -11043,17 +12603,17 @@
         </p:nvSpPr>
         <p:spPr>
           <a:xfrm>
-            <a:off x="8286742" y="2681608"/>
-            <a:ext cx="723831" cy="480120"/>
-          </a:xfrm>
-          <a:prstGeom prst="rect">
-            <a:avLst/>
-          </a:prstGeom>
-          <a:noFill/>
-          <a:ln/>
-        </p:spPr>
-        <p:txBody>
-          <a:bodyPr wrap="square" lIns="38100" tIns="114300" rIns="114300" bIns="38100" rtlCol="0" anchor="ctr"/>
+            <a:off x="8286742" y="2878782"/>
+            <a:ext cx="723831" cy="114300"/>
+          </a:xfrm>
+          <a:prstGeom prst="rect">
+            <a:avLst/>
+          </a:prstGeom>
+          <a:noFill/>
+          <a:ln/>
+        </p:spPr>
+        <p:txBody>
+          <a:bodyPr wrap="square" lIns="0" tIns="114300" rIns="114300" bIns="0" rtlCol="0" anchor="ctr"/>
           <a:lstStyle/>
           <a:p>
             <a:pPr algn="r" indent="0" marL="0">
@@ -11082,17 +12642,17 @@
         </p:nvSpPr>
         <p:spPr>
           <a:xfrm>
-            <a:off x="6257769" y="3161728"/>
-            <a:ext cx="528234" cy="480120"/>
-          </a:xfrm>
-          <a:prstGeom prst="rect">
-            <a:avLst/>
-          </a:prstGeom>
-          <a:noFill/>
-          <a:ln/>
-        </p:spPr>
-        <p:txBody>
-          <a:bodyPr wrap="square" lIns="38100" tIns="114300" rIns="114300" bIns="38100" rtlCol="0" anchor="ctr"/>
+            <a:off x="6257769" y="3358902"/>
+            <a:ext cx="528234" cy="114300"/>
+          </a:xfrm>
+          <a:prstGeom prst="rect">
+            <a:avLst/>
+          </a:prstGeom>
+          <a:noFill/>
+          <a:ln/>
+        </p:spPr>
+        <p:txBody>
+          <a:bodyPr wrap="square" lIns="0" tIns="114300" rIns="114300" bIns="0" rtlCol="0" anchor="ctr"/>
           <a:lstStyle/>
           <a:p>
             <a:pPr algn="l" indent="0" marL="0">
@@ -11121,17 +12681,17 @@
         </p:nvSpPr>
         <p:spPr>
           <a:xfrm>
-            <a:off x="8286742" y="3161728"/>
-            <a:ext cx="723831" cy="480120"/>
-          </a:xfrm>
-          <a:prstGeom prst="rect">
-            <a:avLst/>
-          </a:prstGeom>
-          <a:noFill/>
-          <a:ln/>
-        </p:spPr>
-        <p:txBody>
-          <a:bodyPr wrap="square" lIns="38100" tIns="114300" rIns="114300" bIns="38100" rtlCol="0" anchor="ctr"/>
+            <a:off x="8286742" y="3358902"/>
+            <a:ext cx="723831" cy="114300"/>
+          </a:xfrm>
+          <a:prstGeom prst="rect">
+            <a:avLst/>
+          </a:prstGeom>
+          <a:noFill/>
+          <a:ln/>
+        </p:spPr>
+        <p:txBody>
+          <a:bodyPr wrap="square" lIns="0" tIns="114300" rIns="114300" bIns="0" rtlCol="0" anchor="ctr"/>
           <a:lstStyle/>
           <a:p>
             <a:pPr algn="r" indent="0" marL="0">
@@ -11160,17 +12720,17 @@
         </p:nvSpPr>
         <p:spPr>
           <a:xfrm>
-            <a:off x="6257769" y="3641847"/>
-            <a:ext cx="528234" cy="480120"/>
-          </a:xfrm>
-          <a:prstGeom prst="rect">
-            <a:avLst/>
-          </a:prstGeom>
-          <a:noFill/>
-          <a:ln/>
-        </p:spPr>
-        <p:txBody>
-          <a:bodyPr wrap="square" lIns="38100" tIns="114300" rIns="114300" bIns="38100" rtlCol="0" anchor="ctr"/>
+            <a:off x="6257769" y="3839021"/>
+            <a:ext cx="528234" cy="114300"/>
+          </a:xfrm>
+          <a:prstGeom prst="rect">
+            <a:avLst/>
+          </a:prstGeom>
+          <a:noFill/>
+          <a:ln/>
+        </p:spPr>
+        <p:txBody>
+          <a:bodyPr wrap="square" lIns="0" tIns="114300" rIns="114300" bIns="0" rtlCol="0" anchor="ctr"/>
           <a:lstStyle/>
           <a:p>
             <a:pPr algn="l" indent="0" marL="0">
@@ -11199,17 +12759,17 @@
         </p:nvSpPr>
         <p:spPr>
           <a:xfrm>
-            <a:off x="8286742" y="3641847"/>
-            <a:ext cx="723831" cy="480120"/>
-          </a:xfrm>
-          <a:prstGeom prst="rect">
-            <a:avLst/>
-          </a:prstGeom>
-          <a:noFill/>
-          <a:ln/>
-        </p:spPr>
-        <p:txBody>
-          <a:bodyPr wrap="square" lIns="38100" tIns="114300" rIns="114300" bIns="38100" rtlCol="0" anchor="ctr"/>
+            <a:off x="8286742" y="3839021"/>
+            <a:ext cx="723831" cy="114300"/>
+          </a:xfrm>
+          <a:prstGeom prst="rect">
+            <a:avLst/>
+          </a:prstGeom>
+          <a:noFill/>
+          <a:ln/>
+        </p:spPr>
+        <p:txBody>
+          <a:bodyPr wrap="square" lIns="0" tIns="114300" rIns="114300" bIns="0" rtlCol="0" anchor="ctr"/>
           <a:lstStyle/>
           <a:p>
             <a:pPr algn="r" indent="0" marL="0">
@@ -11238,17 +12798,17 @@
         </p:nvSpPr>
         <p:spPr>
           <a:xfrm>
-            <a:off x="10645500" y="3641847"/>
-            <a:ext cx="860412" cy="480120"/>
-          </a:xfrm>
-          <a:prstGeom prst="rect">
-            <a:avLst/>
-          </a:prstGeom>
-          <a:noFill/>
-          <a:ln/>
-        </p:spPr>
-        <p:txBody>
-          <a:bodyPr wrap="square" lIns="38100" tIns="114300" rIns="114300" bIns="38100" rtlCol="0" anchor="ctr"/>
+            <a:off x="10645500" y="3834259"/>
+            <a:ext cx="860412" cy="123825"/>
+          </a:xfrm>
+          <a:prstGeom prst="rect">
+            <a:avLst/>
+          </a:prstGeom>
+          <a:noFill/>
+          <a:ln/>
+        </p:spPr>
+        <p:txBody>
+          <a:bodyPr wrap="square" lIns="0" tIns="114300" rIns="114300" bIns="0" rtlCol="0" anchor="ctr"/>
           <a:lstStyle/>
           <a:p>
             <a:pPr algn="r" indent="0" marL="0">
@@ -11277,17 +12837,17 @@
         </p:nvSpPr>
         <p:spPr>
           <a:xfrm>
-            <a:off x="6257769" y="4121967"/>
-            <a:ext cx="528234" cy="480120"/>
-          </a:xfrm>
-          <a:prstGeom prst="rect">
-            <a:avLst/>
-          </a:prstGeom>
-          <a:noFill/>
-          <a:ln/>
-        </p:spPr>
-        <p:txBody>
-          <a:bodyPr wrap="square" lIns="38100" tIns="114300" rIns="114300" bIns="38100" rtlCol="0" anchor="ctr"/>
+            <a:off x="6257769" y="4319141"/>
+            <a:ext cx="528234" cy="114300"/>
+          </a:xfrm>
+          <a:prstGeom prst="rect">
+            <a:avLst/>
+          </a:prstGeom>
+          <a:noFill/>
+          <a:ln/>
+        </p:spPr>
+        <p:txBody>
+          <a:bodyPr wrap="square" lIns="0" tIns="114300" rIns="114300" bIns="0" rtlCol="0" anchor="ctr"/>
           <a:lstStyle/>
           <a:p>
             <a:pPr algn="l" indent="0" marL="0">
@@ -11316,17 +12876,17 @@
         </p:nvSpPr>
         <p:spPr>
           <a:xfrm>
-            <a:off x="8286742" y="4121967"/>
-            <a:ext cx="723831" cy="480120"/>
-          </a:xfrm>
-          <a:prstGeom prst="rect">
-            <a:avLst/>
-          </a:prstGeom>
-          <a:noFill/>
-          <a:ln/>
-        </p:spPr>
-        <p:txBody>
-          <a:bodyPr wrap="square" lIns="38100" tIns="114300" rIns="114300" bIns="38100" rtlCol="0" anchor="ctr"/>
+            <a:off x="8286742" y="4319141"/>
+            <a:ext cx="723831" cy="114300"/>
+          </a:xfrm>
+          <a:prstGeom prst="rect">
+            <a:avLst/>
+          </a:prstGeom>
+          <a:noFill/>
+          <a:ln/>
+        </p:spPr>
+        <p:txBody>
+          <a:bodyPr wrap="square" lIns="0" tIns="114300" rIns="114300" bIns="0" rtlCol="0" anchor="ctr"/>
           <a:lstStyle/>
           <a:p>
             <a:pPr algn="r" indent="0" marL="0">
@@ -11355,17 +12915,17 @@
         </p:nvSpPr>
         <p:spPr>
           <a:xfrm>
-            <a:off x="10645500" y="4121967"/>
-            <a:ext cx="860412" cy="480120"/>
-          </a:xfrm>
-          <a:prstGeom prst="rect">
-            <a:avLst/>
-          </a:prstGeom>
-          <a:noFill/>
-          <a:ln/>
-        </p:spPr>
-        <p:txBody>
-          <a:bodyPr wrap="square" lIns="38100" tIns="114300" rIns="114300" bIns="38100" rtlCol="0" anchor="ctr"/>
+            <a:off x="10645500" y="4314379"/>
+            <a:ext cx="860412" cy="123825"/>
+          </a:xfrm>
+          <a:prstGeom prst="rect">
+            <a:avLst/>
+          </a:prstGeom>
+          <a:noFill/>
+          <a:ln/>
+        </p:spPr>
+        <p:txBody>
+          <a:bodyPr wrap="square" lIns="0" tIns="114300" rIns="114300" bIns="0" rtlCol="0" anchor="ctr"/>
           <a:lstStyle/>
           <a:p>
             <a:pPr algn="r" indent="0" marL="0">
@@ -11394,17 +12954,17 @@
         </p:nvSpPr>
         <p:spPr>
           <a:xfrm>
-            <a:off x="6257769" y="4602086"/>
-            <a:ext cx="528234" cy="480120"/>
-          </a:xfrm>
-          <a:prstGeom prst="rect">
-            <a:avLst/>
-          </a:prstGeom>
-          <a:noFill/>
-          <a:ln/>
-        </p:spPr>
-        <p:txBody>
-          <a:bodyPr wrap="square" lIns="38100" tIns="114300" rIns="114300" bIns="38100" rtlCol="0" anchor="ctr"/>
+            <a:off x="6257769" y="4799261"/>
+            <a:ext cx="528234" cy="114300"/>
+          </a:xfrm>
+          <a:prstGeom prst="rect">
+            <a:avLst/>
+          </a:prstGeom>
+          <a:noFill/>
+          <a:ln/>
+        </p:spPr>
+        <p:txBody>
+          <a:bodyPr wrap="square" lIns="0" tIns="114300" rIns="114300" bIns="0" rtlCol="0" anchor="ctr"/>
           <a:lstStyle/>
           <a:p>
             <a:pPr algn="l" indent="0" marL="0">
@@ -11433,17 +12993,17 @@
         </p:nvSpPr>
         <p:spPr>
           <a:xfrm>
-            <a:off x="10645500" y="4602086"/>
-            <a:ext cx="860412" cy="480120"/>
-          </a:xfrm>
-          <a:prstGeom prst="rect">
-            <a:avLst/>
-          </a:prstGeom>
-          <a:noFill/>
-          <a:ln/>
-        </p:spPr>
-        <p:txBody>
-          <a:bodyPr wrap="square" lIns="38100" tIns="114300" rIns="114300" bIns="38100" rtlCol="0" anchor="ctr"/>
+            <a:off x="10645500" y="4794498"/>
+            <a:ext cx="860412" cy="123825"/>
+          </a:xfrm>
+          <a:prstGeom prst="rect">
+            <a:avLst/>
+          </a:prstGeom>
+          <a:noFill/>
+          <a:ln/>
+        </p:spPr>
+        <p:txBody>
+          <a:bodyPr wrap="square" lIns="0" tIns="114300" rIns="114300" bIns="0" rtlCol="0" anchor="ctr"/>
           <a:lstStyle/>
           <a:p>
             <a:pPr algn="r" indent="0" marL="0">
@@ -11472,17 +13032,17 @@
         </p:nvSpPr>
         <p:spPr>
           <a:xfrm>
-            <a:off x="6748950" y="5082206"/>
-            <a:ext cx="743912" cy="471488"/>
-          </a:xfrm>
-          <a:prstGeom prst="rect">
-            <a:avLst/>
-          </a:prstGeom>
-          <a:noFill/>
-          <a:ln/>
-        </p:spPr>
-        <p:txBody>
-          <a:bodyPr wrap="square" lIns="38100" tIns="114300" rIns="114300" bIns="38100" rtlCol="0" anchor="ctr"/>
+            <a:off x="6748950" y="5277445"/>
+            <a:ext cx="743912" cy="114300"/>
+          </a:xfrm>
+          <a:prstGeom prst="rect">
+            <a:avLst/>
+          </a:prstGeom>
+          <a:noFill/>
+          <a:ln/>
+        </p:spPr>
+        <p:txBody>
+          <a:bodyPr wrap="square" lIns="0" tIns="114300" rIns="114300" bIns="0" rtlCol="0" anchor="ctr"/>
           <a:lstStyle/>
           <a:p>
             <a:pPr algn="r" indent="0" marL="0">
@@ -11511,17 +13071,17 @@
         </p:nvSpPr>
         <p:spPr>
           <a:xfrm>
-            <a:off x="7468413" y="5082206"/>
-            <a:ext cx="839411" cy="471488"/>
-          </a:xfrm>
-          <a:prstGeom prst="rect">
-            <a:avLst/>
-          </a:prstGeom>
-          <a:noFill/>
-          <a:ln/>
-        </p:spPr>
-        <p:txBody>
-          <a:bodyPr wrap="square" lIns="38100" tIns="114300" rIns="114300" bIns="38100" rtlCol="0" anchor="ctr"/>
+            <a:off x="7468413" y="5277445"/>
+            <a:ext cx="839411" cy="114300"/>
+          </a:xfrm>
+          <a:prstGeom prst="rect">
+            <a:avLst/>
+          </a:prstGeom>
+          <a:noFill/>
+          <a:ln/>
+        </p:spPr>
+        <p:txBody>
+          <a:bodyPr wrap="square" lIns="0" tIns="114300" rIns="114300" bIns="0" rtlCol="0" anchor="ctr"/>
           <a:lstStyle/>
           <a:p>
             <a:pPr algn="r" indent="0" marL="0">
@@ -11550,17 +13110,17 @@
         </p:nvSpPr>
         <p:spPr>
           <a:xfrm>
-            <a:off x="8985178" y="5082206"/>
-            <a:ext cx="871909" cy="471488"/>
-          </a:xfrm>
-          <a:prstGeom prst="rect">
-            <a:avLst/>
-          </a:prstGeom>
-          <a:noFill/>
-          <a:ln/>
-        </p:spPr>
-        <p:txBody>
-          <a:bodyPr wrap="square" lIns="38100" tIns="114300" rIns="114300" bIns="38100" rtlCol="0" anchor="ctr"/>
+            <a:off x="8985178" y="5277445"/>
+            <a:ext cx="871909" cy="114300"/>
+          </a:xfrm>
+          <a:prstGeom prst="rect">
+            <a:avLst/>
+          </a:prstGeom>
+          <a:noFill/>
+          <a:ln/>
+        </p:spPr>
+        <p:txBody>
+          <a:bodyPr wrap="square" lIns="0" tIns="114300" rIns="114300" bIns="0" rtlCol="0" anchor="ctr"/>
           <a:lstStyle/>
           <a:p>
             <a:pPr algn="r" indent="0" marL="0">
@@ -11589,17 +13149,17 @@
         </p:nvSpPr>
         <p:spPr>
           <a:xfrm>
-            <a:off x="9832683" y="5082206"/>
-            <a:ext cx="837878" cy="471488"/>
-          </a:xfrm>
-          <a:prstGeom prst="rect">
-            <a:avLst/>
-          </a:prstGeom>
-          <a:noFill/>
-          <a:ln/>
-        </p:spPr>
-        <p:txBody>
-          <a:bodyPr wrap="square" lIns="38100" tIns="114300" rIns="114300" bIns="38100" rtlCol="0" anchor="ctr"/>
+            <a:off x="9832683" y="5277445"/>
+            <a:ext cx="837878" cy="114300"/>
+          </a:xfrm>
+          <a:prstGeom prst="rect">
+            <a:avLst/>
+          </a:prstGeom>
+          <a:noFill/>
+          <a:ln/>
+        </p:spPr>
+        <p:txBody>
+          <a:bodyPr wrap="square" lIns="0" tIns="114300" rIns="114300" bIns="0" rtlCol="0" anchor="ctr"/>
           <a:lstStyle/>
           <a:p>
             <a:pPr algn="r" indent="0" marL="0">
@@ -11706,17 +13266,17 @@
         </p:nvSpPr>
         <p:spPr>
           <a:xfrm>
-            <a:off x="1896428" y="2210716"/>
-            <a:ext cx="839411" cy="470892"/>
-          </a:xfrm>
-          <a:prstGeom prst="rect">
-            <a:avLst/>
-          </a:prstGeom>
-          <a:noFill/>
-          <a:ln/>
-        </p:spPr>
-        <p:txBody>
-          <a:bodyPr wrap="square" lIns="38100" tIns="114300" rIns="114300" bIns="38100" rtlCol="0" anchor="ctr"/>
+            <a:off x="1896428" y="2400895"/>
+            <a:ext cx="839411" cy="114300"/>
+          </a:xfrm>
+          <a:prstGeom prst="rect">
+            <a:avLst/>
+          </a:prstGeom>
+          <a:noFill/>
+          <a:ln/>
+        </p:spPr>
+        <p:txBody>
+          <a:bodyPr wrap="square" lIns="0" tIns="114300" rIns="114300" bIns="0" rtlCol="0" anchor="ctr"/>
           <a:lstStyle/>
           <a:p>
             <a:pPr algn="r" indent="0" marL="0">
@@ -11745,17 +13305,17 @@
         </p:nvSpPr>
         <p:spPr>
           <a:xfrm>
-            <a:off x="3413192" y="2210716"/>
-            <a:ext cx="871909" cy="470892"/>
-          </a:xfrm>
-          <a:prstGeom prst="rect">
-            <a:avLst/>
-          </a:prstGeom>
-          <a:noFill/>
-          <a:ln/>
-        </p:spPr>
-        <p:txBody>
-          <a:bodyPr wrap="square" lIns="38100" tIns="114300" rIns="114300" bIns="38100" rtlCol="0" anchor="ctr"/>
+            <a:off x="3413192" y="2400895"/>
+            <a:ext cx="871909" cy="114300"/>
+          </a:xfrm>
+          <a:prstGeom prst="rect">
+            <a:avLst/>
+          </a:prstGeom>
+          <a:noFill/>
+          <a:ln/>
+        </p:spPr>
+        <p:txBody>
+          <a:bodyPr wrap="square" lIns="0" tIns="114300" rIns="114300" bIns="0" rtlCol="0" anchor="ctr"/>
           <a:lstStyle/>
           <a:p>
             <a:pPr algn="r" indent="0" marL="0">
@@ -11784,17 +13344,17 @@
         </p:nvSpPr>
         <p:spPr>
           <a:xfrm>
-            <a:off x="4260697" y="2210716"/>
-            <a:ext cx="837878" cy="470892"/>
-          </a:xfrm>
-          <a:prstGeom prst="rect">
-            <a:avLst/>
-          </a:prstGeom>
-          <a:noFill/>
-          <a:ln/>
-        </p:spPr>
-        <p:txBody>
-          <a:bodyPr wrap="square" lIns="38100" tIns="114300" rIns="114300" bIns="38100" rtlCol="0" anchor="ctr"/>
+            <a:off x="4260697" y="2377083"/>
+            <a:ext cx="837878" cy="114300"/>
+          </a:xfrm>
+          <a:prstGeom prst="rect">
+            <a:avLst/>
+          </a:prstGeom>
+          <a:noFill/>
+          <a:ln/>
+        </p:spPr>
+        <p:txBody>
+          <a:bodyPr wrap="square" lIns="0" tIns="114300" rIns="114300" bIns="0" rtlCol="0" anchor="ctr"/>
           <a:lstStyle/>
           <a:p>
             <a:pPr algn="r" indent="0" marL="0">
@@ -11823,17 +13383,17 @@
         </p:nvSpPr>
         <p:spPr>
           <a:xfrm>
-            <a:off x="1896428" y="2681608"/>
-            <a:ext cx="839411" cy="480120"/>
-          </a:xfrm>
-          <a:prstGeom prst="rect">
-            <a:avLst/>
-          </a:prstGeom>
-          <a:noFill/>
-          <a:ln/>
-        </p:spPr>
-        <p:txBody>
-          <a:bodyPr wrap="square" lIns="38100" tIns="114300" rIns="114300" bIns="38100" rtlCol="0" anchor="ctr"/>
+            <a:off x="1896428" y="2878782"/>
+            <a:ext cx="839411" cy="114300"/>
+          </a:xfrm>
+          <a:prstGeom prst="rect">
+            <a:avLst/>
+          </a:prstGeom>
+          <a:noFill/>
+          <a:ln/>
+        </p:spPr>
+        <p:txBody>
+          <a:bodyPr wrap="square" lIns="0" tIns="114300" rIns="114300" bIns="0" rtlCol="0" anchor="ctr"/>
           <a:lstStyle/>
           <a:p>
             <a:pPr algn="r" indent="0" marL="0">
@@ -11862,17 +13422,17 @@
         </p:nvSpPr>
         <p:spPr>
           <a:xfrm>
-            <a:off x="1896428" y="3161728"/>
-            <a:ext cx="839411" cy="480120"/>
-          </a:xfrm>
-          <a:prstGeom prst="rect">
-            <a:avLst/>
-          </a:prstGeom>
-          <a:noFill/>
-          <a:ln/>
-        </p:spPr>
-        <p:txBody>
-          <a:bodyPr wrap="square" lIns="38100" tIns="114300" rIns="114300" bIns="38100" rtlCol="0" anchor="ctr"/>
+            <a:off x="1896428" y="3358902"/>
+            <a:ext cx="839411" cy="114300"/>
+          </a:xfrm>
+          <a:prstGeom prst="rect">
+            <a:avLst/>
+          </a:prstGeom>
+          <a:noFill/>
+          <a:ln/>
+        </p:spPr>
+        <p:txBody>
+          <a:bodyPr wrap="square" lIns="0" tIns="114300" rIns="114300" bIns="0" rtlCol="0" anchor="ctr"/>
           <a:lstStyle/>
           <a:p>
             <a:pPr algn="r" indent="0" marL="0">
@@ -11901,17 +13461,17 @@
         </p:nvSpPr>
         <p:spPr>
           <a:xfrm>
-            <a:off x="4260697" y="3161728"/>
-            <a:ext cx="837878" cy="480120"/>
-          </a:xfrm>
-          <a:prstGeom prst="rect">
-            <a:avLst/>
-          </a:prstGeom>
-          <a:noFill/>
-          <a:ln/>
-        </p:spPr>
-        <p:txBody>
-          <a:bodyPr wrap="square" lIns="38100" tIns="114300" rIns="114300" bIns="38100" rtlCol="0" anchor="ctr"/>
+            <a:off x="4260697" y="3335089"/>
+            <a:ext cx="837878" cy="114300"/>
+          </a:xfrm>
+          <a:prstGeom prst="rect">
+            <a:avLst/>
+          </a:prstGeom>
+          <a:noFill/>
+          <a:ln/>
+        </p:spPr>
+        <p:txBody>
+          <a:bodyPr wrap="square" lIns="0" tIns="114300" rIns="114300" bIns="0" rtlCol="0" anchor="ctr"/>
           <a:lstStyle/>
           <a:p>
             <a:pPr algn="r" indent="0" marL="0">
@@ -11940,17 +13500,17 @@
         </p:nvSpPr>
         <p:spPr>
           <a:xfrm>
-            <a:off x="1896428" y="3641847"/>
-            <a:ext cx="839411" cy="480120"/>
-          </a:xfrm>
-          <a:prstGeom prst="rect">
-            <a:avLst/>
-          </a:prstGeom>
-          <a:noFill/>
-          <a:ln/>
-        </p:spPr>
-        <p:txBody>
-          <a:bodyPr wrap="square" lIns="38100" tIns="114300" rIns="114300" bIns="38100" rtlCol="0" anchor="ctr"/>
+            <a:off x="1896428" y="3839021"/>
+            <a:ext cx="839411" cy="114300"/>
+          </a:xfrm>
+          <a:prstGeom prst="rect">
+            <a:avLst/>
+          </a:prstGeom>
+          <a:noFill/>
+          <a:ln/>
+        </p:spPr>
+        <p:txBody>
+          <a:bodyPr wrap="square" lIns="0" tIns="114300" rIns="114300" bIns="0" rtlCol="0" anchor="ctr"/>
           <a:lstStyle/>
           <a:p>
             <a:pPr algn="r" indent="0" marL="0">
@@ -11979,17 +13539,17 @@
         </p:nvSpPr>
         <p:spPr>
           <a:xfrm>
-            <a:off x="1176964" y="4121967"/>
-            <a:ext cx="743912" cy="480120"/>
-          </a:xfrm>
-          <a:prstGeom prst="rect">
-            <a:avLst/>
-          </a:prstGeom>
-          <a:noFill/>
-          <a:ln/>
-        </p:spPr>
-        <p:txBody>
-          <a:bodyPr wrap="square" lIns="38100" tIns="114300" rIns="114300" bIns="38100" rtlCol="0" anchor="ctr"/>
+            <a:off x="1176964" y="4319141"/>
+            <a:ext cx="743912" cy="114300"/>
+          </a:xfrm>
+          <a:prstGeom prst="rect">
+            <a:avLst/>
+          </a:prstGeom>
+          <a:noFill/>
+          <a:ln/>
+        </p:spPr>
+        <p:txBody>
+          <a:bodyPr wrap="square" lIns="0" tIns="114300" rIns="114300" bIns="0" rtlCol="0" anchor="ctr"/>
           <a:lstStyle/>
           <a:p>
             <a:pPr algn="r" indent="0" marL="0">
@@ -12018,17 +13578,17 @@
         </p:nvSpPr>
         <p:spPr>
           <a:xfrm>
-            <a:off x="1896428" y="4121967"/>
-            <a:ext cx="839411" cy="480120"/>
-          </a:xfrm>
-          <a:prstGeom prst="rect">
-            <a:avLst/>
-          </a:prstGeom>
-          <a:noFill/>
-          <a:ln/>
-        </p:spPr>
-        <p:txBody>
-          <a:bodyPr wrap="square" lIns="38100" tIns="114300" rIns="114300" bIns="38100" rtlCol="0" anchor="ctr"/>
+            <a:off x="1896428" y="4319141"/>
+            <a:ext cx="839411" cy="114300"/>
+          </a:xfrm>
+          <a:prstGeom prst="rect">
+            <a:avLst/>
+          </a:prstGeom>
+          <a:noFill/>
+          <a:ln/>
+        </p:spPr>
+        <p:txBody>
+          <a:bodyPr wrap="square" lIns="0" tIns="114300" rIns="114300" bIns="0" rtlCol="0" anchor="ctr"/>
           <a:lstStyle/>
           <a:p>
             <a:pPr algn="r" indent="0" marL="0">
@@ -12057,17 +13617,17 @@
         </p:nvSpPr>
         <p:spPr>
           <a:xfrm>
-            <a:off x="4260697" y="4121967"/>
-            <a:ext cx="837878" cy="480120"/>
-          </a:xfrm>
-          <a:prstGeom prst="rect">
-            <a:avLst/>
-          </a:prstGeom>
-          <a:noFill/>
-          <a:ln/>
-        </p:spPr>
-        <p:txBody>
-          <a:bodyPr wrap="square" lIns="38100" tIns="114300" rIns="114300" bIns="38100" rtlCol="0" anchor="ctr"/>
+            <a:off x="4260697" y="4295329"/>
+            <a:ext cx="837878" cy="114300"/>
+          </a:xfrm>
+          <a:prstGeom prst="rect">
+            <a:avLst/>
+          </a:prstGeom>
+          <a:noFill/>
+          <a:ln/>
+        </p:spPr>
+        <p:txBody>
+          <a:bodyPr wrap="square" lIns="0" tIns="114300" rIns="114300" bIns="0" rtlCol="0" anchor="ctr"/>
           <a:lstStyle/>
           <a:p>
             <a:pPr algn="r" indent="0" marL="0">
@@ -12096,17 +13656,17 @@
         </p:nvSpPr>
         <p:spPr>
           <a:xfrm>
-            <a:off x="1176964" y="4602086"/>
-            <a:ext cx="743912" cy="480120"/>
-          </a:xfrm>
-          <a:prstGeom prst="rect">
-            <a:avLst/>
-          </a:prstGeom>
-          <a:noFill/>
-          <a:ln/>
-        </p:spPr>
-        <p:txBody>
-          <a:bodyPr wrap="square" lIns="38100" tIns="114300" rIns="114300" bIns="38100" rtlCol="0" anchor="ctr"/>
+            <a:off x="1176964" y="4799261"/>
+            <a:ext cx="743912" cy="114300"/>
+          </a:xfrm>
+          <a:prstGeom prst="rect">
+            <a:avLst/>
+          </a:prstGeom>
+          <a:noFill/>
+          <a:ln/>
+        </p:spPr>
+        <p:txBody>
+          <a:bodyPr wrap="square" lIns="0" tIns="114300" rIns="114300" bIns="0" rtlCol="0" anchor="ctr"/>
           <a:lstStyle/>
           <a:p>
             <a:pPr algn="r" indent="0" marL="0">
@@ -12135,17 +13695,17 @@
         </p:nvSpPr>
         <p:spPr>
           <a:xfrm>
-            <a:off x="1896428" y="4602086"/>
-            <a:ext cx="839411" cy="480120"/>
-          </a:xfrm>
-          <a:prstGeom prst="rect">
-            <a:avLst/>
-          </a:prstGeom>
-          <a:noFill/>
-          <a:ln/>
-        </p:spPr>
-        <p:txBody>
-          <a:bodyPr wrap="square" lIns="38100" tIns="114300" rIns="114300" bIns="38100" rtlCol="0" anchor="ctr"/>
+            <a:off x="1896428" y="4799261"/>
+            <a:ext cx="839411" cy="114300"/>
+          </a:xfrm>
+          <a:prstGeom prst="rect">
+            <a:avLst/>
+          </a:prstGeom>
+          <a:noFill/>
+          <a:ln/>
+        </p:spPr>
+        <p:txBody>
+          <a:bodyPr wrap="square" lIns="0" tIns="114300" rIns="114300" bIns="0" rtlCol="0" anchor="ctr"/>
           <a:lstStyle/>
           <a:p>
             <a:pPr algn="r" indent="0" marL="0">
@@ -12174,17 +13734,17 @@
         </p:nvSpPr>
         <p:spPr>
           <a:xfrm>
-            <a:off x="4260697" y="4602086"/>
-            <a:ext cx="837878" cy="480120"/>
-          </a:xfrm>
-          <a:prstGeom prst="rect">
-            <a:avLst/>
-          </a:prstGeom>
-          <a:noFill/>
-          <a:ln/>
-        </p:spPr>
-        <p:txBody>
-          <a:bodyPr wrap="square" lIns="38100" tIns="114300" rIns="114300" bIns="38100" rtlCol="0" anchor="ctr"/>
+            <a:off x="4260697" y="4775448"/>
+            <a:ext cx="837878" cy="114300"/>
+          </a:xfrm>
+          <a:prstGeom prst="rect">
+            <a:avLst/>
+          </a:prstGeom>
+          <a:noFill/>
+          <a:ln/>
+        </p:spPr>
+        <p:txBody>
+          <a:bodyPr wrap="square" lIns="0" tIns="114300" rIns="114300" bIns="0" rtlCol="0" anchor="ctr"/>
           <a:lstStyle/>
           <a:p>
             <a:pPr algn="r" indent="0" marL="0">
@@ -12213,17 +13773,17 @@
         </p:nvSpPr>
         <p:spPr>
           <a:xfrm>
-            <a:off x="1176964" y="5082206"/>
-            <a:ext cx="743912" cy="471488"/>
-          </a:xfrm>
-          <a:prstGeom prst="rect">
-            <a:avLst/>
-          </a:prstGeom>
-          <a:noFill/>
-          <a:ln/>
-        </p:spPr>
-        <p:txBody>
-          <a:bodyPr wrap="square" lIns="38100" tIns="114300" rIns="114300" bIns="38100" rtlCol="0" anchor="ctr"/>
+            <a:off x="1176964" y="5277445"/>
+            <a:ext cx="743912" cy="114300"/>
+          </a:xfrm>
+          <a:prstGeom prst="rect">
+            <a:avLst/>
+          </a:prstGeom>
+          <a:noFill/>
+          <a:ln/>
+        </p:spPr>
+        <p:txBody>
+          <a:bodyPr wrap="square" lIns="0" tIns="114300" rIns="114300" bIns="0" rtlCol="0" anchor="ctr"/>
           <a:lstStyle/>
           <a:p>
             <a:pPr algn="r" indent="0" marL="0">
@@ -12252,17 +13812,17 @@
         </p:nvSpPr>
         <p:spPr>
           <a:xfrm>
-            <a:off x="7468413" y="2210716"/>
-            <a:ext cx="839411" cy="470892"/>
-          </a:xfrm>
-          <a:prstGeom prst="rect">
-            <a:avLst/>
-          </a:prstGeom>
-          <a:noFill/>
-          <a:ln/>
-        </p:spPr>
-        <p:txBody>
-          <a:bodyPr wrap="square" lIns="38100" tIns="114300" rIns="114300" bIns="38100" rtlCol="0" anchor="ctr"/>
+            <a:off x="7468413" y="2400895"/>
+            <a:ext cx="839411" cy="114300"/>
+          </a:xfrm>
+          <a:prstGeom prst="rect">
+            <a:avLst/>
+          </a:prstGeom>
+          <a:noFill/>
+          <a:ln/>
+        </p:spPr>
+        <p:txBody>
+          <a:bodyPr wrap="square" lIns="0" tIns="114300" rIns="114300" bIns="0" rtlCol="0" anchor="ctr"/>
           <a:lstStyle/>
           <a:p>
             <a:pPr algn="r" indent="0" marL="0">
@@ -12291,17 +13851,17 @@
         </p:nvSpPr>
         <p:spPr>
           <a:xfrm>
-            <a:off x="8985178" y="2210716"/>
-            <a:ext cx="871909" cy="470892"/>
-          </a:xfrm>
-          <a:prstGeom prst="rect">
-            <a:avLst/>
-          </a:prstGeom>
-          <a:noFill/>
-          <a:ln/>
-        </p:spPr>
-        <p:txBody>
-          <a:bodyPr wrap="square" lIns="38100" tIns="114300" rIns="114300" bIns="38100" rtlCol="0" anchor="ctr"/>
+            <a:off x="8985178" y="2400895"/>
+            <a:ext cx="871909" cy="114300"/>
+          </a:xfrm>
+          <a:prstGeom prst="rect">
+            <a:avLst/>
+          </a:prstGeom>
+          <a:noFill/>
+          <a:ln/>
+        </p:spPr>
+        <p:txBody>
+          <a:bodyPr wrap="square" lIns="0" tIns="114300" rIns="114300" bIns="0" rtlCol="0" anchor="ctr"/>
           <a:lstStyle/>
           <a:p>
             <a:pPr algn="r" indent="0" marL="0">
@@ -12330,17 +13890,17 @@
         </p:nvSpPr>
         <p:spPr>
           <a:xfrm>
-            <a:off x="9832683" y="2210716"/>
-            <a:ext cx="837878" cy="470892"/>
-          </a:xfrm>
-          <a:prstGeom prst="rect">
-            <a:avLst/>
-          </a:prstGeom>
-          <a:noFill/>
-          <a:ln/>
-        </p:spPr>
-        <p:txBody>
-          <a:bodyPr wrap="square" lIns="38100" tIns="114300" rIns="114300" bIns="38100" rtlCol="0" anchor="ctr"/>
+            <a:off x="9832683" y="2377083"/>
+            <a:ext cx="837878" cy="114300"/>
+          </a:xfrm>
+          <a:prstGeom prst="rect">
+            <a:avLst/>
+          </a:prstGeom>
+          <a:noFill/>
+          <a:ln/>
+        </p:spPr>
+        <p:txBody>
+          <a:bodyPr wrap="square" lIns="0" tIns="114300" rIns="114300" bIns="0" rtlCol="0" anchor="ctr"/>
           <a:lstStyle/>
           <a:p>
             <a:pPr algn="r" indent="0" marL="0">
@@ -12369,17 +13929,17 @@
         </p:nvSpPr>
         <p:spPr>
           <a:xfrm>
-            <a:off x="7468413" y="2681608"/>
-            <a:ext cx="839411" cy="480120"/>
-          </a:xfrm>
-          <a:prstGeom prst="rect">
-            <a:avLst/>
-          </a:prstGeom>
-          <a:noFill/>
-          <a:ln/>
-        </p:spPr>
-        <p:txBody>
-          <a:bodyPr wrap="square" lIns="38100" tIns="114300" rIns="114300" bIns="38100" rtlCol="0" anchor="ctr"/>
+            <a:off x="7468413" y="2878782"/>
+            <a:ext cx="839411" cy="114300"/>
+          </a:xfrm>
+          <a:prstGeom prst="rect">
+            <a:avLst/>
+          </a:prstGeom>
+          <a:noFill/>
+          <a:ln/>
+        </p:spPr>
+        <p:txBody>
+          <a:bodyPr wrap="square" lIns="0" tIns="114300" rIns="114300" bIns="0" rtlCol="0" anchor="ctr"/>
           <a:lstStyle/>
           <a:p>
             <a:pPr algn="r" indent="0" marL="0">
@@ -12408,17 +13968,17 @@
         </p:nvSpPr>
         <p:spPr>
           <a:xfrm>
-            <a:off x="8985178" y="2681608"/>
-            <a:ext cx="871909" cy="480120"/>
-          </a:xfrm>
-          <a:prstGeom prst="rect">
-            <a:avLst/>
-          </a:prstGeom>
-          <a:noFill/>
-          <a:ln/>
-        </p:spPr>
-        <p:txBody>
-          <a:bodyPr wrap="square" lIns="38100" tIns="114300" rIns="114300" bIns="38100" rtlCol="0" anchor="ctr"/>
+            <a:off x="8985178" y="2878782"/>
+            <a:ext cx="871909" cy="114300"/>
+          </a:xfrm>
+          <a:prstGeom prst="rect">
+            <a:avLst/>
+          </a:prstGeom>
+          <a:noFill/>
+          <a:ln/>
+        </p:spPr>
+        <p:txBody>
+          <a:bodyPr wrap="square" lIns="0" tIns="114300" rIns="114300" bIns="0" rtlCol="0" anchor="ctr"/>
           <a:lstStyle/>
           <a:p>
             <a:pPr algn="r" indent="0" marL="0">
@@ -12447,17 +14007,17 @@
         </p:nvSpPr>
         <p:spPr>
           <a:xfrm>
-            <a:off x="9832683" y="2681608"/>
-            <a:ext cx="837878" cy="480120"/>
-          </a:xfrm>
-          <a:prstGeom prst="rect">
-            <a:avLst/>
-          </a:prstGeom>
-          <a:noFill/>
-          <a:ln/>
-        </p:spPr>
-        <p:txBody>
-          <a:bodyPr wrap="square" lIns="38100" tIns="114300" rIns="114300" bIns="38100" rtlCol="0" anchor="ctr"/>
+            <a:off x="9832683" y="2854970"/>
+            <a:ext cx="837878" cy="114300"/>
+          </a:xfrm>
+          <a:prstGeom prst="rect">
+            <a:avLst/>
+          </a:prstGeom>
+          <a:noFill/>
+          <a:ln/>
+        </p:spPr>
+        <p:txBody>
+          <a:bodyPr wrap="square" lIns="0" tIns="114300" rIns="114300" bIns="0" rtlCol="0" anchor="ctr"/>
           <a:lstStyle/>
           <a:p>
             <a:pPr algn="r" indent="0" marL="0">
@@ -12486,17 +14046,17 @@
         </p:nvSpPr>
         <p:spPr>
           <a:xfrm>
-            <a:off x="7468413" y="3161728"/>
-            <a:ext cx="839411" cy="480120"/>
-          </a:xfrm>
-          <a:prstGeom prst="rect">
-            <a:avLst/>
-          </a:prstGeom>
-          <a:noFill/>
-          <a:ln/>
-        </p:spPr>
-        <p:txBody>
-          <a:bodyPr wrap="square" lIns="38100" tIns="114300" rIns="114300" bIns="38100" rtlCol="0" anchor="ctr"/>
+            <a:off x="7468413" y="3358902"/>
+            <a:ext cx="839411" cy="114300"/>
+          </a:xfrm>
+          <a:prstGeom prst="rect">
+            <a:avLst/>
+          </a:prstGeom>
+          <a:noFill/>
+          <a:ln/>
+        </p:spPr>
+        <p:txBody>
+          <a:bodyPr wrap="square" lIns="0" tIns="114300" rIns="114300" bIns="0" rtlCol="0" anchor="ctr"/>
           <a:lstStyle/>
           <a:p>
             <a:pPr algn="r" indent="0" marL="0">
@@ -12525,17 +14085,17 @@
         </p:nvSpPr>
         <p:spPr>
           <a:xfrm>
-            <a:off x="8985178" y="3161728"/>
-            <a:ext cx="871909" cy="480120"/>
-          </a:xfrm>
-          <a:prstGeom prst="rect">
-            <a:avLst/>
-          </a:prstGeom>
-          <a:noFill/>
-          <a:ln/>
-        </p:spPr>
-        <p:txBody>
-          <a:bodyPr wrap="square" lIns="38100" tIns="114300" rIns="114300" bIns="38100" rtlCol="0" anchor="ctr"/>
+            <a:off x="8985178" y="3358902"/>
+            <a:ext cx="871909" cy="114300"/>
+          </a:xfrm>
+          <a:prstGeom prst="rect">
+            <a:avLst/>
+          </a:prstGeom>
+          <a:noFill/>
+          <a:ln/>
+        </p:spPr>
+        <p:txBody>
+          <a:bodyPr wrap="square" lIns="0" tIns="114300" rIns="114300" bIns="0" rtlCol="0" anchor="ctr"/>
           <a:lstStyle/>
           <a:p>
             <a:pPr algn="r" indent="0" marL="0">
@@ -12564,17 +14124,17 @@
         </p:nvSpPr>
         <p:spPr>
           <a:xfrm>
-            <a:off x="9832683" y="3161728"/>
-            <a:ext cx="837878" cy="480120"/>
-          </a:xfrm>
-          <a:prstGeom prst="rect">
-            <a:avLst/>
-          </a:prstGeom>
-          <a:noFill/>
-          <a:ln/>
-        </p:spPr>
-        <p:txBody>
-          <a:bodyPr wrap="square" lIns="38100" tIns="114300" rIns="114300" bIns="38100" rtlCol="0" anchor="ctr"/>
+            <a:off x="9832683" y="3335089"/>
+            <a:ext cx="837878" cy="114300"/>
+          </a:xfrm>
+          <a:prstGeom prst="rect">
+            <a:avLst/>
+          </a:prstGeom>
+          <a:noFill/>
+          <a:ln/>
+        </p:spPr>
+        <p:txBody>
+          <a:bodyPr wrap="square" lIns="0" tIns="114300" rIns="114300" bIns="0" rtlCol="0" anchor="ctr"/>
           <a:lstStyle/>
           <a:p>
             <a:pPr algn="r" indent="0" marL="0">
@@ -12603,17 +14163,17 @@
         </p:nvSpPr>
         <p:spPr>
           <a:xfrm>
-            <a:off x="7468413" y="3641847"/>
-            <a:ext cx="839411" cy="480120"/>
-          </a:xfrm>
-          <a:prstGeom prst="rect">
-            <a:avLst/>
-          </a:prstGeom>
-          <a:noFill/>
-          <a:ln/>
-        </p:spPr>
-        <p:txBody>
-          <a:bodyPr wrap="square" lIns="38100" tIns="114300" rIns="114300" bIns="38100" rtlCol="0" anchor="ctr"/>
+            <a:off x="7468413" y="3839021"/>
+            <a:ext cx="839411" cy="114300"/>
+          </a:xfrm>
+          <a:prstGeom prst="rect">
+            <a:avLst/>
+          </a:prstGeom>
+          <a:noFill/>
+          <a:ln/>
+        </p:spPr>
+        <p:txBody>
+          <a:bodyPr wrap="square" lIns="0" tIns="114300" rIns="114300" bIns="0" rtlCol="0" anchor="ctr"/>
           <a:lstStyle/>
           <a:p>
             <a:pPr algn="r" indent="0" marL="0">
@@ -12642,17 +14202,17 @@
         </p:nvSpPr>
         <p:spPr>
           <a:xfrm>
-            <a:off x="8985178" y="3641847"/>
-            <a:ext cx="871909" cy="480120"/>
-          </a:xfrm>
-          <a:prstGeom prst="rect">
-            <a:avLst/>
-          </a:prstGeom>
-          <a:noFill/>
-          <a:ln/>
-        </p:spPr>
-        <p:txBody>
-          <a:bodyPr wrap="square" lIns="38100" tIns="114300" rIns="114300" bIns="38100" rtlCol="0" anchor="ctr"/>
+            <a:off x="8985178" y="3839021"/>
+            <a:ext cx="871909" cy="114300"/>
+          </a:xfrm>
+          <a:prstGeom prst="rect">
+            <a:avLst/>
+          </a:prstGeom>
+          <a:noFill/>
+          <a:ln/>
+        </p:spPr>
+        <p:txBody>
+          <a:bodyPr wrap="square" lIns="0" tIns="114300" rIns="114300" bIns="0" rtlCol="0" anchor="ctr"/>
           <a:lstStyle/>
           <a:p>
             <a:pPr algn="r" indent="0" marL="0">
@@ -12681,17 +14241,17 @@
         </p:nvSpPr>
         <p:spPr>
           <a:xfrm>
-            <a:off x="9832683" y="3641847"/>
-            <a:ext cx="837878" cy="480120"/>
-          </a:xfrm>
-          <a:prstGeom prst="rect">
-            <a:avLst/>
-          </a:prstGeom>
-          <a:noFill/>
-          <a:ln/>
-        </p:spPr>
-        <p:txBody>
-          <a:bodyPr wrap="square" lIns="38100" tIns="114300" rIns="114300" bIns="38100" rtlCol="0" anchor="ctr"/>
+            <a:off x="9832683" y="3815209"/>
+            <a:ext cx="837878" cy="114300"/>
+          </a:xfrm>
+          <a:prstGeom prst="rect">
+            <a:avLst/>
+          </a:prstGeom>
+          <a:noFill/>
+          <a:ln/>
+        </p:spPr>
+        <p:txBody>
+          <a:bodyPr wrap="square" lIns="0" tIns="114300" rIns="114300" bIns="0" rtlCol="0" anchor="ctr"/>
           <a:lstStyle/>
           <a:p>
             <a:pPr algn="r" indent="0" marL="0">
@@ -12720,17 +14280,17 @@
         </p:nvSpPr>
         <p:spPr>
           <a:xfrm>
-            <a:off x="6748950" y="4121967"/>
-            <a:ext cx="743912" cy="480120"/>
-          </a:xfrm>
-          <a:prstGeom prst="rect">
-            <a:avLst/>
-          </a:prstGeom>
-          <a:noFill/>
-          <a:ln/>
-        </p:spPr>
-        <p:txBody>
-          <a:bodyPr wrap="square" lIns="38100" tIns="114300" rIns="114300" bIns="38100" rtlCol="0" anchor="ctr"/>
+            <a:off x="6748950" y="4319141"/>
+            <a:ext cx="743912" cy="114300"/>
+          </a:xfrm>
+          <a:prstGeom prst="rect">
+            <a:avLst/>
+          </a:prstGeom>
+          <a:noFill/>
+          <a:ln/>
+        </p:spPr>
+        <p:txBody>
+          <a:bodyPr wrap="square" lIns="0" tIns="114300" rIns="114300" bIns="0" rtlCol="0" anchor="ctr"/>
           <a:lstStyle/>
           <a:p>
             <a:pPr algn="r" indent="0" marL="0">
@@ -12759,17 +14319,17 @@
         </p:nvSpPr>
         <p:spPr>
           <a:xfrm>
-            <a:off x="8985178" y="4121967"/>
-            <a:ext cx="871909" cy="480120"/>
-          </a:xfrm>
-          <a:prstGeom prst="rect">
-            <a:avLst/>
-          </a:prstGeom>
-          <a:noFill/>
-          <a:ln/>
-        </p:spPr>
-        <p:txBody>
-          <a:bodyPr wrap="square" lIns="38100" tIns="114300" rIns="114300" bIns="38100" rtlCol="0" anchor="ctr"/>
+            <a:off x="8985178" y="4319141"/>
+            <a:ext cx="871909" cy="114300"/>
+          </a:xfrm>
+          <a:prstGeom prst="rect">
+            <a:avLst/>
+          </a:prstGeom>
+          <a:noFill/>
+          <a:ln/>
+        </p:spPr>
+        <p:txBody>
+          <a:bodyPr wrap="square" lIns="0" tIns="114300" rIns="114300" bIns="0" rtlCol="0" anchor="ctr"/>
           <a:lstStyle/>
           <a:p>
             <a:pPr algn="r" indent="0" marL="0">
@@ -12798,17 +14358,17 @@
         </p:nvSpPr>
         <p:spPr>
           <a:xfrm>
-            <a:off x="9832683" y="4121967"/>
-            <a:ext cx="837878" cy="480120"/>
-          </a:xfrm>
-          <a:prstGeom prst="rect">
-            <a:avLst/>
-          </a:prstGeom>
-          <a:noFill/>
-          <a:ln/>
-        </p:spPr>
-        <p:txBody>
-          <a:bodyPr wrap="square" lIns="38100" tIns="114300" rIns="114300" bIns="38100" rtlCol="0" anchor="ctr"/>
+            <a:off x="9832683" y="4295329"/>
+            <a:ext cx="837878" cy="114300"/>
+          </a:xfrm>
+          <a:prstGeom prst="rect">
+            <a:avLst/>
+          </a:prstGeom>
+          <a:noFill/>
+          <a:ln/>
+        </p:spPr>
+        <p:txBody>
+          <a:bodyPr wrap="square" lIns="0" tIns="114300" rIns="114300" bIns="0" rtlCol="0" anchor="ctr"/>
           <a:lstStyle/>
           <a:p>
             <a:pPr algn="r" indent="0" marL="0">
@@ -12837,17 +14397,17 @@
         </p:nvSpPr>
         <p:spPr>
           <a:xfrm>
-            <a:off x="6748950" y="4602086"/>
-            <a:ext cx="743912" cy="480120"/>
-          </a:xfrm>
-          <a:prstGeom prst="rect">
-            <a:avLst/>
-          </a:prstGeom>
-          <a:noFill/>
-          <a:ln/>
-        </p:spPr>
-        <p:txBody>
-          <a:bodyPr wrap="square" lIns="38100" tIns="114300" rIns="114300" bIns="38100" rtlCol="0" anchor="ctr"/>
+            <a:off x="6748950" y="4799261"/>
+            <a:ext cx="743912" cy="114300"/>
+          </a:xfrm>
+          <a:prstGeom prst="rect">
+            <a:avLst/>
+          </a:prstGeom>
+          <a:noFill/>
+          <a:ln/>
+        </p:spPr>
+        <p:txBody>
+          <a:bodyPr wrap="square" lIns="0" tIns="114300" rIns="114300" bIns="0" rtlCol="0" anchor="ctr"/>
           <a:lstStyle/>
           <a:p>
             <a:pPr algn="r" indent="0" marL="0">
@@ -12876,17 +14436,17 @@
         </p:nvSpPr>
         <p:spPr>
           <a:xfrm>
-            <a:off x="7468413" y="4602086"/>
-            <a:ext cx="839411" cy="480120"/>
-          </a:xfrm>
-          <a:prstGeom prst="rect">
-            <a:avLst/>
-          </a:prstGeom>
-          <a:noFill/>
-          <a:ln/>
-        </p:spPr>
-        <p:txBody>
-          <a:bodyPr wrap="square" lIns="38100" tIns="114300" rIns="114300" bIns="38100" rtlCol="0" anchor="ctr"/>
+            <a:off x="7468413" y="4799261"/>
+            <a:ext cx="839411" cy="114300"/>
+          </a:xfrm>
+          <a:prstGeom prst="rect">
+            <a:avLst/>
+          </a:prstGeom>
+          <a:noFill/>
+          <a:ln/>
+        </p:spPr>
+        <p:txBody>
+          <a:bodyPr wrap="square" lIns="0" tIns="114300" rIns="114300" bIns="0" rtlCol="0" anchor="ctr"/>
           <a:lstStyle/>
           <a:p>
             <a:pPr algn="r" indent="0" marL="0">
@@ -12915,17 +14475,17 @@
         </p:nvSpPr>
         <p:spPr>
           <a:xfrm>
-            <a:off x="8985178" y="4602086"/>
-            <a:ext cx="871909" cy="480120"/>
-          </a:xfrm>
-          <a:prstGeom prst="rect">
-            <a:avLst/>
-          </a:prstGeom>
-          <a:noFill/>
-          <a:ln/>
-        </p:spPr>
-        <p:txBody>
-          <a:bodyPr wrap="square" lIns="38100" tIns="114300" rIns="114300" bIns="38100" rtlCol="0" anchor="ctr"/>
+            <a:off x="8985178" y="4799261"/>
+            <a:ext cx="871909" cy="114300"/>
+          </a:xfrm>
+          <a:prstGeom prst="rect">
+            <a:avLst/>
+          </a:prstGeom>
+          <a:noFill/>
+          <a:ln/>
+        </p:spPr>
+        <p:txBody>
+          <a:bodyPr wrap="square" lIns="0" tIns="114300" rIns="114300" bIns="0" rtlCol="0" anchor="ctr"/>
           <a:lstStyle/>
           <a:p>
             <a:pPr algn="r" indent="0" marL="0">
@@ -12954,17 +14514,17 @@
         </p:nvSpPr>
         <p:spPr>
           <a:xfrm>
-            <a:off x="9832683" y="4602086"/>
-            <a:ext cx="837878" cy="480120"/>
-          </a:xfrm>
-          <a:prstGeom prst="rect">
-            <a:avLst/>
-          </a:prstGeom>
-          <a:noFill/>
-          <a:ln/>
-        </p:spPr>
-        <p:txBody>
-          <a:bodyPr wrap="square" lIns="38100" tIns="114300" rIns="114300" bIns="38100" rtlCol="0" anchor="ctr"/>
+            <a:off x="9832683" y="4775448"/>
+            <a:ext cx="837878" cy="114300"/>
+          </a:xfrm>
+          <a:prstGeom prst="rect">
+            <a:avLst/>
+          </a:prstGeom>
+          <a:noFill/>
+          <a:ln/>
+        </p:spPr>
+        <p:txBody>
+          <a:bodyPr wrap="square" lIns="0" tIns="114300" rIns="114300" bIns="0" rtlCol="0" anchor="ctr"/>
           <a:lstStyle/>
           <a:p>
             <a:pPr algn="r" indent="0" marL="0">
@@ -12980,6 +14540,357 @@
                 <a:cs typeface="Raleway" pitchFamily="34" charset="-120"/>
               </a:rPr>
               <a:t>23</a:t>
+            </a:r>
+            <a:endParaRPr lang="en-US" sz="792" dirty="0"/>
+          </a:p>
+        </p:txBody>
+      </p:sp>
+      <p:sp>
+        <p:nvSpPr>
+          <p:cNvPr id="125" name="Text 122"/>
+          <p:cNvSpPr/>
+          <p:nvPr/>
+        </p:nvSpPr>
+        <p:spPr>
+          <a:xfrm>
+            <a:off x="1176964" y="2400895"/>
+            <a:ext cx="743912" cy="114300"/>
+          </a:xfrm>
+          <a:prstGeom prst="rect">
+            <a:avLst/>
+          </a:prstGeom>
+          <a:noFill/>
+          <a:ln/>
+        </p:spPr>
+        <p:txBody>
+          <a:bodyPr wrap="square" lIns="0" tIns="114300" rIns="114300" bIns="0" rtlCol="0" anchor="ctr"/>
+          <a:lstStyle/>
+          <a:p>
+            <a:pPr algn="r" indent="0" marL="0">
+              <a:buNone/>
+            </a:pPr>
+            <a:r>
+              <a:rPr lang="en-US" sz="792" dirty="0">
+                <a:solidFill>
+                  <a:srgbClr val="333333"/>
+                </a:solidFill>
+                <a:latin typeface="Raleway" pitchFamily="34" charset="0"/>
+                <a:ea typeface="Raleway" pitchFamily="34" charset="-122"/>
+                <a:cs typeface="Raleway" pitchFamily="34" charset="-120"/>
+              </a:rPr>
+              <a:t>7</a:t>
+            </a:r>
+            <a:endParaRPr lang="en-US" sz="792" dirty="0"/>
+          </a:p>
+        </p:txBody>
+      </p:sp>
+      <p:sp>
+        <p:nvSpPr>
+          <p:cNvPr id="126" name="Text 123"/>
+          <p:cNvSpPr/>
+          <p:nvPr/>
+        </p:nvSpPr>
+        <p:spPr>
+          <a:xfrm>
+            <a:off x="1176964" y="2878782"/>
+            <a:ext cx="743912" cy="114300"/>
+          </a:xfrm>
+          <a:prstGeom prst="rect">
+            <a:avLst/>
+          </a:prstGeom>
+          <a:noFill/>
+          <a:ln/>
+        </p:spPr>
+        <p:txBody>
+          <a:bodyPr wrap="square" lIns="0" tIns="114300" rIns="114300" bIns="0" rtlCol="0" anchor="ctr"/>
+          <a:lstStyle/>
+          <a:p>
+            <a:pPr algn="r" indent="0" marL="0">
+              <a:buNone/>
+            </a:pPr>
+            <a:r>
+              <a:rPr lang="en-US" sz="792" dirty="0">
+                <a:solidFill>
+                  <a:srgbClr val="333333"/>
+                </a:solidFill>
+                <a:latin typeface="Raleway" pitchFamily="34" charset="0"/>
+                <a:ea typeface="Raleway" pitchFamily="34" charset="-122"/>
+                <a:cs typeface="Raleway" pitchFamily="34" charset="-120"/>
+              </a:rPr>
+              <a:t>7</a:t>
+            </a:r>
+            <a:endParaRPr lang="en-US" sz="792" dirty="0"/>
+          </a:p>
+        </p:txBody>
+      </p:sp>
+      <p:sp>
+        <p:nvSpPr>
+          <p:cNvPr id="127" name="Text 124"/>
+          <p:cNvSpPr/>
+          <p:nvPr/>
+        </p:nvSpPr>
+        <p:spPr>
+          <a:xfrm>
+            <a:off x="1176964" y="3358902"/>
+            <a:ext cx="743912" cy="114300"/>
+          </a:xfrm>
+          <a:prstGeom prst="rect">
+            <a:avLst/>
+          </a:prstGeom>
+          <a:noFill/>
+          <a:ln/>
+        </p:spPr>
+        <p:txBody>
+          <a:bodyPr wrap="square" lIns="0" tIns="114300" rIns="114300" bIns="0" rtlCol="0" anchor="ctr"/>
+          <a:lstStyle/>
+          <a:p>
+            <a:pPr algn="r" indent="0" marL="0">
+              <a:buNone/>
+            </a:pPr>
+            <a:r>
+              <a:rPr lang="en-US" sz="792" dirty="0">
+                <a:solidFill>
+                  <a:srgbClr val="333333"/>
+                </a:solidFill>
+                <a:latin typeface="Raleway" pitchFamily="34" charset="0"/>
+                <a:ea typeface="Raleway" pitchFamily="34" charset="-122"/>
+                <a:cs typeface="Raleway" pitchFamily="34" charset="-120"/>
+              </a:rPr>
+              <a:t>7</a:t>
+            </a:r>
+            <a:endParaRPr lang="en-US" sz="792" dirty="0"/>
+          </a:p>
+        </p:txBody>
+      </p:sp>
+      <p:sp>
+        <p:nvSpPr>
+          <p:cNvPr id="128" name="Text 125"/>
+          <p:cNvSpPr/>
+          <p:nvPr/>
+        </p:nvSpPr>
+        <p:spPr>
+          <a:xfrm>
+            <a:off x="1176964" y="3839021"/>
+            <a:ext cx="743912" cy="114300"/>
+          </a:xfrm>
+          <a:prstGeom prst="rect">
+            <a:avLst/>
+          </a:prstGeom>
+          <a:noFill/>
+          <a:ln/>
+        </p:spPr>
+        <p:txBody>
+          <a:bodyPr wrap="square" lIns="0" tIns="114300" rIns="114300" bIns="0" rtlCol="0" anchor="ctr"/>
+          <a:lstStyle/>
+          <a:p>
+            <a:pPr algn="r" indent="0" marL="0">
+              <a:buNone/>
+            </a:pPr>
+            <a:r>
+              <a:rPr lang="en-US" sz="792" dirty="0">
+                <a:solidFill>
+                  <a:srgbClr val="333333"/>
+                </a:solidFill>
+                <a:latin typeface="Raleway" pitchFamily="34" charset="0"/>
+                <a:ea typeface="Raleway" pitchFamily="34" charset="-122"/>
+                <a:cs typeface="Raleway" pitchFamily="34" charset="-120"/>
+              </a:rPr>
+              <a:t>7</a:t>
+            </a:r>
+            <a:endParaRPr lang="en-US" sz="792" dirty="0"/>
+          </a:p>
+        </p:txBody>
+      </p:sp>
+      <p:sp>
+        <p:nvSpPr>
+          <p:cNvPr id="129" name="Text 126"/>
+          <p:cNvSpPr/>
+          <p:nvPr/>
+        </p:nvSpPr>
+        <p:spPr>
+          <a:xfrm>
+            <a:off x="6748950" y="2400895"/>
+            <a:ext cx="743912" cy="114300"/>
+          </a:xfrm>
+          <a:prstGeom prst="rect">
+            <a:avLst/>
+          </a:prstGeom>
+          <a:noFill/>
+          <a:ln/>
+        </p:spPr>
+        <p:txBody>
+          <a:bodyPr wrap="square" lIns="0" tIns="114300" rIns="114300" bIns="0" rtlCol="0" anchor="ctr"/>
+          <a:lstStyle/>
+          <a:p>
+            <a:pPr algn="r" indent="0" marL="0">
+              <a:buNone/>
+            </a:pPr>
+            <a:r>
+              <a:rPr lang="en-US" sz="792" dirty="0">
+                <a:solidFill>
+                  <a:srgbClr val="333333"/>
+                </a:solidFill>
+                <a:latin typeface="Raleway" pitchFamily="34" charset="0"/>
+                <a:ea typeface="Raleway" pitchFamily="34" charset="-122"/>
+                <a:cs typeface="Raleway" pitchFamily="34" charset="-120"/>
+              </a:rPr>
+              <a:t>6</a:t>
+            </a:r>
+            <a:endParaRPr lang="en-US" sz="792" dirty="0"/>
+          </a:p>
+        </p:txBody>
+      </p:sp>
+      <p:sp>
+        <p:nvSpPr>
+          <p:cNvPr id="130" name="Text 127"/>
+          <p:cNvSpPr/>
+          <p:nvPr/>
+        </p:nvSpPr>
+        <p:spPr>
+          <a:xfrm>
+            <a:off x="6748950" y="2878782"/>
+            <a:ext cx="743912" cy="114300"/>
+          </a:xfrm>
+          <a:prstGeom prst="rect">
+            <a:avLst/>
+          </a:prstGeom>
+          <a:noFill/>
+          <a:ln/>
+        </p:spPr>
+        <p:txBody>
+          <a:bodyPr wrap="square" lIns="0" tIns="114300" rIns="114300" bIns="0" rtlCol="0" anchor="ctr"/>
+          <a:lstStyle/>
+          <a:p>
+            <a:pPr algn="r" indent="0" marL="0">
+              <a:buNone/>
+            </a:pPr>
+            <a:r>
+              <a:rPr lang="en-US" sz="792" dirty="0">
+                <a:solidFill>
+                  <a:srgbClr val="333333"/>
+                </a:solidFill>
+                <a:latin typeface="Raleway" pitchFamily="34" charset="0"/>
+                <a:ea typeface="Raleway" pitchFamily="34" charset="-122"/>
+                <a:cs typeface="Raleway" pitchFamily="34" charset="-120"/>
+              </a:rPr>
+              <a:t>9</a:t>
+            </a:r>
+            <a:endParaRPr lang="en-US" sz="792" dirty="0"/>
+          </a:p>
+        </p:txBody>
+      </p:sp>
+      <p:sp>
+        <p:nvSpPr>
+          <p:cNvPr id="131" name="Text 128"/>
+          <p:cNvSpPr/>
+          <p:nvPr/>
+        </p:nvSpPr>
+        <p:spPr>
+          <a:xfrm>
+            <a:off x="6748950" y="3358902"/>
+            <a:ext cx="743912" cy="114300"/>
+          </a:xfrm>
+          <a:prstGeom prst="rect">
+            <a:avLst/>
+          </a:prstGeom>
+          <a:noFill/>
+          <a:ln/>
+        </p:spPr>
+        <p:txBody>
+          <a:bodyPr wrap="square" lIns="0" tIns="114300" rIns="114300" bIns="0" rtlCol="0" anchor="ctr"/>
+          <a:lstStyle/>
+          <a:p>
+            <a:pPr algn="r" indent="0" marL="0">
+              <a:buNone/>
+            </a:pPr>
+            <a:r>
+              <a:rPr lang="en-US" sz="792" dirty="0">
+                <a:solidFill>
+                  <a:srgbClr val="333333"/>
+                </a:solidFill>
+                <a:latin typeface="Raleway" pitchFamily="34" charset="0"/>
+                <a:ea typeface="Raleway" pitchFamily="34" charset="-122"/>
+                <a:cs typeface="Raleway" pitchFamily="34" charset="-120"/>
+              </a:rPr>
+              <a:t>9</a:t>
+            </a:r>
+            <a:endParaRPr lang="en-US" sz="792" dirty="0"/>
+          </a:p>
+        </p:txBody>
+      </p:sp>
+      <p:sp>
+        <p:nvSpPr>
+          <p:cNvPr id="132" name="Text 129"/>
+          <p:cNvSpPr/>
+          <p:nvPr/>
+        </p:nvSpPr>
+        <p:spPr>
+          <a:xfrm>
+            <a:off x="6748950" y="3839021"/>
+            <a:ext cx="743912" cy="114300"/>
+          </a:xfrm>
+          <a:prstGeom prst="rect">
+            <a:avLst/>
+          </a:prstGeom>
+          <a:noFill/>
+          <a:ln/>
+        </p:spPr>
+        <p:txBody>
+          <a:bodyPr wrap="square" lIns="0" tIns="114300" rIns="114300" bIns="0" rtlCol="0" anchor="ctr"/>
+          <a:lstStyle/>
+          <a:p>
+            <a:pPr algn="r" indent="0" marL="0">
+              <a:buNone/>
+            </a:pPr>
+            <a:r>
+              <a:rPr lang="en-US" sz="792" dirty="0">
+                <a:solidFill>
+                  <a:srgbClr val="333333"/>
+                </a:solidFill>
+                <a:latin typeface="Raleway" pitchFamily="34" charset="0"/>
+                <a:ea typeface="Raleway" pitchFamily="34" charset="-122"/>
+                <a:cs typeface="Raleway" pitchFamily="34" charset="-120"/>
+              </a:rPr>
+              <a:t>9</a:t>
+            </a:r>
+            <a:endParaRPr lang="en-US" sz="792" dirty="0"/>
+          </a:p>
+        </p:txBody>
+      </p:sp>
+      <p:sp>
+        <p:nvSpPr>
+          <p:cNvPr id="133" name="Text 130"/>
+          <p:cNvSpPr/>
+          <p:nvPr/>
+        </p:nvSpPr>
+        <p:spPr>
+          <a:xfrm>
+            <a:off x="7468413" y="4319141"/>
+            <a:ext cx="839411" cy="114300"/>
+          </a:xfrm>
+          <a:prstGeom prst="rect">
+            <a:avLst/>
+          </a:prstGeom>
+          <a:noFill/>
+          <a:ln/>
+        </p:spPr>
+        <p:txBody>
+          <a:bodyPr wrap="square" lIns="0" tIns="114300" rIns="114300" bIns="0" rtlCol="0" anchor="ctr"/>
+          <a:lstStyle/>
+          <a:p>
+            <a:pPr algn="r" indent="0" marL="0">
+              <a:buNone/>
+            </a:pPr>
+            <a:r>
+              <a:rPr lang="en-US" sz="792" dirty="0">
+                <a:solidFill>
+                  <a:srgbClr val="333333"/>
+                </a:solidFill>
+                <a:latin typeface="Raleway" pitchFamily="34" charset="0"/>
+                <a:ea typeface="Raleway" pitchFamily="34" charset="-122"/>
+                <a:cs typeface="Raleway" pitchFamily="34" charset="-120"/>
+              </a:rPr>
+              <a:t>9</a:t>
             </a:r>
             <a:endParaRPr lang="en-US" sz="792" dirty="0"/>
           </a:p>
